--- a/Assignment4.1-MNIST_Presentation.pptx
+++ b/Assignment4.1-MNIST_Presentation.pptx
@@ -482,6 +482,90 @@
 </file>
 
 <file path=ppt/notesSlides/notesSlide1.xml><?xml version="1.0" encoding="utf-8"?>
+<p:notes xmlns:a="http://schemas.openxmlformats.org/drawingml/2006/main" xmlns:r="http://schemas.openxmlformats.org/officeDocument/2006/relationships" xmlns:p="http://schemas.openxmlformats.org/presentationml/2006/main">
+  <p:cSld>
+    <p:spTree>
+      <p:nvGrpSpPr>
+        <p:cNvPr id="1" name=""/>
+        <p:cNvGrpSpPr/>
+        <p:nvPr/>
+      </p:nvGrpSpPr>
+      <p:grpSpPr>
+        <a:xfrm>
+          <a:off x="0" y="0"/>
+          <a:ext cx="0" cy="0"/>
+          <a:chOff x="0" y="0"/>
+          <a:chExt cx="0" cy="0"/>
+        </a:xfrm>
+      </p:grpSpPr>
+      <p:sp>
+        <p:nvSpPr>
+          <p:cNvPr id="2" name="Slide Image Placeholder 1"/>
+          <p:cNvSpPr>
+            <a:spLocks noGrp="1" noRot="1" noChangeAspect="1"/>
+          </p:cNvSpPr>
+          <p:nvPr>
+            <p:ph type="sldImg"/>
+          </p:nvPr>
+        </p:nvSpPr>
+        <p:spPr/>
+      </p:sp>
+      <p:sp>
+        <p:nvSpPr>
+          <p:cNvPr id="3" name="Notes Placeholder 2"/>
+          <p:cNvSpPr>
+            <a:spLocks noGrp="1"/>
+          </p:cNvSpPr>
+          <p:nvPr>
+            <p:ph type="body" idx="1"/>
+          </p:nvPr>
+        </p:nvSpPr>
+        <p:spPr/>
+        <p:txBody>
+          <a:bodyPr/>
+          <a:lstStyle/>
+          <a:p>
+            <a:endParaRPr lang="en-US" dirty="0"/>
+          </a:p>
+        </p:txBody>
+      </p:sp>
+      <p:sp>
+        <p:nvSpPr>
+          <p:cNvPr id="4" name="Slide Number Placeholder 3"/>
+          <p:cNvSpPr>
+            <a:spLocks noGrp="1"/>
+          </p:cNvSpPr>
+          <p:nvPr>
+            <p:ph type="sldNum" sz="quarter" idx="5"/>
+          </p:nvPr>
+        </p:nvSpPr>
+        <p:spPr/>
+        <p:txBody>
+          <a:bodyPr/>
+          <a:lstStyle/>
+          <a:p>
+            <a:fld id="{87B91530-B6A9-9C4B-B6FD-24519C43BC1F}" type="slidenum">
+              <a:rPr lang="en-US" smtClean="0"/>
+              <a:t>2</a:t>
+            </a:fld>
+            <a:endParaRPr lang="en-US"/>
+          </a:p>
+        </p:txBody>
+      </p:sp>
+    </p:spTree>
+    <p:extLst>
+      <p:ext uri="{BB962C8B-B14F-4D97-AF65-F5344CB8AC3E}">
+        <p14:creationId xmlns:p14="http://schemas.microsoft.com/office/powerpoint/2010/main" val="3722943277"/>
+      </p:ext>
+    </p:extLst>
+  </p:cSld>
+  <p:clrMapOvr>
+    <a:masterClrMapping/>
+  </p:clrMapOvr>
+</p:notes>
+</file>
+
+<file path=ppt/notesSlides/notesSlide2.xml><?xml version="1.0" encoding="utf-8"?>
 <p:notes xmlns:a="http://schemas.openxmlformats.org/drawingml/2006/main" xmlns:r="http://schemas.openxmlformats.org/officeDocument/2006/relationships" xmlns:p="http://schemas.openxmlformats.org/presentationml/2006/main">
   <p:cSld>
     <p:spTree>
@@ -6628,7 +6712,7 @@
         </p:nvSpPr>
         <p:spPr>
           <a:xfrm>
-            <a:off x="457200" y="164592"/>
+            <a:off x="457200" y="307811"/>
             <a:ext cx="8229600" cy="685800"/>
           </a:xfrm>
           <a:prstGeom prst="rect">
@@ -6662,8 +6746,8 @@
         </p:nvSpPr>
         <p:spPr>
           <a:xfrm>
-            <a:off x="640080" y="1280160"/>
-            <a:ext cx="4937760" cy="2194560"/>
+            <a:off x="640079" y="1280160"/>
+            <a:ext cx="5320045" cy="1738938"/>
           </a:xfrm>
           <a:prstGeom prst="rect">
             <a:avLst/>
@@ -6678,7 +6762,7 @@
           <a:p>
             <a:pPr algn="l"/>
             <a:r>
-              <a:rPr sz="2100" b="1">
+              <a:rPr sz="2100" b="1" dirty="0">
                 <a:solidFill>
                   <a:srgbClr val="00C2FF"/>
                 </a:solidFill>
@@ -6693,7 +6777,7 @@
               </a:spcBef>
             </a:pPr>
             <a:r>
-              <a:rPr sz="1900">
+              <a:rPr sz="1900" dirty="0">
                 <a:solidFill>
                   <a:srgbClr val="CCE5FF"/>
                 </a:solidFill>
@@ -6708,7 +6792,7 @@
               </a:spcBef>
             </a:pPr>
             <a:r>
-              <a:rPr sz="1900">
+              <a:rPr sz="1900" dirty="0">
                 <a:solidFill>
                   <a:srgbClr val="CCE5FF"/>
                 </a:solidFill>
@@ -6723,7 +6807,7 @@
               </a:spcBef>
             </a:pPr>
             <a:r>
-              <a:rPr sz="1900">
+              <a:rPr sz="1900" dirty="0">
                 <a:solidFill>
                   <a:srgbClr val="CCE5FF"/>
                 </a:solidFill>
@@ -6738,7 +6822,7 @@
               </a:spcBef>
             </a:pPr>
             <a:r>
-              <a:rPr sz="1900">
+              <a:rPr sz="1900" dirty="0">
                 <a:solidFill>
                   <a:srgbClr val="CCE5FF"/>
                 </a:solidFill>
@@ -6748,16 +6832,291 @@
           </a:p>
         </p:txBody>
       </p:sp>
-      <p:sp>
-        <p:nvSpPr>
-          <p:cNvPr id="7" name="TextBox 6"/>
+      <mc:AlternateContent xmlns:mc="http://schemas.openxmlformats.org/markup-compatibility/2006">
+        <mc:Choice xmlns:a14="http://schemas.microsoft.com/office/drawing/2010/main" Requires="a14">
+          <p:sp>
+            <p:nvSpPr>
+              <p:cNvPr id="7" name="TextBox 6"/>
+              <p:cNvSpPr txBox="1"/>
+              <p:nvPr/>
+            </p:nvSpPr>
+            <p:spPr>
+              <a:xfrm>
+                <a:off x="640079" y="3291840"/>
+                <a:ext cx="5989591" cy="3366499"/>
+              </a:xfrm>
+              <a:prstGeom prst="rect">
+                <a:avLst/>
+              </a:prstGeom>
+              <a:noFill/>
+            </p:spPr>
+            <p:txBody>
+              <a:bodyPr wrap="square">
+                <a:spAutoFit/>
+              </a:bodyPr>
+              <a:lstStyle/>
+              <a:p>
+                <a:pPr algn="l"/>
+                <a:r>
+                  <a:rPr sz="2100" b="1" dirty="0">
+                    <a:solidFill>
+                      <a:srgbClr val="00C2FF"/>
+                    </a:solidFill>
+                  </a:rPr>
+                  <a:t>Data Preprocessing</a:t>
+                </a:r>
+              </a:p>
+              <a:p>
+                <a:pPr>
+                  <a:spcBef>
+                    <a:spcPts val="300"/>
+                  </a:spcBef>
+                </a:pPr>
+                <a:r>
+                  <a:rPr sz="1900" dirty="0">
+                    <a:solidFill>
+                      <a:srgbClr val="CCE5FF"/>
+                    </a:solidFill>
+                  </a:rPr>
+                  <a:t>• </a:t>
+                </a:r>
+                <a:r>
+                  <a:rPr lang="en-US" sz="1900" dirty="0" err="1">
+                    <a:solidFill>
+                      <a:srgbClr val="CCE5FF"/>
+                    </a:solidFill>
+                  </a:rPr>
+                  <a:t>ToTensor</a:t>
+                </a:r>
+                <a:r>
+                  <a:rPr lang="en-US" sz="1900" dirty="0">
+                    <a:solidFill>
+                      <a:srgbClr val="CCE5FF"/>
+                    </a:solidFill>
+                  </a:rPr>
+                  <a:t> converts pixel values from integers [0, 255] to floats [0,1]</a:t>
+                </a:r>
+              </a:p>
+              <a:p>
+                <a:pPr>
+                  <a:spcBef>
+                    <a:spcPts val="300"/>
+                  </a:spcBef>
+                </a:pPr>
+                <a:r>
+                  <a:rPr lang="en-US" sz="1900" dirty="0">
+                    <a:solidFill>
+                      <a:srgbClr val="CCE5FF"/>
+                    </a:solidFill>
+                  </a:rPr>
+                  <a:t>• Normalize(mean=0.5, std=0.5) — maps [0, 1] → [-1, 1] using </a:t>
+                </a:r>
+                <a14:m>
+                  <m:oMath xmlns:m="http://schemas.openxmlformats.org/officeDocument/2006/math">
+                    <m:sSup>
+                      <m:sSupPr>
+                        <m:ctrlPr>
+                          <a:rPr lang="ar-AE" sz="1900">
+                            <a:solidFill>
+                              <a:srgbClr val="CCE5FF"/>
+                            </a:solidFill>
+                          </a:rPr>
+                        </m:ctrlPr>
+                      </m:sSupPr>
+                      <m:e>
+                        <m:r>
+                          <a:rPr lang="ar-AE" sz="1900">
+                            <a:solidFill>
+                              <a:srgbClr val="CCE5FF"/>
+                            </a:solidFill>
+                          </a:rPr>
+                          <m:t>𝑥</m:t>
+                        </m:r>
+                      </m:e>
+                      <m:sup>
+                        <m:r>
+                          <a:rPr lang="ar-AE" sz="1900">
+                            <a:solidFill>
+                              <a:srgbClr val="CCE5FF"/>
+                            </a:solidFill>
+                          </a:rPr>
+                          <m:t>′</m:t>
+                        </m:r>
+                      </m:sup>
+                    </m:sSup>
+                    <m:r>
+                      <a:rPr lang="ar-AE" sz="1900">
+                        <a:solidFill>
+                          <a:srgbClr val="CCE5FF"/>
+                        </a:solidFill>
+                      </a:rPr>
+                      <m:t>=</m:t>
+                    </m:r>
+                    <m:f>
+                      <m:fPr>
+                        <m:ctrlPr>
+                          <a:rPr lang="ar-AE" sz="1900">
+                            <a:solidFill>
+                              <a:srgbClr val="CCE5FF"/>
+                            </a:solidFill>
+                          </a:rPr>
+                        </m:ctrlPr>
+                      </m:fPr>
+                      <m:num>
+                        <m:r>
+                          <a:rPr lang="ar-AE" sz="1900">
+                            <a:solidFill>
+                              <a:srgbClr val="CCE5FF"/>
+                            </a:solidFill>
+                          </a:rPr>
+                          <m:t>𝑥</m:t>
+                        </m:r>
+                        <m:r>
+                          <a:rPr lang="ar-AE" sz="1900">
+                            <a:solidFill>
+                              <a:srgbClr val="CCE5FF"/>
+                            </a:solidFill>
+                          </a:rPr>
+                          <m:t>−0.5</m:t>
+                        </m:r>
+                      </m:num>
+                      <m:den>
+                        <m:r>
+                          <a:rPr lang="ar-AE" sz="1900">
+                            <a:solidFill>
+                              <a:srgbClr val="CCE5FF"/>
+                            </a:solidFill>
+                          </a:rPr>
+                          <m:t>0.5</m:t>
+                        </m:r>
+                      </m:den>
+                    </m:f>
+                  </m:oMath>
+                </a14:m>
+                <a:br>
+                  <a:rPr lang="ar-AE" dirty="0"/>
+                </a:br>
+                <a:r>
+                  <a:rPr sz="1900" dirty="0">
+                    <a:solidFill>
+                      <a:srgbClr val="CCE5FF"/>
+                    </a:solidFill>
+                  </a:rPr>
+                  <a:t>•  Noisy split</a:t>
+                </a:r>
+                <a:r>
+                  <a:rPr lang="en-US" sz="1900" dirty="0">
+                    <a:solidFill>
+                      <a:srgbClr val="CCE5FF"/>
+                    </a:solidFill>
+                  </a:rPr>
+                  <a:t> adds Gaussian noise sampled from 𝑁(0, 0.2</a:t>
+                </a:r>
+                <a:r>
+                  <a:rPr lang="en-US" sz="1900" baseline="30000" dirty="0">
+                    <a:solidFill>
+                      <a:srgbClr val="CCE5FF"/>
+                    </a:solidFill>
+                  </a:rPr>
+                  <a:t>2</a:t>
+                </a:r>
+                <a:r>
+                  <a:rPr lang="en-US" sz="1900" dirty="0">
+                    <a:solidFill>
+                      <a:srgbClr val="CCE5FF"/>
+                    </a:solidFill>
+                  </a:rPr>
+                  <a:t>) ) to each pixel </a:t>
+                </a:r>
+              </a:p>
+              <a:p>
+                <a:pPr>
+                  <a:spcBef>
+                    <a:spcPts val="300"/>
+                  </a:spcBef>
+                </a:pPr>
+                <a:endParaRPr lang="en-US" sz="1900" dirty="0">
+                  <a:solidFill>
+                    <a:srgbClr val="CCE5FF"/>
+                  </a:solidFill>
+                </a:endParaRPr>
+              </a:p>
+              <a:p>
+                <a:pPr>
+                  <a:spcBef>
+                    <a:spcPts val="300"/>
+                  </a:spcBef>
+                </a:pPr>
+                <a:endParaRPr lang="en-US" sz="1900" dirty="0">
+                  <a:solidFill>
+                    <a:srgbClr val="CCE5FF"/>
+                  </a:solidFill>
+                </a:endParaRPr>
+              </a:p>
+              <a:p>
+                <a:pPr>
+                  <a:spcBef>
+                    <a:spcPts val="300"/>
+                  </a:spcBef>
+                </a:pPr>
+                <a:endParaRPr sz="1900" dirty="0">
+                  <a:solidFill>
+                    <a:srgbClr val="CCE5FF"/>
+                  </a:solidFill>
+                </a:endParaRPr>
+              </a:p>
+            </p:txBody>
+          </p:sp>
+        </mc:Choice>
+        <mc:Fallback>
+          <p:sp>
+            <p:nvSpPr>
+              <p:cNvPr id="7" name="TextBox 6"/>
+              <p:cNvSpPr txBox="1">
+                <a:spLocks noRot="1" noChangeAspect="1" noMove="1" noResize="1" noEditPoints="1" noAdjustHandles="1" noChangeArrowheads="1" noChangeShapeType="1" noTextEdit="1"/>
+              </p:cNvSpPr>
+              <p:nvPr/>
+            </p:nvSpPr>
+            <p:spPr>
+              <a:xfrm>
+                <a:off x="640079" y="3291840"/>
+                <a:ext cx="5989591" cy="3366499"/>
+              </a:xfrm>
+              <a:prstGeom prst="rect">
+                <a:avLst/>
+              </a:prstGeom>
+              <a:blipFill>
+                <a:blip r:embed="rId3"/>
+                <a:stretch>
+                  <a:fillRect l="-1268" t="-1128"/>
+                </a:stretch>
+              </a:blipFill>
+            </p:spPr>
+            <p:txBody>
+              <a:bodyPr/>
+              <a:lstStyle/>
+              <a:p>
+                <a:r>
+                  <a:rPr lang="en-US">
+                    <a:noFill/>
+                  </a:rPr>
+                  <a:t> </a:t>
+                </a:r>
+              </a:p>
+            </p:txBody>
+          </p:sp>
+        </mc:Fallback>
+      </mc:AlternateContent>
+      <p:sp>
+        <p:nvSpPr>
+          <p:cNvPr id="9" name="TextBox 8"/>
           <p:cNvSpPr txBox="1"/>
           <p:nvPr/>
         </p:nvSpPr>
         <p:spPr>
           <a:xfrm>
-            <a:off x="640080" y="3291840"/>
-            <a:ext cx="4937760" cy="2560320"/>
+            <a:off x="6400800" y="1280160"/>
+            <a:ext cx="5029200" cy="457200"/>
           </a:xfrm>
           <a:prstGeom prst="rect">
             <a:avLst/>
@@ -6772,86 +7131,26 @@
           <a:p>
             <a:pPr algn="l"/>
             <a:r>
-              <a:rPr sz="2100" b="1">
+              <a:rPr sz="1800" b="1" i="0">
                 <a:solidFill>
                   <a:srgbClr val="00C2FF"/>
                 </a:solidFill>
               </a:rPr>
-              <a:t>Data Preprocessing</a:t>
-            </a:r>
-          </a:p>
-          <a:p>
-            <a:pPr algn="l">
-              <a:spcBef>
-                <a:spcPts val="300"/>
-              </a:spcBef>
-            </a:pPr>
-            <a:r>
-              <a:rPr sz="1900">
-                <a:solidFill>
-                  <a:srgbClr val="CCE5FF"/>
-                </a:solidFill>
-              </a:rPr>
-              <a:t>•  Normalize to [-1, 1]  via mean=0.5, std=0.5</a:t>
-            </a:r>
-          </a:p>
-          <a:p>
-            <a:pPr algn="l">
-              <a:spcBef>
-                <a:spcPts val="300"/>
-              </a:spcBef>
-            </a:pPr>
-            <a:r>
-              <a:rPr sz="1900">
-                <a:solidFill>
-                  <a:srgbClr val="CCE5FF"/>
-                </a:solidFill>
-              </a:rPr>
-              <a:t>•  Noisy split: add Gaussian noise (σ=0.2)</a:t>
-            </a:r>
-          </a:p>
-          <a:p>
-            <a:pPr algn="l">
-              <a:spcBef>
-                <a:spcPts val="300"/>
-              </a:spcBef>
-            </a:pPr>
-            <a:r>
-              <a:rPr sz="1900">
-                <a:solidFill>
-                  <a:srgbClr val="CCE5FF"/>
-                </a:solidFill>
-              </a:rPr>
-              <a:t>•  Batch size: 64 train  /  1000 test</a:t>
-            </a:r>
-          </a:p>
-          <a:p>
-            <a:pPr algn="l">
-              <a:spcBef>
-                <a:spcPts val="300"/>
-              </a:spcBef>
-            </a:pPr>
-            <a:r>
-              <a:rPr sz="1900">
-                <a:solidFill>
-                  <a:srgbClr val="CCE5FF"/>
-                </a:solidFill>
-              </a:rPr>
-              <a:t>•  Shuffle training data each epoch</a:t>
-            </a:r>
-          </a:p>
-        </p:txBody>
-      </p:sp>
-      <p:sp>
-        <p:nvSpPr>
-          <p:cNvPr id="9" name="TextBox 8"/>
+              <a:t>Sample Digits</a:t>
+            </a:r>
+          </a:p>
+        </p:txBody>
+      </p:sp>
+      <p:sp>
+        <p:nvSpPr>
+          <p:cNvPr id="11" name="TextBox 10"/>
           <p:cNvSpPr txBox="1"/>
           <p:nvPr/>
         </p:nvSpPr>
         <p:spPr>
           <a:xfrm>
-            <a:off x="6400800" y="1280160"/>
-            <a:ext cx="5029200" cy="457200"/>
+            <a:off x="6400800" y="5725443"/>
+            <a:ext cx="5029200" cy="369332"/>
           </a:xfrm>
           <a:prstGeom prst="rect">
             <a:avLst/>
@@ -6864,43 +7163,9 @@
           </a:bodyPr>
           <a:lstStyle/>
           <a:p>
-            <a:pPr algn="l"/>
-            <a:r>
-              <a:rPr sz="1800" b="1" i="0">
-                <a:solidFill>
-                  <a:srgbClr val="00C2FF"/>
-                </a:solidFill>
-              </a:rPr>
-              <a:t>Sample Digits</a:t>
-            </a:r>
-          </a:p>
-        </p:txBody>
-      </p:sp>
-      <p:sp>
-        <p:nvSpPr>
-          <p:cNvPr id="11" name="TextBox 10"/>
-          <p:cNvSpPr txBox="1"/>
-          <p:nvPr/>
-        </p:nvSpPr>
-        <p:spPr>
-          <a:xfrm>
-            <a:off x="6629671" y="5770438"/>
-            <a:ext cx="5029200" cy="307777"/>
-          </a:xfrm>
-          <a:prstGeom prst="rect">
-            <a:avLst/>
-          </a:prstGeom>
-          <a:noFill/>
-        </p:spPr>
-        <p:txBody>
-          <a:bodyPr wrap="square">
-            <a:spAutoFit/>
-          </a:bodyPr>
-          <a:lstStyle/>
-          <a:p>
             <a:pPr algn="ctr"/>
             <a:r>
-              <a:rPr sz="1400" b="0" i="1" dirty="0">
+              <a:rPr b="0" dirty="0">
                 <a:solidFill>
                   <a:srgbClr val="AABBCC"/>
                 </a:solidFill>
@@ -6925,7 +7190,7 @@
           <p:nvPr/>
         </p:nvPicPr>
         <p:blipFill>
-          <a:blip r:embed="rId2"/>
+          <a:blip r:embed="rId4"/>
           <a:stretch>
             <a:fillRect/>
           </a:stretch>
@@ -6955,7 +7220,7 @@
           <p:nvPr/>
         </p:nvPicPr>
         <p:blipFill>
-          <a:blip r:embed="rId3"/>
+          <a:blip r:embed="rId5"/>
           <a:stretch>
             <a:fillRect/>
           </a:stretch>
@@ -7038,7 +7303,7 @@
         <p:spPr>
           <a:xfrm>
             <a:off x="457200" y="1051560"/>
-            <a:ext cx="5303520" cy="2031325"/>
+            <a:ext cx="5811012" cy="3247043"/>
           </a:xfrm>
           <a:prstGeom prst="rect">
             <a:avLst/>
@@ -7051,7 +7316,6 @@
           </a:bodyPr>
           <a:lstStyle/>
           <a:p>
-            <a:pPr algn="l"/>
             <a:r>
               <a:rPr sz="2100" b="1" dirty="0">
                 <a:solidFill>
@@ -7060,6 +7324,592 @@
               </a:rPr>
               <a:t>Overview</a:t>
             </a:r>
+            <a:r>
+              <a:rPr lang="en-US" sz="2100" b="1" dirty="0">
+                <a:solidFill>
+                  <a:srgbClr val="00C2FF"/>
+                </a:solidFill>
+              </a:rPr>
+              <a:t> - No spatial awareness — pixels treated independently</a:t>
+            </a:r>
+            <a:endParaRPr sz="2100" b="1" dirty="0">
+              <a:solidFill>
+                <a:srgbClr val="00C2FF"/>
+              </a:solidFill>
+            </a:endParaRPr>
+          </a:p>
+          <a:p>
+            <a:r>
+              <a:rPr sz="1900" dirty="0">
+                <a:solidFill>
+                  <a:srgbClr val="CCE5FF"/>
+                </a:solidFill>
+              </a:rPr>
+              <a:t>•</a:t>
+            </a:r>
+            <a:r>
+              <a:rPr lang="en-US" sz="1900" dirty="0">
+                <a:solidFill>
+                  <a:srgbClr val="CCE5FF"/>
+                </a:solidFill>
+              </a:rPr>
+              <a:t> </a:t>
+            </a:r>
+            <a:r>
+              <a:rPr lang="en-US" dirty="0">
+                <a:solidFill>
+                  <a:srgbClr val="CCE5FF"/>
+                </a:solidFill>
+              </a:rPr>
+              <a:t>The Multi-Layer Perceptron (MLP) is a fully connected neural network that processes input data as a one-dimensional </a:t>
+            </a:r>
+            <a:r>
+              <a:rPr lang="en-US" dirty="0" err="1">
+                <a:solidFill>
+                  <a:srgbClr val="CCE5FF"/>
+                </a:solidFill>
+              </a:rPr>
+              <a:t>vector.Since</a:t>
+            </a:r>
+            <a:r>
+              <a:rPr lang="en-US" dirty="0">
+                <a:solidFill>
+                  <a:srgbClr val="CCE5FF"/>
+                </a:solidFill>
+              </a:rPr>
+              <a:t> an MLP cannot directly handle 2D spatial structure, the image is first flattened into a vector of length 784 (28 × 28).</a:t>
+            </a:r>
+          </a:p>
+          <a:p>
+            <a:r>
+              <a:rPr lang="en-US" dirty="0">
+                <a:solidFill>
+                  <a:srgbClr val="CCE5FF"/>
+                </a:solidFill>
+              </a:rPr>
+              <a:t>•  Simple, fast baseline</a:t>
+            </a:r>
+          </a:p>
+          <a:p>
+            <a:endParaRPr lang="en-US" dirty="0"/>
+          </a:p>
+          <a:p>
+            <a:br>
+              <a:rPr lang="en-US" dirty="0"/>
+            </a:br>
+            <a:endParaRPr lang="en-US" dirty="0"/>
+          </a:p>
+        </p:txBody>
+      </p:sp>
+      <p:grpSp>
+        <p:nvGrpSpPr>
+          <p:cNvPr id="21" name="Group 20">
+            <a:extLst>
+              <a:ext uri="{FF2B5EF4-FFF2-40B4-BE49-F238E27FC236}">
+                <a16:creationId xmlns:a16="http://schemas.microsoft.com/office/drawing/2014/main" id="{FC04B9D1-3C76-4374-DA56-2C7546B1B525}"/>
+              </a:ext>
+            </a:extLst>
+          </p:cNvPr>
+          <p:cNvGrpSpPr/>
+          <p:nvPr/>
+        </p:nvGrpSpPr>
+        <p:grpSpPr>
+          <a:xfrm>
+            <a:off x="594360" y="4963649"/>
+            <a:ext cx="11247120" cy="1463040"/>
+            <a:chOff x="457200" y="3520440"/>
+            <a:chExt cx="11247120" cy="1463040"/>
+          </a:xfrm>
+        </p:grpSpPr>
+        <p:sp>
+          <p:nvSpPr>
+            <p:cNvPr id="6" name="Rectangle 5"/>
+            <p:cNvSpPr/>
+            <p:nvPr/>
+          </p:nvSpPr>
+          <p:spPr>
+            <a:xfrm>
+              <a:off x="1549908" y="3931920"/>
+              <a:ext cx="2011680" cy="1051560"/>
+            </a:xfrm>
+            <a:prstGeom prst="rect">
+              <a:avLst/>
+            </a:prstGeom>
+            <a:solidFill>
+              <a:srgbClr val="00C2FF"/>
+            </a:solidFill>
+            <a:ln>
+              <a:noFill/>
+            </a:ln>
+          </p:spPr>
+          <p:style>
+            <a:lnRef idx="1">
+              <a:schemeClr val="accent1"/>
+            </a:lnRef>
+            <a:fillRef idx="3">
+              <a:schemeClr val="accent1"/>
+            </a:fillRef>
+            <a:effectRef idx="2">
+              <a:schemeClr val="accent1"/>
+            </a:effectRef>
+            <a:fontRef idx="minor">
+              <a:schemeClr val="lt1"/>
+            </a:fontRef>
+          </p:style>
+          <p:txBody>
+            <a:bodyPr rtlCol="0" anchor="ctr"/>
+            <a:lstStyle/>
+            <a:p>
+              <a:pPr algn="ctr"/>
+              <a:endParaRPr/>
+            </a:p>
+          </p:txBody>
+        </p:sp>
+        <p:sp>
+          <p:nvSpPr>
+            <p:cNvPr id="7" name="TextBox 6"/>
+            <p:cNvSpPr txBox="1"/>
+            <p:nvPr/>
+          </p:nvSpPr>
+          <p:spPr>
+            <a:xfrm>
+              <a:off x="1549908" y="4069080"/>
+              <a:ext cx="2011680" cy="914400"/>
+            </a:xfrm>
+            <a:prstGeom prst="rect">
+              <a:avLst/>
+            </a:prstGeom>
+            <a:noFill/>
+          </p:spPr>
+          <p:txBody>
+            <a:bodyPr wrap="square">
+              <a:spAutoFit/>
+            </a:bodyPr>
+            <a:lstStyle/>
+            <a:p>
+              <a:pPr algn="ctr"/>
+              <a:r>
+                <a:rPr sz="1500" b="1" i="0">
+                  <a:solidFill>
+                    <a:srgbClr val="FFFFFF"/>
+                  </a:solidFill>
+                </a:rPr>
+                <a:t>Input
+784</a:t>
+              </a:r>
+            </a:p>
+          </p:txBody>
+        </p:sp>
+        <p:sp>
+          <p:nvSpPr>
+            <p:cNvPr id="8" name="TextBox 7"/>
+            <p:cNvSpPr txBox="1"/>
+            <p:nvPr/>
+          </p:nvSpPr>
+          <p:spPr>
+            <a:xfrm>
+              <a:off x="3561588" y="4251960"/>
+              <a:ext cx="347472" cy="457200"/>
+            </a:xfrm>
+            <a:prstGeom prst="rect">
+              <a:avLst/>
+            </a:prstGeom>
+            <a:noFill/>
+          </p:spPr>
+          <p:txBody>
+            <a:bodyPr wrap="square">
+              <a:spAutoFit/>
+            </a:bodyPr>
+            <a:lstStyle/>
+            <a:p>
+              <a:pPr algn="ctr"/>
+              <a:r>
+                <a:rPr sz="2400" b="0" i="0">
+                  <a:solidFill>
+                    <a:srgbClr val="AABBCC"/>
+                  </a:solidFill>
+                </a:rPr>
+                <a:t>→</a:t>
+              </a:r>
+            </a:p>
+          </p:txBody>
+        </p:sp>
+        <p:sp>
+          <p:nvSpPr>
+            <p:cNvPr id="9" name="Rectangle 8"/>
+            <p:cNvSpPr/>
+            <p:nvPr/>
+          </p:nvSpPr>
+          <p:spPr>
+            <a:xfrm>
+              <a:off x="3909060" y="3931920"/>
+              <a:ext cx="2011680" cy="1051560"/>
+            </a:xfrm>
+            <a:prstGeom prst="rect">
+              <a:avLst/>
+            </a:prstGeom>
+            <a:solidFill>
+              <a:srgbClr val="1A6BAA"/>
+            </a:solidFill>
+            <a:ln>
+              <a:noFill/>
+            </a:ln>
+          </p:spPr>
+          <p:style>
+            <a:lnRef idx="1">
+              <a:schemeClr val="accent1"/>
+            </a:lnRef>
+            <a:fillRef idx="3">
+              <a:schemeClr val="accent1"/>
+            </a:fillRef>
+            <a:effectRef idx="2">
+              <a:schemeClr val="accent1"/>
+            </a:effectRef>
+            <a:fontRef idx="minor">
+              <a:schemeClr val="lt1"/>
+            </a:fontRef>
+          </p:style>
+          <p:txBody>
+            <a:bodyPr rtlCol="0" anchor="ctr"/>
+            <a:lstStyle/>
+            <a:p>
+              <a:pPr algn="ctr"/>
+              <a:endParaRPr/>
+            </a:p>
+          </p:txBody>
+        </p:sp>
+        <p:sp>
+          <p:nvSpPr>
+            <p:cNvPr id="10" name="TextBox 9"/>
+            <p:cNvSpPr txBox="1"/>
+            <p:nvPr/>
+          </p:nvSpPr>
+          <p:spPr>
+            <a:xfrm>
+              <a:off x="3909060" y="4069080"/>
+              <a:ext cx="2011680" cy="914400"/>
+            </a:xfrm>
+            <a:prstGeom prst="rect">
+              <a:avLst/>
+            </a:prstGeom>
+            <a:noFill/>
+          </p:spPr>
+          <p:txBody>
+            <a:bodyPr wrap="square">
+              <a:spAutoFit/>
+            </a:bodyPr>
+            <a:lstStyle/>
+            <a:p>
+              <a:pPr algn="ctr"/>
+              <a:r>
+                <a:rPr sz="1500" b="1" i="0">
+                  <a:solidFill>
+                    <a:srgbClr val="FFFFFF"/>
+                  </a:solidFill>
+                </a:rPr>
+                <a:t>Hidden 1
+256  ReLU</a:t>
+              </a:r>
+            </a:p>
+          </p:txBody>
+        </p:sp>
+        <p:sp>
+          <p:nvSpPr>
+            <p:cNvPr id="11" name="TextBox 10"/>
+            <p:cNvSpPr txBox="1"/>
+            <p:nvPr/>
+          </p:nvSpPr>
+          <p:spPr>
+            <a:xfrm>
+              <a:off x="5920740" y="4251960"/>
+              <a:ext cx="347472" cy="457200"/>
+            </a:xfrm>
+            <a:prstGeom prst="rect">
+              <a:avLst/>
+            </a:prstGeom>
+            <a:noFill/>
+          </p:spPr>
+          <p:txBody>
+            <a:bodyPr wrap="square">
+              <a:spAutoFit/>
+            </a:bodyPr>
+            <a:lstStyle/>
+            <a:p>
+              <a:pPr algn="ctr"/>
+              <a:r>
+                <a:rPr sz="2400" b="0" i="0">
+                  <a:solidFill>
+                    <a:srgbClr val="AABBCC"/>
+                  </a:solidFill>
+                </a:rPr>
+                <a:t>→</a:t>
+              </a:r>
+            </a:p>
+          </p:txBody>
+        </p:sp>
+        <p:sp>
+          <p:nvSpPr>
+            <p:cNvPr id="12" name="Rectangle 11"/>
+            <p:cNvSpPr/>
+            <p:nvPr/>
+          </p:nvSpPr>
+          <p:spPr>
+            <a:xfrm>
+              <a:off x="6268212" y="3931920"/>
+              <a:ext cx="2011680" cy="1051560"/>
+            </a:xfrm>
+            <a:prstGeom prst="rect">
+              <a:avLst/>
+            </a:prstGeom>
+            <a:solidFill>
+              <a:srgbClr val="1A6BAA"/>
+            </a:solidFill>
+            <a:ln>
+              <a:noFill/>
+            </a:ln>
+          </p:spPr>
+          <p:style>
+            <a:lnRef idx="1">
+              <a:schemeClr val="accent1"/>
+            </a:lnRef>
+            <a:fillRef idx="3">
+              <a:schemeClr val="accent1"/>
+            </a:fillRef>
+            <a:effectRef idx="2">
+              <a:schemeClr val="accent1"/>
+            </a:effectRef>
+            <a:fontRef idx="minor">
+              <a:schemeClr val="lt1"/>
+            </a:fontRef>
+          </p:style>
+          <p:txBody>
+            <a:bodyPr rtlCol="0" anchor="ctr"/>
+            <a:lstStyle/>
+            <a:p>
+              <a:pPr algn="ctr"/>
+              <a:endParaRPr/>
+            </a:p>
+          </p:txBody>
+        </p:sp>
+        <p:sp>
+          <p:nvSpPr>
+            <p:cNvPr id="13" name="TextBox 12"/>
+            <p:cNvSpPr txBox="1"/>
+            <p:nvPr/>
+          </p:nvSpPr>
+          <p:spPr>
+            <a:xfrm>
+              <a:off x="6268212" y="4069080"/>
+              <a:ext cx="2011680" cy="914400"/>
+            </a:xfrm>
+            <a:prstGeom prst="rect">
+              <a:avLst/>
+            </a:prstGeom>
+            <a:noFill/>
+          </p:spPr>
+          <p:txBody>
+            <a:bodyPr wrap="square">
+              <a:spAutoFit/>
+            </a:bodyPr>
+            <a:lstStyle/>
+            <a:p>
+              <a:pPr algn="ctr"/>
+              <a:r>
+                <a:rPr sz="1500" b="1" i="0">
+                  <a:solidFill>
+                    <a:srgbClr val="FFFFFF"/>
+                  </a:solidFill>
+                </a:rPr>
+                <a:t>Hidden 2
+128  ReLU</a:t>
+              </a:r>
+            </a:p>
+          </p:txBody>
+        </p:sp>
+        <p:sp>
+          <p:nvSpPr>
+            <p:cNvPr id="14" name="TextBox 13"/>
+            <p:cNvSpPr txBox="1"/>
+            <p:nvPr/>
+          </p:nvSpPr>
+          <p:spPr>
+            <a:xfrm>
+              <a:off x="8279892" y="4251960"/>
+              <a:ext cx="347472" cy="457200"/>
+            </a:xfrm>
+            <a:prstGeom prst="rect">
+              <a:avLst/>
+            </a:prstGeom>
+            <a:noFill/>
+          </p:spPr>
+          <p:txBody>
+            <a:bodyPr wrap="square">
+              <a:spAutoFit/>
+            </a:bodyPr>
+            <a:lstStyle/>
+            <a:p>
+              <a:pPr algn="ctr"/>
+              <a:r>
+                <a:rPr sz="2400" b="0" i="0">
+                  <a:solidFill>
+                    <a:srgbClr val="AABBCC"/>
+                  </a:solidFill>
+                </a:rPr>
+                <a:t>→</a:t>
+              </a:r>
+            </a:p>
+          </p:txBody>
+        </p:sp>
+        <p:sp>
+          <p:nvSpPr>
+            <p:cNvPr id="15" name="Rectangle 14"/>
+            <p:cNvSpPr/>
+            <p:nvPr/>
+          </p:nvSpPr>
+          <p:spPr>
+            <a:xfrm>
+              <a:off x="8627364" y="3931920"/>
+              <a:ext cx="2011680" cy="1051560"/>
+            </a:xfrm>
+            <a:prstGeom prst="rect">
+              <a:avLst/>
+            </a:prstGeom>
+            <a:solidFill>
+              <a:srgbClr val="4CAF50"/>
+            </a:solidFill>
+            <a:ln>
+              <a:noFill/>
+            </a:ln>
+          </p:spPr>
+          <p:style>
+            <a:lnRef idx="1">
+              <a:schemeClr val="accent1"/>
+            </a:lnRef>
+            <a:fillRef idx="3">
+              <a:schemeClr val="accent1"/>
+            </a:fillRef>
+            <a:effectRef idx="2">
+              <a:schemeClr val="accent1"/>
+            </a:effectRef>
+            <a:fontRef idx="minor">
+              <a:schemeClr val="lt1"/>
+            </a:fontRef>
+          </p:style>
+          <p:txBody>
+            <a:bodyPr rtlCol="0" anchor="ctr"/>
+            <a:lstStyle/>
+            <a:p>
+              <a:pPr algn="ctr"/>
+              <a:endParaRPr/>
+            </a:p>
+          </p:txBody>
+        </p:sp>
+        <p:sp>
+          <p:nvSpPr>
+            <p:cNvPr id="16" name="TextBox 15"/>
+            <p:cNvSpPr txBox="1"/>
+            <p:nvPr/>
+          </p:nvSpPr>
+          <p:spPr>
+            <a:xfrm>
+              <a:off x="8627364" y="4069080"/>
+              <a:ext cx="2011680" cy="914400"/>
+            </a:xfrm>
+            <a:prstGeom prst="rect">
+              <a:avLst/>
+            </a:prstGeom>
+            <a:noFill/>
+          </p:spPr>
+          <p:txBody>
+            <a:bodyPr wrap="square">
+              <a:spAutoFit/>
+            </a:bodyPr>
+            <a:lstStyle/>
+            <a:p>
+              <a:pPr algn="ctr"/>
+              <a:r>
+                <a:rPr sz="1500" b="1" i="0">
+                  <a:solidFill>
+                    <a:srgbClr val="FFFFFF"/>
+                  </a:solidFill>
+                </a:rPr>
+                <a:t>Output
+10 classes</a:t>
+              </a:r>
+            </a:p>
+          </p:txBody>
+        </p:sp>
+        <p:sp>
+          <p:nvSpPr>
+            <p:cNvPr id="17" name="TextBox 16"/>
+            <p:cNvSpPr txBox="1"/>
+            <p:nvPr/>
+          </p:nvSpPr>
+          <p:spPr>
+            <a:xfrm>
+              <a:off x="457200" y="3520440"/>
+              <a:ext cx="11247120" cy="347472"/>
+            </a:xfrm>
+            <a:prstGeom prst="rect">
+              <a:avLst/>
+            </a:prstGeom>
+            <a:noFill/>
+          </p:spPr>
+          <p:txBody>
+            <a:bodyPr wrap="square">
+              <a:spAutoFit/>
+            </a:bodyPr>
+            <a:lstStyle/>
+            <a:p>
+              <a:pPr algn="ctr"/>
+              <a:r>
+                <a:rPr sz="1600" b="0" i="1" dirty="0">
+                  <a:solidFill>
+                    <a:srgbClr val="FFD700"/>
+                  </a:solidFill>
+                </a:rPr>
+                <a:t>Flatten step: 28×28 → 784-dim vector</a:t>
+              </a:r>
+            </a:p>
+          </p:txBody>
+        </p:sp>
+      </p:grpSp>
+      <p:sp>
+        <p:nvSpPr>
+          <p:cNvPr id="18" name="TextBox 17"/>
+          <p:cNvSpPr txBox="1"/>
+          <p:nvPr/>
+        </p:nvSpPr>
+        <p:spPr>
+          <a:xfrm>
+            <a:off x="6217920" y="1051560"/>
+            <a:ext cx="5303520" cy="715581"/>
+          </a:xfrm>
+          <a:prstGeom prst="rect">
+            <a:avLst/>
+          </a:prstGeom>
+          <a:noFill/>
+        </p:spPr>
+        <p:txBody>
+          <a:bodyPr wrap="square">
+            <a:spAutoFit/>
+          </a:bodyPr>
+          <a:lstStyle/>
+          <a:p>
+            <a:pPr algn="l"/>
+            <a:r>
+              <a:rPr lang="en-US" sz="2000" b="1" dirty="0">
+                <a:solidFill>
+                  <a:srgbClr val="FFD700"/>
+                </a:solidFill>
+              </a:rPr>
+              <a:t>Hyperparameters</a:t>
+            </a:r>
+            <a:endParaRPr sz="2000" b="1" dirty="0">
+              <a:solidFill>
+                <a:srgbClr val="FFD700"/>
+              </a:solidFill>
+            </a:endParaRPr>
           </a:p>
           <a:p>
             <a:pPr algn="l">
@@ -7067,132 +7917,777 @@
                 <a:spcPts val="300"/>
               </a:spcBef>
             </a:pPr>
-            <a:r>
-              <a:rPr sz="1900" dirty="0">
-                <a:solidFill>
-                  <a:srgbClr val="CCE5FF"/>
-                </a:solidFill>
-              </a:rPr>
-              <a:t>•  Fully connected dense network</a:t>
-            </a:r>
-          </a:p>
-          <a:p>
-            <a:pPr algn="l">
-              <a:spcBef>
-                <a:spcPts val="300"/>
-              </a:spcBef>
-            </a:pPr>
-            <a:r>
-              <a:rPr sz="1900" dirty="0">
-                <a:solidFill>
-                  <a:srgbClr val="CCE5FF"/>
-                </a:solidFill>
-              </a:rPr>
-              <a:t>•  Image </a:t>
-            </a:r>
-            <a:r>
-              <a:rPr lang="en-US" sz="1900" dirty="0">
-                <a:solidFill>
-                  <a:srgbClr val="CCE5FF"/>
-                </a:solidFill>
-              </a:rPr>
-              <a:t> is </a:t>
-            </a:r>
-            <a:r>
-              <a:rPr sz="1900" dirty="0">
-                <a:solidFill>
-                  <a:srgbClr val="CCE5FF"/>
-                </a:solidFill>
-              </a:rPr>
-              <a:t>flattened: 28×28 = 784 input neurons</a:t>
-            </a:r>
-          </a:p>
-          <a:p>
-            <a:pPr algn="l">
-              <a:spcBef>
-                <a:spcPts val="300"/>
-              </a:spcBef>
-            </a:pPr>
-            <a:r>
-              <a:rPr sz="1900" dirty="0">
-                <a:solidFill>
-                  <a:srgbClr val="CCE5FF"/>
-                </a:solidFill>
-              </a:rPr>
-              <a:t>•  No spatial awareness — pixels treated independently</a:t>
-            </a:r>
-          </a:p>
-          <a:p>
-            <a:pPr algn="l">
-              <a:spcBef>
-                <a:spcPts val="300"/>
-              </a:spcBef>
-            </a:pPr>
-            <a:r>
-              <a:rPr sz="1900" dirty="0">
-                <a:solidFill>
-                  <a:srgbClr val="CCE5FF"/>
-                </a:solidFill>
-              </a:rPr>
-              <a:t>•  Simple, fast baseline</a:t>
-            </a:r>
-          </a:p>
-        </p:txBody>
-      </p:sp>
-      <p:sp>
-        <p:nvSpPr>
-          <p:cNvPr id="6" name="Rectangle 5"/>
-          <p:cNvSpPr/>
-          <p:nvPr/>
-        </p:nvSpPr>
-        <p:spPr>
-          <a:xfrm>
-            <a:off x="1549908" y="3931920"/>
-            <a:ext cx="2011680" cy="1051560"/>
-          </a:xfrm>
-          <a:prstGeom prst="rect">
-            <a:avLst/>
-          </a:prstGeom>
-          <a:solidFill>
-            <a:srgbClr val="00C2FF"/>
-          </a:solidFill>
-          <a:ln>
-            <a:noFill/>
-          </a:ln>
-        </p:spPr>
-        <p:style>
-          <a:lnRef idx="1">
-            <a:schemeClr val="accent1"/>
-          </a:lnRef>
-          <a:fillRef idx="3">
-            <a:schemeClr val="accent1"/>
-          </a:fillRef>
-          <a:effectRef idx="2">
-            <a:schemeClr val="accent1"/>
-          </a:effectRef>
-          <a:fontRef idx="minor">
-            <a:schemeClr val="lt1"/>
-          </a:fontRef>
-        </p:style>
-        <p:txBody>
-          <a:bodyPr rtlCol="0" anchor="ctr"/>
-          <a:lstStyle/>
-          <a:p>
-            <a:pPr algn="ctr"/>
-            <a:endParaRPr/>
-          </a:p>
-        </p:txBody>
-      </p:sp>
-      <p:sp>
-        <p:nvSpPr>
-          <p:cNvPr id="7" name="TextBox 6"/>
+            <a:endParaRPr sz="1800" dirty="0">
+              <a:solidFill>
+                <a:srgbClr val="CCE5FF"/>
+              </a:solidFill>
+            </a:endParaRPr>
+          </a:p>
+        </p:txBody>
+      </p:sp>
+      <p:graphicFrame>
+        <p:nvGraphicFramePr>
+          <p:cNvPr id="22" name="Table 21">
+            <a:extLst>
+              <a:ext uri="{FF2B5EF4-FFF2-40B4-BE49-F238E27FC236}">
+                <a16:creationId xmlns:a16="http://schemas.microsoft.com/office/drawing/2014/main" id="{95D20C14-1A4E-5F86-E76F-3F606966BFAD}"/>
+              </a:ext>
+            </a:extLst>
+          </p:cNvPr>
+          <p:cNvGraphicFramePr>
+            <a:graphicFrameLocks noGrp="1"/>
+          </p:cNvGraphicFramePr>
+          <p:nvPr>
+            <p:extLst>
+              <p:ext uri="{D42A27DB-BD31-4B8C-83A1-F6EECF244321}">
+                <p14:modId xmlns:p14="http://schemas.microsoft.com/office/powerpoint/2010/main" val="1380129184"/>
+              </p:ext>
+            </p:extLst>
+          </p:nvPr>
+        </p:nvGraphicFramePr>
+        <p:xfrm>
+          <a:off x="6720289" y="1502951"/>
+          <a:ext cx="3415394" cy="1752600"/>
+        </p:xfrm>
+        <a:graphic>
+          <a:graphicData uri="http://schemas.openxmlformats.org/drawingml/2006/table">
+            <a:tbl>
+              <a:tblPr>
+                <a:tableStyleId>{2D5ABB26-0587-4C30-8999-92F81FD0307C}</a:tableStyleId>
+              </a:tblPr>
+              <a:tblGrid>
+                <a:gridCol w="1673214">
+                  <a:extLst>
+                    <a:ext uri="{9D8B030D-6E8A-4147-A177-3AD203B41FA5}">
+                      <a16:colId xmlns:a16="http://schemas.microsoft.com/office/drawing/2014/main" val="1940200092"/>
+                    </a:ext>
+                  </a:extLst>
+                </a:gridCol>
+                <a:gridCol w="1742180">
+                  <a:extLst>
+                    <a:ext uri="{9D8B030D-6E8A-4147-A177-3AD203B41FA5}">
+                      <a16:colId xmlns:a16="http://schemas.microsoft.com/office/drawing/2014/main" val="76769100"/>
+                    </a:ext>
+                  </a:extLst>
+                </a:gridCol>
+              </a:tblGrid>
+              <a:tr h="243581">
+                <a:tc>
+                  <a:txBody>
+                    <a:bodyPr/>
+                    <a:lstStyle/>
+                    <a:p>
+                      <a:pPr algn="ctr">
+                        <a:buNone/>
+                      </a:pPr>
+                      <a:r>
+                        <a:rPr lang="en-US" sz="1800" kern="1200" dirty="0">
+                          <a:solidFill>
+                            <a:schemeClr val="accent1">
+                              <a:lumMod val="20000"/>
+                              <a:lumOff val="80000"/>
+                            </a:schemeClr>
+                          </a:solidFill>
+                        </a:rPr>
+                        <a:t>Hyperparameter</a:t>
+                      </a:r>
+                      <a:endParaRPr lang="en-US" sz="1800" kern="1200" dirty="0">
+                        <a:solidFill>
+                          <a:schemeClr val="accent1">
+                            <a:lumMod val="20000"/>
+                            <a:lumOff val="80000"/>
+                          </a:schemeClr>
+                        </a:solidFill>
+                        <a:latin typeface="+mn-lt"/>
+                        <a:ea typeface="+mn-ea"/>
+                        <a:cs typeface="+mn-cs"/>
+                      </a:endParaRPr>
+                    </a:p>
+                  </a:txBody>
+                  <a:tcPr marL="57150" marR="57150" marT="38100" marB="38100" anchor="ctr"/>
+                </a:tc>
+                <a:tc>
+                  <a:txBody>
+                    <a:bodyPr/>
+                    <a:lstStyle/>
+                    <a:p>
+                      <a:pPr algn="ctr">
+                        <a:buNone/>
+                      </a:pPr>
+                      <a:r>
+                        <a:rPr lang="en-US" sz="1800" kern="1200" dirty="0">
+                          <a:solidFill>
+                            <a:schemeClr val="accent1">
+                              <a:lumMod val="20000"/>
+                              <a:lumOff val="80000"/>
+                            </a:schemeClr>
+                          </a:solidFill>
+                        </a:rPr>
+                        <a:t>Value</a:t>
+                      </a:r>
+                      <a:endParaRPr lang="en-US" sz="1800" kern="1200" dirty="0">
+                        <a:solidFill>
+                          <a:schemeClr val="accent1">
+                            <a:lumMod val="20000"/>
+                            <a:lumOff val="80000"/>
+                          </a:schemeClr>
+                        </a:solidFill>
+                        <a:latin typeface="+mn-lt"/>
+                        <a:ea typeface="+mn-ea"/>
+                        <a:cs typeface="+mn-cs"/>
+                      </a:endParaRPr>
+                    </a:p>
+                  </a:txBody>
+                  <a:tcPr marL="57150" marR="57150" marT="38100" marB="38100" anchor="ctr"/>
+                </a:tc>
+                <a:extLst>
+                  <a:ext uri="{0D108BD9-81ED-4DB2-BD59-A6C34878D82A}">
+                    <a16:rowId xmlns:a16="http://schemas.microsoft.com/office/drawing/2014/main" val="975561491"/>
+                  </a:ext>
+                </a:extLst>
+              </a:tr>
+              <a:tr h="243581">
+                <a:tc>
+                  <a:txBody>
+                    <a:bodyPr/>
+                    <a:lstStyle/>
+                    <a:p>
+                      <a:pPr algn="ctr">
+                        <a:buNone/>
+                      </a:pPr>
+                      <a:r>
+                        <a:rPr lang="en-US" sz="1800" kern="1200" dirty="0">
+                          <a:solidFill>
+                            <a:srgbClr val="CCE5FF"/>
+                          </a:solidFill>
+                        </a:rPr>
+                        <a:t>Optimizer</a:t>
+                      </a:r>
+                      <a:endParaRPr lang="en-US" sz="1800" kern="1200" dirty="0">
+                        <a:solidFill>
+                          <a:srgbClr val="CCE5FF"/>
+                        </a:solidFill>
+                        <a:latin typeface="+mn-lt"/>
+                        <a:ea typeface="+mn-ea"/>
+                        <a:cs typeface="+mn-cs"/>
+                      </a:endParaRPr>
+                    </a:p>
+                  </a:txBody>
+                  <a:tcPr marL="57150" marR="57150" marT="38100" marB="38100" anchor="ctr"/>
+                </a:tc>
+                <a:tc>
+                  <a:txBody>
+                    <a:bodyPr/>
+                    <a:lstStyle/>
+                    <a:p>
+                      <a:pPr algn="ctr">
+                        <a:buNone/>
+                      </a:pPr>
+                      <a:r>
+                        <a:rPr lang="en-US" sz="1800" kern="1200" dirty="0">
+                          <a:solidFill>
+                            <a:srgbClr val="CCE5FF"/>
+                          </a:solidFill>
+                        </a:rPr>
+                        <a:t>Adam</a:t>
+                      </a:r>
+                      <a:endParaRPr lang="en-US" sz="1800" kern="1200" dirty="0">
+                        <a:solidFill>
+                          <a:srgbClr val="CCE5FF"/>
+                        </a:solidFill>
+                        <a:latin typeface="+mn-lt"/>
+                        <a:ea typeface="+mn-ea"/>
+                        <a:cs typeface="+mn-cs"/>
+                      </a:endParaRPr>
+                    </a:p>
+                  </a:txBody>
+                  <a:tcPr marL="57150" marR="57150" marT="38100" marB="38100" anchor="ctr"/>
+                </a:tc>
+                <a:extLst>
+                  <a:ext uri="{0D108BD9-81ED-4DB2-BD59-A6C34878D82A}">
+                    <a16:rowId xmlns:a16="http://schemas.microsoft.com/office/drawing/2014/main" val="4234817580"/>
+                  </a:ext>
+                </a:extLst>
+              </a:tr>
+              <a:tr h="243581">
+                <a:tc>
+                  <a:txBody>
+                    <a:bodyPr/>
+                    <a:lstStyle/>
+                    <a:p>
+                      <a:pPr algn="ctr">
+                        <a:buNone/>
+                      </a:pPr>
+                      <a:r>
+                        <a:rPr lang="en-US" sz="1800" kern="1200" dirty="0">
+                          <a:solidFill>
+                            <a:srgbClr val="CCE5FF"/>
+                          </a:solidFill>
+                        </a:rPr>
+                        <a:t>Learning rate</a:t>
+                      </a:r>
+                      <a:endParaRPr lang="en-US" sz="1800" kern="1200" dirty="0">
+                        <a:solidFill>
+                          <a:srgbClr val="CCE5FF"/>
+                        </a:solidFill>
+                        <a:latin typeface="+mn-lt"/>
+                        <a:ea typeface="+mn-ea"/>
+                        <a:cs typeface="+mn-cs"/>
+                      </a:endParaRPr>
+                    </a:p>
+                  </a:txBody>
+                  <a:tcPr marL="57150" marR="57150" marT="38100" marB="38100" anchor="ctr"/>
+                </a:tc>
+                <a:tc>
+                  <a:txBody>
+                    <a:bodyPr/>
+                    <a:lstStyle/>
+                    <a:p>
+                      <a:pPr algn="ctr">
+                        <a:buNone/>
+                      </a:pPr>
+                      <a:r>
+                        <a:rPr lang="en-US" sz="1800" kern="1200" dirty="0">
+                          <a:solidFill>
+                            <a:srgbClr val="CCE5FF"/>
+                          </a:solidFill>
+                        </a:rPr>
+                        <a:t>1e-3</a:t>
+                      </a:r>
+                      <a:endParaRPr lang="en-US" sz="1800" kern="1200" dirty="0">
+                        <a:solidFill>
+                          <a:srgbClr val="CCE5FF"/>
+                        </a:solidFill>
+                        <a:latin typeface="+mn-lt"/>
+                        <a:ea typeface="+mn-ea"/>
+                        <a:cs typeface="+mn-cs"/>
+                      </a:endParaRPr>
+                    </a:p>
+                  </a:txBody>
+                  <a:tcPr marL="57150" marR="57150" marT="38100" marB="38100" anchor="ctr"/>
+                </a:tc>
+                <a:extLst>
+                  <a:ext uri="{0D108BD9-81ED-4DB2-BD59-A6C34878D82A}">
+                    <a16:rowId xmlns:a16="http://schemas.microsoft.com/office/drawing/2014/main" val="2980104865"/>
+                  </a:ext>
+                </a:extLst>
+              </a:tr>
+              <a:tr h="243581">
+                <a:tc>
+                  <a:txBody>
+                    <a:bodyPr/>
+                    <a:lstStyle/>
+                    <a:p>
+                      <a:pPr algn="ctr">
+                        <a:buNone/>
+                      </a:pPr>
+                      <a:r>
+                        <a:rPr lang="en-US" sz="1800" kern="1200">
+                          <a:solidFill>
+                            <a:srgbClr val="CCE5FF"/>
+                          </a:solidFill>
+                        </a:rPr>
+                        <a:t>Loss function</a:t>
+                      </a:r>
+                      <a:endParaRPr lang="en-US" sz="1800" kern="1200">
+                        <a:solidFill>
+                          <a:srgbClr val="CCE5FF"/>
+                        </a:solidFill>
+                        <a:latin typeface="+mn-lt"/>
+                        <a:ea typeface="+mn-ea"/>
+                        <a:cs typeface="+mn-cs"/>
+                      </a:endParaRPr>
+                    </a:p>
+                  </a:txBody>
+                  <a:tcPr marL="57150" marR="57150" marT="38100" marB="38100" anchor="ctr"/>
+                </a:tc>
+                <a:tc>
+                  <a:txBody>
+                    <a:bodyPr/>
+                    <a:lstStyle/>
+                    <a:p>
+                      <a:pPr algn="ctr">
+                        <a:buNone/>
+                      </a:pPr>
+                      <a:r>
+                        <a:rPr lang="en-US" sz="1800" kern="1200" dirty="0" err="1">
+                          <a:solidFill>
+                            <a:srgbClr val="CCE5FF"/>
+                          </a:solidFill>
+                        </a:rPr>
+                        <a:t>CrossEntropyLoss</a:t>
+                      </a:r>
+                      <a:endParaRPr lang="en-US" sz="1800" kern="1200" dirty="0">
+                        <a:solidFill>
+                          <a:srgbClr val="CCE5FF"/>
+                        </a:solidFill>
+                        <a:latin typeface="+mn-lt"/>
+                        <a:ea typeface="+mn-ea"/>
+                        <a:cs typeface="+mn-cs"/>
+                      </a:endParaRPr>
+                    </a:p>
+                  </a:txBody>
+                  <a:tcPr marL="57150" marR="57150" marT="38100" marB="38100" anchor="ctr"/>
+                </a:tc>
+                <a:extLst>
+                  <a:ext uri="{0D108BD9-81ED-4DB2-BD59-A6C34878D82A}">
+                    <a16:rowId xmlns:a16="http://schemas.microsoft.com/office/drawing/2014/main" val="2810740029"/>
+                  </a:ext>
+                </a:extLst>
+              </a:tr>
+              <a:tr h="243581">
+                <a:tc>
+                  <a:txBody>
+                    <a:bodyPr/>
+                    <a:lstStyle/>
+                    <a:p>
+                      <a:pPr algn="ctr">
+                        <a:buNone/>
+                      </a:pPr>
+                      <a:r>
+                        <a:rPr lang="en-US" sz="1800" kern="1200" dirty="0">
+                          <a:solidFill>
+                            <a:srgbClr val="CCE5FF"/>
+                          </a:solidFill>
+                        </a:rPr>
+                        <a:t>Epochs</a:t>
+                      </a:r>
+                      <a:endParaRPr lang="en-US" sz="1800" kern="1200" dirty="0">
+                        <a:solidFill>
+                          <a:srgbClr val="CCE5FF"/>
+                        </a:solidFill>
+                        <a:latin typeface="+mn-lt"/>
+                        <a:ea typeface="+mn-ea"/>
+                        <a:cs typeface="+mn-cs"/>
+                      </a:endParaRPr>
+                    </a:p>
+                  </a:txBody>
+                  <a:tcPr marL="57150" marR="57150" marT="38100" marB="38100" anchor="ctr"/>
+                </a:tc>
+                <a:tc>
+                  <a:txBody>
+                    <a:bodyPr/>
+                    <a:lstStyle/>
+                    <a:p>
+                      <a:pPr algn="ctr">
+                        <a:buNone/>
+                      </a:pPr>
+                      <a:r>
+                        <a:rPr lang="en-US" sz="1800" kern="1200" dirty="0">
+                          <a:solidFill>
+                            <a:srgbClr val="CCE5FF"/>
+                          </a:solidFill>
+                        </a:rPr>
+                        <a:t>5</a:t>
+                      </a:r>
+                      <a:endParaRPr lang="en-US" sz="1800" kern="1200" dirty="0">
+                        <a:solidFill>
+                          <a:srgbClr val="CCE5FF"/>
+                        </a:solidFill>
+                        <a:latin typeface="+mn-lt"/>
+                        <a:ea typeface="+mn-ea"/>
+                        <a:cs typeface="+mn-cs"/>
+                      </a:endParaRPr>
+                    </a:p>
+                  </a:txBody>
+                  <a:tcPr marL="57150" marR="57150" marT="38100" marB="38100" anchor="ctr"/>
+                </a:tc>
+                <a:extLst>
+                  <a:ext uri="{0D108BD9-81ED-4DB2-BD59-A6C34878D82A}">
+                    <a16:rowId xmlns:a16="http://schemas.microsoft.com/office/drawing/2014/main" val="3901992980"/>
+                  </a:ext>
+                </a:extLst>
+              </a:tr>
+            </a:tbl>
+          </a:graphicData>
+        </a:graphic>
+      </p:graphicFrame>
+      <p:graphicFrame>
+        <p:nvGraphicFramePr>
+          <p:cNvPr id="23" name="Table 22">
+            <a:extLst>
+              <a:ext uri="{FF2B5EF4-FFF2-40B4-BE49-F238E27FC236}">
+                <a16:creationId xmlns:a16="http://schemas.microsoft.com/office/drawing/2014/main" id="{6BE00F4E-62E5-A24A-1595-3C3BF897E631}"/>
+              </a:ext>
+            </a:extLst>
+          </p:cNvPr>
+          <p:cNvGraphicFramePr>
+            <a:graphicFrameLocks noGrp="1"/>
+          </p:cNvGraphicFramePr>
+          <p:nvPr>
+            <p:extLst>
+              <p:ext uri="{D42A27DB-BD31-4B8C-83A1-F6EECF244321}">
+                <p14:modId xmlns:p14="http://schemas.microsoft.com/office/powerpoint/2010/main" val="3343016891"/>
+              </p:ext>
+            </p:extLst>
+          </p:nvPr>
+        </p:nvGraphicFramePr>
+        <p:xfrm>
+          <a:off x="6094412" y="3332185"/>
+          <a:ext cx="5811012" cy="1402080"/>
+        </p:xfrm>
+        <a:graphic>
+          <a:graphicData uri="http://schemas.openxmlformats.org/drawingml/2006/table">
+            <a:tbl>
+              <a:tblPr>
+                <a:tableStyleId>{2D5ABB26-0587-4C30-8999-92F81FD0307C}</a:tableStyleId>
+              </a:tblPr>
+              <a:tblGrid>
+                <a:gridCol w="1937004">
+                  <a:extLst>
+                    <a:ext uri="{9D8B030D-6E8A-4147-A177-3AD203B41FA5}">
+                      <a16:colId xmlns:a16="http://schemas.microsoft.com/office/drawing/2014/main" val="3854524796"/>
+                    </a:ext>
+                  </a:extLst>
+                </a:gridCol>
+                <a:gridCol w="1937004">
+                  <a:extLst>
+                    <a:ext uri="{9D8B030D-6E8A-4147-A177-3AD203B41FA5}">
+                      <a16:colId xmlns:a16="http://schemas.microsoft.com/office/drawing/2014/main" val="388700447"/>
+                    </a:ext>
+                  </a:extLst>
+                </a:gridCol>
+                <a:gridCol w="1937004">
+                  <a:extLst>
+                    <a:ext uri="{9D8B030D-6E8A-4147-A177-3AD203B41FA5}">
+                      <a16:colId xmlns:a16="http://schemas.microsoft.com/office/drawing/2014/main" val="2429665962"/>
+                    </a:ext>
+                  </a:extLst>
+                </a:gridCol>
+              </a:tblGrid>
+              <a:tr h="303975">
+                <a:tc>
+                  <a:txBody>
+                    <a:bodyPr/>
+                    <a:lstStyle/>
+                    <a:p>
+                      <a:pPr marL="0" algn="ctr" defTabSz="457063" rtl="0" eaLnBrk="1" latinLnBrk="0" hangingPunct="1">
+                        <a:buNone/>
+                      </a:pPr>
+                      <a:r>
+                        <a:rPr lang="en-US" sz="1800" kern="1200">
+                          <a:solidFill>
+                            <a:schemeClr val="accent1">
+                              <a:lumMod val="20000"/>
+                              <a:lumOff val="80000"/>
+                            </a:schemeClr>
+                          </a:solidFill>
+                          <a:latin typeface="+mn-lt"/>
+                          <a:ea typeface="+mn-ea"/>
+                          <a:cs typeface="+mn-cs"/>
+                        </a:rPr>
+                        <a:t>Layer</a:t>
+                      </a:r>
+                    </a:p>
+                  </a:txBody>
+                  <a:tcPr marL="57150" marR="57150" marT="38100" marB="38100" anchor="ctr"/>
+                </a:tc>
+                <a:tc>
+                  <a:txBody>
+                    <a:bodyPr/>
+                    <a:lstStyle/>
+                    <a:p>
+                      <a:pPr marL="0" algn="ctr" defTabSz="457063" rtl="0" eaLnBrk="1" latinLnBrk="0" hangingPunct="1">
+                        <a:buNone/>
+                      </a:pPr>
+                      <a:r>
+                        <a:rPr lang="en-US" sz="1800" kern="1200">
+                          <a:solidFill>
+                            <a:schemeClr val="accent1">
+                              <a:lumMod val="20000"/>
+                              <a:lumOff val="80000"/>
+                            </a:schemeClr>
+                          </a:solidFill>
+                          <a:latin typeface="+mn-lt"/>
+                          <a:ea typeface="+mn-ea"/>
+                          <a:cs typeface="+mn-cs"/>
+                        </a:rPr>
+                        <a:t>Calculation</a:t>
+                      </a:r>
+                    </a:p>
+                  </a:txBody>
+                  <a:tcPr marL="57150" marR="57150" marT="38100" marB="38100" anchor="ctr"/>
+                </a:tc>
+                <a:tc>
+                  <a:txBody>
+                    <a:bodyPr/>
+                    <a:lstStyle/>
+                    <a:p>
+                      <a:pPr marL="0" algn="ctr" defTabSz="457063" rtl="0" eaLnBrk="1" latinLnBrk="0" hangingPunct="1">
+                        <a:buNone/>
+                      </a:pPr>
+                      <a:r>
+                        <a:rPr lang="en-US" sz="1800" kern="1200" dirty="0">
+                          <a:solidFill>
+                            <a:schemeClr val="accent1">
+                              <a:lumMod val="20000"/>
+                              <a:lumOff val="80000"/>
+                            </a:schemeClr>
+                          </a:solidFill>
+                          <a:latin typeface="+mn-lt"/>
+                          <a:ea typeface="+mn-ea"/>
+                          <a:cs typeface="+mn-cs"/>
+                        </a:rPr>
+                        <a:t>Params</a:t>
+                      </a:r>
+                    </a:p>
+                  </a:txBody>
+                  <a:tcPr marL="57150" marR="57150" marT="38100" marB="38100" anchor="ctr"/>
+                </a:tc>
+                <a:extLst>
+                  <a:ext uri="{0D108BD9-81ED-4DB2-BD59-A6C34878D82A}">
+                    <a16:rowId xmlns:a16="http://schemas.microsoft.com/office/drawing/2014/main" val="601029515"/>
+                  </a:ext>
+                </a:extLst>
+              </a:tr>
+              <a:tr h="303975">
+                <a:tc>
+                  <a:txBody>
+                    <a:bodyPr/>
+                    <a:lstStyle/>
+                    <a:p>
+                      <a:pPr marL="0" algn="ctr" defTabSz="457063" rtl="0" eaLnBrk="1" latinLnBrk="0" hangingPunct="1">
+                        <a:buNone/>
+                      </a:pPr>
+                      <a:r>
+                        <a:rPr lang="en-US" sz="1800" kern="1200" dirty="0">
+                          <a:solidFill>
+                            <a:srgbClr val="CCE5FF"/>
+                          </a:solidFill>
+                          <a:latin typeface="+mn-lt"/>
+                          <a:ea typeface="+mn-ea"/>
+                          <a:cs typeface="+mn-cs"/>
+                        </a:rPr>
+                        <a:t>Linear(784 → 256)</a:t>
+                      </a:r>
+                    </a:p>
+                  </a:txBody>
+                  <a:tcPr marL="57150" marR="57150" marT="38100" marB="38100" anchor="ctr"/>
+                </a:tc>
+                <a:tc>
+                  <a:txBody>
+                    <a:bodyPr/>
+                    <a:lstStyle/>
+                    <a:p>
+                      <a:pPr marL="0" algn="ctr" defTabSz="457063" rtl="0" eaLnBrk="1" latinLnBrk="0" hangingPunct="1">
+                        <a:buNone/>
+                      </a:pPr>
+                      <a:r>
+                        <a:rPr lang="en-US" sz="1800" kern="1200">
+                          <a:solidFill>
+                            <a:srgbClr val="CCE5FF"/>
+                          </a:solidFill>
+                          <a:latin typeface="+mn-lt"/>
+                          <a:ea typeface="+mn-ea"/>
+                          <a:cs typeface="+mn-cs"/>
+                        </a:rPr>
+                        <a:t>784×256 + 256</a:t>
+                      </a:r>
+                    </a:p>
+                  </a:txBody>
+                  <a:tcPr marL="57150" marR="57150" marT="38100" marB="38100" anchor="ctr"/>
+                </a:tc>
+                <a:tc>
+                  <a:txBody>
+                    <a:bodyPr/>
+                    <a:lstStyle/>
+                    <a:p>
+                      <a:pPr marL="0" algn="ctr" defTabSz="457063" rtl="0" eaLnBrk="1" latinLnBrk="0" hangingPunct="1">
+                        <a:buNone/>
+                      </a:pPr>
+                      <a:r>
+                        <a:rPr lang="en-US" sz="1800" kern="1200">
+                          <a:solidFill>
+                            <a:srgbClr val="CCE5FF"/>
+                          </a:solidFill>
+                          <a:latin typeface="+mn-lt"/>
+                          <a:ea typeface="+mn-ea"/>
+                          <a:cs typeface="+mn-cs"/>
+                        </a:rPr>
+                        <a:t>200,960</a:t>
+                      </a:r>
+                    </a:p>
+                  </a:txBody>
+                  <a:tcPr marL="57150" marR="57150" marT="38100" marB="38100" anchor="ctr"/>
+                </a:tc>
+                <a:extLst>
+                  <a:ext uri="{0D108BD9-81ED-4DB2-BD59-A6C34878D82A}">
+                    <a16:rowId xmlns:a16="http://schemas.microsoft.com/office/drawing/2014/main" val="144194146"/>
+                  </a:ext>
+                </a:extLst>
+              </a:tr>
+              <a:tr h="303975">
+                <a:tc>
+                  <a:txBody>
+                    <a:bodyPr/>
+                    <a:lstStyle/>
+                    <a:p>
+                      <a:pPr marL="0" algn="ctr" defTabSz="457063" rtl="0" eaLnBrk="1" latinLnBrk="0" hangingPunct="1">
+                        <a:buNone/>
+                      </a:pPr>
+                      <a:r>
+                        <a:rPr lang="en-US" sz="1800" kern="1200">
+                          <a:solidFill>
+                            <a:srgbClr val="CCE5FF"/>
+                          </a:solidFill>
+                          <a:latin typeface="+mn-lt"/>
+                          <a:ea typeface="+mn-ea"/>
+                          <a:cs typeface="+mn-cs"/>
+                        </a:rPr>
+                        <a:t>Linear(256 → 128)</a:t>
+                      </a:r>
+                    </a:p>
+                  </a:txBody>
+                  <a:tcPr marL="57150" marR="57150" marT="38100" marB="38100" anchor="ctr"/>
+                </a:tc>
+                <a:tc>
+                  <a:txBody>
+                    <a:bodyPr/>
+                    <a:lstStyle/>
+                    <a:p>
+                      <a:pPr marL="0" algn="ctr" defTabSz="457063" rtl="0" eaLnBrk="1" latinLnBrk="0" hangingPunct="1">
+                        <a:buNone/>
+                      </a:pPr>
+                      <a:r>
+                        <a:rPr lang="en-US" sz="1800" kern="1200">
+                          <a:solidFill>
+                            <a:srgbClr val="CCE5FF"/>
+                          </a:solidFill>
+                          <a:latin typeface="+mn-lt"/>
+                          <a:ea typeface="+mn-ea"/>
+                          <a:cs typeface="+mn-cs"/>
+                        </a:rPr>
+                        <a:t>256×128 + 128</a:t>
+                      </a:r>
+                    </a:p>
+                  </a:txBody>
+                  <a:tcPr marL="57150" marR="57150" marT="38100" marB="38100" anchor="ctr"/>
+                </a:tc>
+                <a:tc>
+                  <a:txBody>
+                    <a:bodyPr/>
+                    <a:lstStyle/>
+                    <a:p>
+                      <a:pPr marL="0" algn="ctr" defTabSz="457063" rtl="0" eaLnBrk="1" latinLnBrk="0" hangingPunct="1">
+                        <a:buNone/>
+                      </a:pPr>
+                      <a:r>
+                        <a:rPr lang="en-US" sz="1800" kern="1200">
+                          <a:solidFill>
+                            <a:srgbClr val="CCE5FF"/>
+                          </a:solidFill>
+                          <a:latin typeface="+mn-lt"/>
+                          <a:ea typeface="+mn-ea"/>
+                          <a:cs typeface="+mn-cs"/>
+                        </a:rPr>
+                        <a:t>32,896</a:t>
+                      </a:r>
+                    </a:p>
+                  </a:txBody>
+                  <a:tcPr marL="57150" marR="57150" marT="38100" marB="38100" anchor="ctr"/>
+                </a:tc>
+                <a:extLst>
+                  <a:ext uri="{0D108BD9-81ED-4DB2-BD59-A6C34878D82A}">
+                    <a16:rowId xmlns:a16="http://schemas.microsoft.com/office/drawing/2014/main" val="2918573491"/>
+                  </a:ext>
+                </a:extLst>
+              </a:tr>
+              <a:tr h="303975">
+                <a:tc>
+                  <a:txBody>
+                    <a:bodyPr/>
+                    <a:lstStyle/>
+                    <a:p>
+                      <a:pPr marL="0" algn="ctr" defTabSz="457063" rtl="0" eaLnBrk="1" latinLnBrk="0" hangingPunct="1">
+                        <a:buNone/>
+                      </a:pPr>
+                      <a:r>
+                        <a:rPr lang="en-US" sz="1800" kern="1200">
+                          <a:solidFill>
+                            <a:srgbClr val="CCE5FF"/>
+                          </a:solidFill>
+                          <a:latin typeface="+mn-lt"/>
+                          <a:ea typeface="+mn-ea"/>
+                          <a:cs typeface="+mn-cs"/>
+                        </a:rPr>
+                        <a:t>Linear(128 → 10)</a:t>
+                      </a:r>
+                    </a:p>
+                  </a:txBody>
+                  <a:tcPr marL="57150" marR="57150" marT="38100" marB="38100" anchor="ctr"/>
+                </a:tc>
+                <a:tc>
+                  <a:txBody>
+                    <a:bodyPr/>
+                    <a:lstStyle/>
+                    <a:p>
+                      <a:pPr marL="0" algn="ctr" defTabSz="457063" rtl="0" eaLnBrk="1" latinLnBrk="0" hangingPunct="1">
+                        <a:buNone/>
+                      </a:pPr>
+                      <a:r>
+                        <a:rPr lang="en-US" sz="1800" kern="1200">
+                          <a:solidFill>
+                            <a:srgbClr val="CCE5FF"/>
+                          </a:solidFill>
+                          <a:latin typeface="+mn-lt"/>
+                          <a:ea typeface="+mn-ea"/>
+                          <a:cs typeface="+mn-cs"/>
+                        </a:rPr>
+                        <a:t>128×10 + 10</a:t>
+                      </a:r>
+                    </a:p>
+                  </a:txBody>
+                  <a:tcPr marL="57150" marR="57150" marT="38100" marB="38100" anchor="ctr"/>
+                </a:tc>
+                <a:tc>
+                  <a:txBody>
+                    <a:bodyPr/>
+                    <a:lstStyle/>
+                    <a:p>
+                      <a:pPr marL="0" algn="ctr" defTabSz="457063" rtl="0" eaLnBrk="1" latinLnBrk="0" hangingPunct="1">
+                        <a:buNone/>
+                      </a:pPr>
+                      <a:r>
+                        <a:rPr lang="en-US" sz="1800" kern="1200" dirty="0">
+                          <a:solidFill>
+                            <a:srgbClr val="CCE5FF"/>
+                          </a:solidFill>
+                          <a:latin typeface="+mn-lt"/>
+                          <a:ea typeface="+mn-ea"/>
+                          <a:cs typeface="+mn-cs"/>
+                        </a:rPr>
+                        <a:t>1,290</a:t>
+                      </a:r>
+                    </a:p>
+                  </a:txBody>
+                  <a:tcPr marL="57150" marR="57150" marT="38100" marB="38100" anchor="ctr"/>
+                </a:tc>
+                <a:extLst>
+                  <a:ext uri="{0D108BD9-81ED-4DB2-BD59-A6C34878D82A}">
+                    <a16:rowId xmlns:a16="http://schemas.microsoft.com/office/drawing/2014/main" val="414444564"/>
+                  </a:ext>
+                </a:extLst>
+              </a:tr>
+            </a:tbl>
+          </a:graphicData>
+        </a:graphic>
+      </p:graphicFrame>
+      <p:sp>
+        <p:nvSpPr>
+          <p:cNvPr id="25" name="TextBox 24">
+            <a:extLst>
+              <a:ext uri="{FF2B5EF4-FFF2-40B4-BE49-F238E27FC236}">
+                <a16:creationId xmlns:a16="http://schemas.microsoft.com/office/drawing/2014/main" id="{5156F814-2DAA-2569-92C5-7A42E5772A7E}"/>
+              </a:ext>
+            </a:extLst>
+          </p:cNvPr>
           <p:cNvSpPr txBox="1"/>
           <p:nvPr/>
         </p:nvSpPr>
         <p:spPr>
           <a:xfrm>
-            <a:off x="1549908" y="4069080"/>
-            <a:ext cx="2011680" cy="914400"/>
+            <a:off x="9845279" y="4714975"/>
+            <a:ext cx="6097836" cy="369332"/>
           </a:xfrm>
           <a:prstGeom prst="rect">
             <a:avLst/>
@@ -7205,453 +8700,17 @@
           </a:bodyPr>
           <a:lstStyle/>
           <a:p>
-            <a:pPr algn="ctr"/>
-            <a:r>
-              <a:rPr sz="1500" b="1" i="0">
-                <a:solidFill>
-                  <a:srgbClr val="FFFFFF"/>
-                </a:solidFill>
+            <a:r>
+              <a:rPr lang="en-US" b="1" i="0" dirty="0">
+                <a:solidFill>
+                  <a:srgbClr val="CCCCCC"/>
+                </a:solidFill>
+                <a:effectLst/>
+                <a:latin typeface="-apple-system"/>
               </a:rPr>
-              <a:t>Input
-784</a:t>
-            </a:r>
-          </a:p>
-        </p:txBody>
-      </p:sp>
-      <p:sp>
-        <p:nvSpPr>
-          <p:cNvPr id="8" name="TextBox 7"/>
-          <p:cNvSpPr txBox="1"/>
-          <p:nvPr/>
-        </p:nvSpPr>
-        <p:spPr>
-          <a:xfrm>
-            <a:off x="3561588" y="4251960"/>
-            <a:ext cx="347472" cy="457200"/>
-          </a:xfrm>
-          <a:prstGeom prst="rect">
-            <a:avLst/>
-          </a:prstGeom>
-          <a:noFill/>
-        </p:spPr>
-        <p:txBody>
-          <a:bodyPr wrap="square">
-            <a:spAutoFit/>
-          </a:bodyPr>
-          <a:lstStyle/>
-          <a:p>
-            <a:pPr algn="ctr"/>
-            <a:r>
-              <a:rPr sz="2400" b="0" i="0">
-                <a:solidFill>
-                  <a:srgbClr val="AABBCC"/>
-                </a:solidFill>
-              </a:rPr>
-              <a:t>→</a:t>
-            </a:r>
-          </a:p>
-        </p:txBody>
-      </p:sp>
-      <p:sp>
-        <p:nvSpPr>
-          <p:cNvPr id="9" name="Rectangle 8"/>
-          <p:cNvSpPr/>
-          <p:nvPr/>
-        </p:nvSpPr>
-        <p:spPr>
-          <a:xfrm>
-            <a:off x="3909060" y="3931920"/>
-            <a:ext cx="2011680" cy="1051560"/>
-          </a:xfrm>
-          <a:prstGeom prst="rect">
-            <a:avLst/>
-          </a:prstGeom>
-          <a:solidFill>
-            <a:srgbClr val="1A6BAA"/>
-          </a:solidFill>
-          <a:ln>
-            <a:noFill/>
-          </a:ln>
-        </p:spPr>
-        <p:style>
-          <a:lnRef idx="1">
-            <a:schemeClr val="accent1"/>
-          </a:lnRef>
-          <a:fillRef idx="3">
-            <a:schemeClr val="accent1"/>
-          </a:fillRef>
-          <a:effectRef idx="2">
-            <a:schemeClr val="accent1"/>
-          </a:effectRef>
-          <a:fontRef idx="minor">
-            <a:schemeClr val="lt1"/>
-          </a:fontRef>
-        </p:style>
-        <p:txBody>
-          <a:bodyPr rtlCol="0" anchor="ctr"/>
-          <a:lstStyle/>
-          <a:p>
-            <a:pPr algn="ctr"/>
-            <a:endParaRPr/>
-          </a:p>
-        </p:txBody>
-      </p:sp>
-      <p:sp>
-        <p:nvSpPr>
-          <p:cNvPr id="10" name="TextBox 9"/>
-          <p:cNvSpPr txBox="1"/>
-          <p:nvPr/>
-        </p:nvSpPr>
-        <p:spPr>
-          <a:xfrm>
-            <a:off x="3909060" y="4069080"/>
-            <a:ext cx="2011680" cy="914400"/>
-          </a:xfrm>
-          <a:prstGeom prst="rect">
-            <a:avLst/>
-          </a:prstGeom>
-          <a:noFill/>
-        </p:spPr>
-        <p:txBody>
-          <a:bodyPr wrap="square">
-            <a:spAutoFit/>
-          </a:bodyPr>
-          <a:lstStyle/>
-          <a:p>
-            <a:pPr algn="ctr"/>
-            <a:r>
-              <a:rPr sz="1500" b="1" i="0">
-                <a:solidFill>
-                  <a:srgbClr val="FFFFFF"/>
-                </a:solidFill>
-              </a:rPr>
-              <a:t>Hidden 1
-256  ReLU</a:t>
-            </a:r>
-          </a:p>
-        </p:txBody>
-      </p:sp>
-      <p:sp>
-        <p:nvSpPr>
-          <p:cNvPr id="11" name="TextBox 10"/>
-          <p:cNvSpPr txBox="1"/>
-          <p:nvPr/>
-        </p:nvSpPr>
-        <p:spPr>
-          <a:xfrm>
-            <a:off x="5920740" y="4251960"/>
-            <a:ext cx="347472" cy="457200"/>
-          </a:xfrm>
-          <a:prstGeom prst="rect">
-            <a:avLst/>
-          </a:prstGeom>
-          <a:noFill/>
-        </p:spPr>
-        <p:txBody>
-          <a:bodyPr wrap="square">
-            <a:spAutoFit/>
-          </a:bodyPr>
-          <a:lstStyle/>
-          <a:p>
-            <a:pPr algn="ctr"/>
-            <a:r>
-              <a:rPr sz="2400" b="0" i="0">
-                <a:solidFill>
-                  <a:srgbClr val="AABBCC"/>
-                </a:solidFill>
-              </a:rPr>
-              <a:t>→</a:t>
-            </a:r>
-          </a:p>
-        </p:txBody>
-      </p:sp>
-      <p:sp>
-        <p:nvSpPr>
-          <p:cNvPr id="12" name="Rectangle 11"/>
-          <p:cNvSpPr/>
-          <p:nvPr/>
-        </p:nvSpPr>
-        <p:spPr>
-          <a:xfrm>
-            <a:off x="6268212" y="3931920"/>
-            <a:ext cx="2011680" cy="1051560"/>
-          </a:xfrm>
-          <a:prstGeom prst="rect">
-            <a:avLst/>
-          </a:prstGeom>
-          <a:solidFill>
-            <a:srgbClr val="1A6BAA"/>
-          </a:solidFill>
-          <a:ln>
-            <a:noFill/>
-          </a:ln>
-        </p:spPr>
-        <p:style>
-          <a:lnRef idx="1">
-            <a:schemeClr val="accent1"/>
-          </a:lnRef>
-          <a:fillRef idx="3">
-            <a:schemeClr val="accent1"/>
-          </a:fillRef>
-          <a:effectRef idx="2">
-            <a:schemeClr val="accent1"/>
-          </a:effectRef>
-          <a:fontRef idx="minor">
-            <a:schemeClr val="lt1"/>
-          </a:fontRef>
-        </p:style>
-        <p:txBody>
-          <a:bodyPr rtlCol="0" anchor="ctr"/>
-          <a:lstStyle/>
-          <a:p>
-            <a:pPr algn="ctr"/>
-            <a:endParaRPr/>
-          </a:p>
-        </p:txBody>
-      </p:sp>
-      <p:sp>
-        <p:nvSpPr>
-          <p:cNvPr id="13" name="TextBox 12"/>
-          <p:cNvSpPr txBox="1"/>
-          <p:nvPr/>
-        </p:nvSpPr>
-        <p:spPr>
-          <a:xfrm>
-            <a:off x="6268212" y="4069080"/>
-            <a:ext cx="2011680" cy="914400"/>
-          </a:xfrm>
-          <a:prstGeom prst="rect">
-            <a:avLst/>
-          </a:prstGeom>
-          <a:noFill/>
-        </p:spPr>
-        <p:txBody>
-          <a:bodyPr wrap="square">
-            <a:spAutoFit/>
-          </a:bodyPr>
-          <a:lstStyle/>
-          <a:p>
-            <a:pPr algn="ctr"/>
-            <a:r>
-              <a:rPr sz="1500" b="1" i="0">
-                <a:solidFill>
-                  <a:srgbClr val="FFFFFF"/>
-                </a:solidFill>
-              </a:rPr>
-              <a:t>Hidden 2
-128  ReLU</a:t>
-            </a:r>
-          </a:p>
-        </p:txBody>
-      </p:sp>
-      <p:sp>
-        <p:nvSpPr>
-          <p:cNvPr id="14" name="TextBox 13"/>
-          <p:cNvSpPr txBox="1"/>
-          <p:nvPr/>
-        </p:nvSpPr>
-        <p:spPr>
-          <a:xfrm>
-            <a:off x="8279892" y="4251960"/>
-            <a:ext cx="347472" cy="457200"/>
-          </a:xfrm>
-          <a:prstGeom prst="rect">
-            <a:avLst/>
-          </a:prstGeom>
-          <a:noFill/>
-        </p:spPr>
-        <p:txBody>
-          <a:bodyPr wrap="square">
-            <a:spAutoFit/>
-          </a:bodyPr>
-          <a:lstStyle/>
-          <a:p>
-            <a:pPr algn="ctr"/>
-            <a:r>
-              <a:rPr sz="2400" b="0" i="0">
-                <a:solidFill>
-                  <a:srgbClr val="AABBCC"/>
-                </a:solidFill>
-              </a:rPr>
-              <a:t>→</a:t>
-            </a:r>
-          </a:p>
-        </p:txBody>
-      </p:sp>
-      <p:sp>
-        <p:nvSpPr>
-          <p:cNvPr id="15" name="Rectangle 14"/>
-          <p:cNvSpPr/>
-          <p:nvPr/>
-        </p:nvSpPr>
-        <p:spPr>
-          <a:xfrm>
-            <a:off x="8627364" y="3931920"/>
-            <a:ext cx="2011680" cy="1051560"/>
-          </a:xfrm>
-          <a:prstGeom prst="rect">
-            <a:avLst/>
-          </a:prstGeom>
-          <a:solidFill>
-            <a:srgbClr val="4CAF50"/>
-          </a:solidFill>
-          <a:ln>
-            <a:noFill/>
-          </a:ln>
-        </p:spPr>
-        <p:style>
-          <a:lnRef idx="1">
-            <a:schemeClr val="accent1"/>
-          </a:lnRef>
-          <a:fillRef idx="3">
-            <a:schemeClr val="accent1"/>
-          </a:fillRef>
-          <a:effectRef idx="2">
-            <a:schemeClr val="accent1"/>
-          </a:effectRef>
-          <a:fontRef idx="minor">
-            <a:schemeClr val="lt1"/>
-          </a:fontRef>
-        </p:style>
-        <p:txBody>
-          <a:bodyPr rtlCol="0" anchor="ctr"/>
-          <a:lstStyle/>
-          <a:p>
-            <a:pPr algn="ctr"/>
-            <a:endParaRPr/>
-          </a:p>
-        </p:txBody>
-      </p:sp>
-      <p:sp>
-        <p:nvSpPr>
-          <p:cNvPr id="16" name="TextBox 15"/>
-          <p:cNvSpPr txBox="1"/>
-          <p:nvPr/>
-        </p:nvSpPr>
-        <p:spPr>
-          <a:xfrm>
-            <a:off x="8627364" y="4069080"/>
-            <a:ext cx="2011680" cy="914400"/>
-          </a:xfrm>
-          <a:prstGeom prst="rect">
-            <a:avLst/>
-          </a:prstGeom>
-          <a:noFill/>
-        </p:spPr>
-        <p:txBody>
-          <a:bodyPr wrap="square">
-            <a:spAutoFit/>
-          </a:bodyPr>
-          <a:lstStyle/>
-          <a:p>
-            <a:pPr algn="ctr"/>
-            <a:r>
-              <a:rPr sz="1500" b="1" i="0">
-                <a:solidFill>
-                  <a:srgbClr val="FFFFFF"/>
-                </a:solidFill>
-              </a:rPr>
-              <a:t>Output
-10 classes</a:t>
-            </a:r>
-          </a:p>
-        </p:txBody>
-      </p:sp>
-      <p:sp>
-        <p:nvSpPr>
-          <p:cNvPr id="17" name="TextBox 16"/>
-          <p:cNvSpPr txBox="1"/>
-          <p:nvPr/>
-        </p:nvSpPr>
-        <p:spPr>
-          <a:xfrm>
-            <a:off x="457200" y="3520440"/>
-            <a:ext cx="11247120" cy="347472"/>
-          </a:xfrm>
-          <a:prstGeom prst="rect">
-            <a:avLst/>
-          </a:prstGeom>
-          <a:noFill/>
-        </p:spPr>
-        <p:txBody>
-          <a:bodyPr wrap="square">
-            <a:spAutoFit/>
-          </a:bodyPr>
-          <a:lstStyle/>
-          <a:p>
-            <a:pPr algn="ctr"/>
-            <a:r>
-              <a:rPr sz="1600" b="0" i="1">
-                <a:solidFill>
-                  <a:srgbClr val="FFD700"/>
-                </a:solidFill>
-              </a:rPr>
-              <a:t>Flatten step: 28×28 → 784-dim vector</a:t>
-            </a:r>
-          </a:p>
-        </p:txBody>
-      </p:sp>
-      <p:sp>
-        <p:nvSpPr>
-          <p:cNvPr id="18" name="TextBox 17"/>
-          <p:cNvSpPr txBox="1"/>
-          <p:nvPr/>
-        </p:nvSpPr>
-        <p:spPr>
-          <a:xfrm>
-            <a:off x="6217920" y="1051560"/>
-            <a:ext cx="5303520" cy="685800"/>
-          </a:xfrm>
-          <a:prstGeom prst="rect">
-            <a:avLst/>
-          </a:prstGeom>
-          <a:noFill/>
-        </p:spPr>
-        <p:txBody>
-          <a:bodyPr wrap="square">
-            <a:spAutoFit/>
-          </a:bodyPr>
-          <a:lstStyle/>
-          <a:p>
-            <a:pPr algn="l"/>
-            <a:r>
-              <a:rPr sz="2000" b="1" dirty="0">
-                <a:solidFill>
-                  <a:srgbClr val="FFD700"/>
-                </a:solidFill>
-              </a:rPr>
-              <a:t>Results</a:t>
-            </a:r>
-          </a:p>
-          <a:p>
-            <a:pPr algn="l">
-              <a:spcBef>
-                <a:spcPts val="300"/>
-              </a:spcBef>
-            </a:pPr>
-            <a:r>
-              <a:rPr sz="1800" dirty="0">
-                <a:solidFill>
-                  <a:srgbClr val="CCE5FF"/>
-                </a:solidFill>
-              </a:rPr>
-              <a:t>•  Clean: 96.94%  |  Noisy: 96.08%</a:t>
-            </a:r>
-          </a:p>
-          <a:p>
-            <a:pPr algn="l">
-              <a:spcBef>
-                <a:spcPts val="300"/>
-              </a:spcBef>
-            </a:pPr>
-            <a:r>
-              <a:rPr sz="1800" dirty="0">
-                <a:solidFill>
-                  <a:srgbClr val="CCE5FF"/>
-                </a:solidFill>
-              </a:rPr>
-              <a:t>•  Drop under noise: −0.86%</a:t>
-            </a:r>
+              <a:t>235,146 parameters</a:t>
+            </a:r>
+            <a:endParaRPr lang="en-US" dirty="0"/>
           </a:p>
         </p:txBody>
       </p:sp>
@@ -7723,7 +8782,7 @@
         <p:spPr>
           <a:xfrm>
             <a:off x="457200" y="1051560"/>
-            <a:ext cx="5303520" cy="2286000"/>
+            <a:ext cx="5303520" cy="2977738"/>
           </a:xfrm>
           <a:prstGeom prst="rect">
             <a:avLst/>
@@ -7738,12 +8797,58 @@
           <a:p>
             <a:pPr algn="l"/>
             <a:r>
-              <a:rPr sz="2100" b="1">
+              <a:rPr sz="2100" b="1" dirty="0">
                 <a:solidFill>
                   <a:srgbClr val="00C2FF"/>
                 </a:solidFill>
               </a:rPr>
               <a:t>Overview</a:t>
+            </a:r>
+          </a:p>
+          <a:p>
+            <a:r>
+              <a:rPr lang="en-US" dirty="0">
+                <a:solidFill>
+                  <a:srgbClr val="CCE5FF"/>
+                </a:solidFill>
+              </a:rPr>
+              <a:t>•</a:t>
+            </a:r>
+            <a:r>
+              <a:rPr dirty="0">
+                <a:solidFill>
+                  <a:srgbClr val="CCE5FF"/>
+                </a:solidFill>
+              </a:rPr>
+              <a:t>  </a:t>
+            </a:r>
+            <a:r>
+              <a:rPr lang="en-US" dirty="0">
+                <a:solidFill>
+                  <a:srgbClr val="CCE5FF"/>
+                </a:solidFill>
+              </a:rPr>
+              <a:t>The Convolutional Neural Network (CNN) is designed to process image data by preserving spatial structure and learning local patterns such as edges and shapes.</a:t>
+            </a:r>
+          </a:p>
+          <a:p>
+            <a:r>
+              <a:rPr lang="en-US" dirty="0">
+                <a:solidFill>
+                  <a:srgbClr val="CCE5FF"/>
+                </a:solidFill>
+              </a:rPr>
+              <a:t>•  Unlike the MLP, the CNN takes the input image in its original 28 × 28 grayscale format and applies convolutional filters to extract features.</a:t>
+            </a:r>
+          </a:p>
+          <a:p>
+            <a:r>
+              <a:rPr sz="1900" dirty="0">
+                <a:solidFill>
+                  <a:srgbClr val="CCE5FF"/>
+                </a:solidFill>
+              </a:rPr>
+              <a:t>•  Spatial hierarchy via two conv layers + pooling</a:t>
             </a:r>
           </a:p>
           <a:p>
@@ -7753,13 +8858,605 @@
               </a:spcBef>
             </a:pPr>
             <a:r>
-              <a:rPr sz="1900">
+              <a:rPr sz="1900" dirty="0">
                 <a:solidFill>
                   <a:srgbClr val="CCE5FF"/>
                 </a:solidFill>
               </a:rPr>
-              <a:t>•  Operates directly on 28×28 images</a:t>
-            </a:r>
+              <a:t>•  Far fewer parameters than equivalent MLP</a:t>
+            </a:r>
+          </a:p>
+        </p:txBody>
+      </p:sp>
+      <p:sp>
+        <p:nvSpPr>
+          <p:cNvPr id="17" name="TextBox 16"/>
+          <p:cNvSpPr txBox="1"/>
+          <p:nvPr/>
+        </p:nvSpPr>
+        <p:spPr>
+          <a:xfrm>
+            <a:off x="8929052" y="5893308"/>
+            <a:ext cx="228600" cy="502920"/>
+          </a:xfrm>
+          <a:prstGeom prst="rect">
+            <a:avLst/>
+          </a:prstGeom>
+          <a:noFill/>
+        </p:spPr>
+        <p:txBody>
+          <a:bodyPr wrap="square">
+            <a:spAutoFit/>
+          </a:bodyPr>
+          <a:lstStyle/>
+          <a:p>
+            <a:pPr algn="ctr"/>
+            <a:r>
+              <a:rPr sz="2000" b="0" i="0" dirty="0">
+                <a:solidFill>
+                  <a:srgbClr val="AABBCC"/>
+                </a:solidFill>
+              </a:rPr>
+              <a:t>→</a:t>
+            </a:r>
+          </a:p>
+        </p:txBody>
+      </p:sp>
+      <p:grpSp>
+        <p:nvGrpSpPr>
+          <p:cNvPr id="21" name="Group 20">
+            <a:extLst>
+              <a:ext uri="{FF2B5EF4-FFF2-40B4-BE49-F238E27FC236}">
+                <a16:creationId xmlns:a16="http://schemas.microsoft.com/office/drawing/2014/main" id="{2A59AF20-6BFE-9D1A-2A5D-A7CEF3B7ACE9}"/>
+              </a:ext>
+            </a:extLst>
+          </p:cNvPr>
+          <p:cNvGrpSpPr/>
+          <p:nvPr/>
+        </p:nvGrpSpPr>
+        <p:grpSpPr>
+          <a:xfrm>
+            <a:off x="1293812" y="5504688"/>
+            <a:ext cx="9601200" cy="1188720"/>
+            <a:chOff x="1293876" y="3749039"/>
+            <a:chExt cx="9601200" cy="1188720"/>
+          </a:xfrm>
+        </p:grpSpPr>
+        <p:sp>
+          <p:nvSpPr>
+            <p:cNvPr id="6" name="Rectangle 5"/>
+            <p:cNvSpPr/>
+            <p:nvPr/>
+          </p:nvSpPr>
+          <p:spPr>
+            <a:xfrm>
+              <a:off x="1293876" y="3749039"/>
+              <a:ext cx="1737360" cy="1188720"/>
+            </a:xfrm>
+            <a:prstGeom prst="rect">
+              <a:avLst/>
+            </a:prstGeom>
+            <a:solidFill>
+              <a:srgbClr val="1A6BAA"/>
+            </a:solidFill>
+            <a:ln>
+              <a:noFill/>
+            </a:ln>
+          </p:spPr>
+          <p:style>
+            <a:lnRef idx="1">
+              <a:schemeClr val="accent1"/>
+            </a:lnRef>
+            <a:fillRef idx="3">
+              <a:schemeClr val="accent1"/>
+            </a:fillRef>
+            <a:effectRef idx="2">
+              <a:schemeClr val="accent1"/>
+            </a:effectRef>
+            <a:fontRef idx="minor">
+              <a:schemeClr val="lt1"/>
+            </a:fontRef>
+          </p:style>
+          <p:txBody>
+            <a:bodyPr rtlCol="0" anchor="ctr"/>
+            <a:lstStyle/>
+            <a:p>
+              <a:pPr algn="ctr"/>
+              <a:endParaRPr/>
+            </a:p>
+          </p:txBody>
+        </p:sp>
+        <p:sp>
+          <p:nvSpPr>
+            <p:cNvPr id="7" name="TextBox 6"/>
+            <p:cNvSpPr txBox="1"/>
+            <p:nvPr/>
+          </p:nvSpPr>
+          <p:spPr>
+            <a:xfrm>
+              <a:off x="1293876" y="3840479"/>
+              <a:ext cx="1737360" cy="1097280"/>
+            </a:xfrm>
+            <a:prstGeom prst="rect">
+              <a:avLst/>
+            </a:prstGeom>
+            <a:noFill/>
+          </p:spPr>
+          <p:txBody>
+            <a:bodyPr wrap="square">
+              <a:spAutoFit/>
+            </a:bodyPr>
+            <a:lstStyle/>
+            <a:p>
+              <a:pPr algn="ctr"/>
+              <a:r>
+                <a:rPr sz="1400" b="0" i="0">
+                  <a:solidFill>
+                    <a:srgbClr val="FFFFFF"/>
+                  </a:solidFill>
+                </a:rPr>
+                <a:t>Conv1
+32 filters 3×3
+ReLU</a:t>
+              </a:r>
+            </a:p>
+          </p:txBody>
+        </p:sp>
+        <p:sp>
+          <p:nvSpPr>
+            <p:cNvPr id="8" name="TextBox 7"/>
+            <p:cNvSpPr txBox="1"/>
+            <p:nvPr/>
+          </p:nvSpPr>
+          <p:spPr>
+            <a:xfrm>
+              <a:off x="3031236" y="4114799"/>
+              <a:ext cx="228600" cy="502920"/>
+            </a:xfrm>
+            <a:prstGeom prst="rect">
+              <a:avLst/>
+            </a:prstGeom>
+            <a:noFill/>
+          </p:spPr>
+          <p:txBody>
+            <a:bodyPr wrap="square">
+              <a:spAutoFit/>
+            </a:bodyPr>
+            <a:lstStyle/>
+            <a:p>
+              <a:pPr algn="ctr"/>
+              <a:r>
+                <a:rPr sz="2000" b="0" i="0">
+                  <a:solidFill>
+                    <a:srgbClr val="AABBCC"/>
+                  </a:solidFill>
+                </a:rPr>
+                <a:t>→</a:t>
+              </a:r>
+            </a:p>
+          </p:txBody>
+        </p:sp>
+        <p:sp>
+          <p:nvSpPr>
+            <p:cNvPr id="9" name="Rectangle 8"/>
+            <p:cNvSpPr/>
+            <p:nvPr/>
+          </p:nvSpPr>
+          <p:spPr>
+            <a:xfrm>
+              <a:off x="3259836" y="3749039"/>
+              <a:ext cx="1737360" cy="1188720"/>
+            </a:xfrm>
+            <a:prstGeom prst="rect">
+              <a:avLst/>
+            </a:prstGeom>
+            <a:solidFill>
+              <a:srgbClr val="1A6BAA"/>
+            </a:solidFill>
+            <a:ln>
+              <a:noFill/>
+            </a:ln>
+          </p:spPr>
+          <p:style>
+            <a:lnRef idx="1">
+              <a:schemeClr val="accent1"/>
+            </a:lnRef>
+            <a:fillRef idx="3">
+              <a:schemeClr val="accent1"/>
+            </a:fillRef>
+            <a:effectRef idx="2">
+              <a:schemeClr val="accent1"/>
+            </a:effectRef>
+            <a:fontRef idx="minor">
+              <a:schemeClr val="lt1"/>
+            </a:fontRef>
+          </p:style>
+          <p:txBody>
+            <a:bodyPr rtlCol="0" anchor="ctr"/>
+            <a:lstStyle/>
+            <a:p>
+              <a:pPr algn="ctr"/>
+              <a:endParaRPr/>
+            </a:p>
+          </p:txBody>
+        </p:sp>
+        <p:sp>
+          <p:nvSpPr>
+            <p:cNvPr id="10" name="TextBox 9"/>
+            <p:cNvSpPr txBox="1"/>
+            <p:nvPr/>
+          </p:nvSpPr>
+          <p:spPr>
+            <a:xfrm>
+              <a:off x="3259836" y="3840479"/>
+              <a:ext cx="1737360" cy="1097280"/>
+            </a:xfrm>
+            <a:prstGeom prst="rect">
+              <a:avLst/>
+            </a:prstGeom>
+            <a:noFill/>
+          </p:spPr>
+          <p:txBody>
+            <a:bodyPr wrap="square">
+              <a:spAutoFit/>
+            </a:bodyPr>
+            <a:lstStyle/>
+            <a:p>
+              <a:pPr algn="ctr"/>
+              <a:r>
+                <a:rPr sz="1400" b="0" i="0">
+                  <a:solidFill>
+                    <a:srgbClr val="FFFFFF"/>
+                  </a:solidFill>
+                </a:rPr>
+                <a:t>Conv2
+64 filters 3×3
+ReLU</a:t>
+              </a:r>
+            </a:p>
+          </p:txBody>
+        </p:sp>
+        <p:sp>
+          <p:nvSpPr>
+            <p:cNvPr id="11" name="TextBox 10"/>
+            <p:cNvSpPr txBox="1"/>
+            <p:nvPr/>
+          </p:nvSpPr>
+          <p:spPr>
+            <a:xfrm>
+              <a:off x="4997196" y="4114799"/>
+              <a:ext cx="228600" cy="502920"/>
+            </a:xfrm>
+            <a:prstGeom prst="rect">
+              <a:avLst/>
+            </a:prstGeom>
+            <a:noFill/>
+          </p:spPr>
+          <p:txBody>
+            <a:bodyPr wrap="square">
+              <a:spAutoFit/>
+            </a:bodyPr>
+            <a:lstStyle/>
+            <a:p>
+              <a:pPr algn="ctr"/>
+              <a:r>
+                <a:rPr sz="2000" b="0" i="0">
+                  <a:solidFill>
+                    <a:srgbClr val="AABBCC"/>
+                  </a:solidFill>
+                </a:rPr>
+                <a:t>→</a:t>
+              </a:r>
+            </a:p>
+          </p:txBody>
+        </p:sp>
+        <p:sp>
+          <p:nvSpPr>
+            <p:cNvPr id="12" name="Rectangle 11"/>
+            <p:cNvSpPr/>
+            <p:nvPr/>
+          </p:nvSpPr>
+          <p:spPr>
+            <a:xfrm>
+              <a:off x="5225796" y="3749039"/>
+              <a:ext cx="1737360" cy="1188720"/>
+            </a:xfrm>
+            <a:prstGeom prst="rect">
+              <a:avLst/>
+            </a:prstGeom>
+            <a:solidFill>
+              <a:srgbClr val="6A359A"/>
+            </a:solidFill>
+            <a:ln>
+              <a:noFill/>
+            </a:ln>
+          </p:spPr>
+          <p:style>
+            <a:lnRef idx="1">
+              <a:schemeClr val="accent1"/>
+            </a:lnRef>
+            <a:fillRef idx="3">
+              <a:schemeClr val="accent1"/>
+            </a:fillRef>
+            <a:effectRef idx="2">
+              <a:schemeClr val="accent1"/>
+            </a:effectRef>
+            <a:fontRef idx="minor">
+              <a:schemeClr val="lt1"/>
+            </a:fontRef>
+          </p:style>
+          <p:txBody>
+            <a:bodyPr rtlCol="0" anchor="ctr"/>
+            <a:lstStyle/>
+            <a:p>
+              <a:pPr algn="ctr"/>
+              <a:endParaRPr/>
+            </a:p>
+          </p:txBody>
+        </p:sp>
+        <p:sp>
+          <p:nvSpPr>
+            <p:cNvPr id="13" name="TextBox 12"/>
+            <p:cNvSpPr txBox="1"/>
+            <p:nvPr/>
+          </p:nvSpPr>
+          <p:spPr>
+            <a:xfrm>
+              <a:off x="5225796" y="3840479"/>
+              <a:ext cx="1737360" cy="1097280"/>
+            </a:xfrm>
+            <a:prstGeom prst="rect">
+              <a:avLst/>
+            </a:prstGeom>
+            <a:noFill/>
+          </p:spPr>
+          <p:txBody>
+            <a:bodyPr wrap="square">
+              <a:spAutoFit/>
+            </a:bodyPr>
+            <a:lstStyle/>
+            <a:p>
+              <a:pPr algn="ctr"/>
+              <a:r>
+                <a:rPr sz="1400" b="0" i="0">
+                  <a:solidFill>
+                    <a:srgbClr val="FFFFFF"/>
+                  </a:solidFill>
+                </a:rPr>
+                <a:t>MaxPool
+2×2</a:t>
+              </a:r>
+            </a:p>
+          </p:txBody>
+        </p:sp>
+        <p:sp>
+          <p:nvSpPr>
+            <p:cNvPr id="14" name="TextBox 13"/>
+            <p:cNvSpPr txBox="1"/>
+            <p:nvPr/>
+          </p:nvSpPr>
+          <p:spPr>
+            <a:xfrm>
+              <a:off x="6963156" y="4114799"/>
+              <a:ext cx="228600" cy="502920"/>
+            </a:xfrm>
+            <a:prstGeom prst="rect">
+              <a:avLst/>
+            </a:prstGeom>
+            <a:noFill/>
+          </p:spPr>
+          <p:txBody>
+            <a:bodyPr wrap="square">
+              <a:spAutoFit/>
+            </a:bodyPr>
+            <a:lstStyle/>
+            <a:p>
+              <a:pPr algn="ctr"/>
+              <a:r>
+                <a:rPr sz="2000" b="0" i="0">
+                  <a:solidFill>
+                    <a:srgbClr val="AABBCC"/>
+                  </a:solidFill>
+                </a:rPr>
+                <a:t>→</a:t>
+              </a:r>
+            </a:p>
+          </p:txBody>
+        </p:sp>
+        <p:sp>
+          <p:nvSpPr>
+            <p:cNvPr id="15" name="Rectangle 14"/>
+            <p:cNvSpPr/>
+            <p:nvPr/>
+          </p:nvSpPr>
+          <p:spPr>
+            <a:xfrm>
+              <a:off x="7191756" y="3749039"/>
+              <a:ext cx="1737360" cy="1188720"/>
+            </a:xfrm>
+            <a:prstGeom prst="rect">
+              <a:avLst/>
+            </a:prstGeom>
+            <a:solidFill>
+              <a:srgbClr val="1A6BAA"/>
+            </a:solidFill>
+            <a:ln>
+              <a:noFill/>
+            </a:ln>
+          </p:spPr>
+          <p:style>
+            <a:lnRef idx="1">
+              <a:schemeClr val="accent1"/>
+            </a:lnRef>
+            <a:fillRef idx="3">
+              <a:schemeClr val="accent1"/>
+            </a:fillRef>
+            <a:effectRef idx="2">
+              <a:schemeClr val="accent1"/>
+            </a:effectRef>
+            <a:fontRef idx="minor">
+              <a:schemeClr val="lt1"/>
+            </a:fontRef>
+          </p:style>
+          <p:txBody>
+            <a:bodyPr rtlCol="0" anchor="ctr"/>
+            <a:lstStyle/>
+            <a:p>
+              <a:pPr algn="ctr"/>
+              <a:endParaRPr/>
+            </a:p>
+          </p:txBody>
+        </p:sp>
+        <p:sp>
+          <p:nvSpPr>
+            <p:cNvPr id="16" name="TextBox 15"/>
+            <p:cNvSpPr txBox="1"/>
+            <p:nvPr/>
+          </p:nvSpPr>
+          <p:spPr>
+            <a:xfrm>
+              <a:off x="7191756" y="3840479"/>
+              <a:ext cx="1737360" cy="1097280"/>
+            </a:xfrm>
+            <a:prstGeom prst="rect">
+              <a:avLst/>
+            </a:prstGeom>
+            <a:noFill/>
+          </p:spPr>
+          <p:txBody>
+            <a:bodyPr wrap="square">
+              <a:spAutoFit/>
+            </a:bodyPr>
+            <a:lstStyle/>
+            <a:p>
+              <a:pPr algn="ctr"/>
+              <a:r>
+                <a:rPr sz="1400" b="0" i="0">
+                  <a:solidFill>
+                    <a:srgbClr val="FFFFFF"/>
+                  </a:solidFill>
+                </a:rPr>
+                <a:t>FC
+128 ReLU</a:t>
+              </a:r>
+            </a:p>
+          </p:txBody>
+        </p:sp>
+        <p:sp>
+          <p:nvSpPr>
+            <p:cNvPr id="18" name="Rectangle 17"/>
+            <p:cNvSpPr/>
+            <p:nvPr/>
+          </p:nvSpPr>
+          <p:spPr>
+            <a:xfrm>
+              <a:off x="9157716" y="3749039"/>
+              <a:ext cx="1737360" cy="1188720"/>
+            </a:xfrm>
+            <a:prstGeom prst="rect">
+              <a:avLst/>
+            </a:prstGeom>
+            <a:solidFill>
+              <a:srgbClr val="4CAF50"/>
+            </a:solidFill>
+            <a:ln>
+              <a:noFill/>
+            </a:ln>
+          </p:spPr>
+          <p:style>
+            <a:lnRef idx="1">
+              <a:schemeClr val="accent1"/>
+            </a:lnRef>
+            <a:fillRef idx="3">
+              <a:schemeClr val="accent1"/>
+            </a:fillRef>
+            <a:effectRef idx="2">
+              <a:schemeClr val="accent1"/>
+            </a:effectRef>
+            <a:fontRef idx="minor">
+              <a:schemeClr val="lt1"/>
+            </a:fontRef>
+          </p:style>
+          <p:txBody>
+            <a:bodyPr rtlCol="0" anchor="ctr"/>
+            <a:lstStyle/>
+            <a:p>
+              <a:pPr algn="ctr"/>
+              <a:endParaRPr/>
+            </a:p>
+          </p:txBody>
+        </p:sp>
+        <p:sp>
+          <p:nvSpPr>
+            <p:cNvPr id="19" name="TextBox 18"/>
+            <p:cNvSpPr txBox="1"/>
+            <p:nvPr/>
+          </p:nvSpPr>
+          <p:spPr>
+            <a:xfrm>
+              <a:off x="9157716" y="3840479"/>
+              <a:ext cx="1737360" cy="1097280"/>
+            </a:xfrm>
+            <a:prstGeom prst="rect">
+              <a:avLst/>
+            </a:prstGeom>
+            <a:noFill/>
+          </p:spPr>
+          <p:txBody>
+            <a:bodyPr wrap="square">
+              <a:spAutoFit/>
+            </a:bodyPr>
+            <a:lstStyle/>
+            <a:p>
+              <a:pPr algn="ctr"/>
+              <a:r>
+                <a:rPr sz="1400" b="0" i="0" dirty="0">
+                  <a:solidFill>
+                    <a:srgbClr val="FFFFFF"/>
+                  </a:solidFill>
+                </a:rPr>
+                <a:t>Output
+10 classes</a:t>
+              </a:r>
+            </a:p>
+          </p:txBody>
+        </p:sp>
+      </p:grpSp>
+      <p:sp>
+        <p:nvSpPr>
+          <p:cNvPr id="20" name="TextBox 19"/>
+          <p:cNvSpPr txBox="1"/>
+          <p:nvPr/>
+        </p:nvSpPr>
+        <p:spPr>
+          <a:xfrm>
+            <a:off x="6323076" y="1051560"/>
+            <a:ext cx="5303520" cy="715581"/>
+          </a:xfrm>
+          <a:prstGeom prst="rect">
+            <a:avLst/>
+          </a:prstGeom>
+          <a:noFill/>
+        </p:spPr>
+        <p:txBody>
+          <a:bodyPr wrap="square">
+            <a:spAutoFit/>
+          </a:bodyPr>
+          <a:lstStyle/>
+          <a:p>
+            <a:r>
+              <a:rPr lang="en-US" sz="2000" b="1" dirty="0">
+                <a:solidFill>
+                  <a:srgbClr val="FFD700"/>
+                </a:solidFill>
+              </a:rPr>
+              <a:t>Hyperparameters</a:t>
+            </a:r>
+            <a:endParaRPr sz="2000" b="1" dirty="0">
+              <a:solidFill>
+                <a:srgbClr val="4CAF50"/>
+              </a:solidFill>
+            </a:endParaRPr>
           </a:p>
           <a:p>
             <a:pPr algn="l">
@@ -7767,101 +9464,718 @@
                 <a:spcPts val="300"/>
               </a:spcBef>
             </a:pPr>
-            <a:r>
-              <a:rPr sz="1900">
-                <a:solidFill>
-                  <a:srgbClr val="CCE5FF"/>
-                </a:solidFill>
-              </a:rPr>
-              <a:t>•  Learns local features: edges, curves, strokes</a:t>
-            </a:r>
-          </a:p>
-          <a:p>
-            <a:pPr algn="l">
-              <a:spcBef>
-                <a:spcPts val="300"/>
-              </a:spcBef>
-            </a:pPr>
-            <a:r>
-              <a:rPr sz="1900">
-                <a:solidFill>
-                  <a:srgbClr val="CCE5FF"/>
-                </a:solidFill>
-              </a:rPr>
-              <a:t>•  Spatial hierarchy via two conv layers + pooling</a:t>
-            </a:r>
-          </a:p>
-          <a:p>
-            <a:pPr algn="l">
-              <a:spcBef>
-                <a:spcPts val="300"/>
-              </a:spcBef>
-            </a:pPr>
-            <a:r>
-              <a:rPr sz="1900">
-                <a:solidFill>
-                  <a:srgbClr val="CCE5FF"/>
-                </a:solidFill>
-              </a:rPr>
-              <a:t>•  Far fewer parameters than equivalent MLP</a:t>
-            </a:r>
-          </a:p>
-        </p:txBody>
-      </p:sp>
-      <p:sp>
-        <p:nvSpPr>
-          <p:cNvPr id="6" name="Rectangle 5"/>
-          <p:cNvSpPr/>
-          <p:nvPr/>
-        </p:nvSpPr>
-        <p:spPr>
-          <a:xfrm>
-            <a:off x="1293876" y="3749039"/>
-            <a:ext cx="1737360" cy="1188720"/>
-          </a:xfrm>
-          <a:prstGeom prst="rect">
-            <a:avLst/>
-          </a:prstGeom>
-          <a:solidFill>
-            <a:srgbClr val="1A6BAA"/>
-          </a:solidFill>
-          <a:ln>
-            <a:noFill/>
-          </a:ln>
-        </p:spPr>
-        <p:style>
-          <a:lnRef idx="1">
-            <a:schemeClr val="accent1"/>
-          </a:lnRef>
-          <a:fillRef idx="3">
-            <a:schemeClr val="accent1"/>
-          </a:fillRef>
-          <a:effectRef idx="2">
-            <a:schemeClr val="accent1"/>
-          </a:effectRef>
-          <a:fontRef idx="minor">
-            <a:schemeClr val="lt1"/>
-          </a:fontRef>
-        </p:style>
-        <p:txBody>
-          <a:bodyPr rtlCol="0" anchor="ctr"/>
-          <a:lstStyle/>
-          <a:p>
-            <a:pPr algn="ctr"/>
-            <a:endParaRPr/>
-          </a:p>
-        </p:txBody>
-      </p:sp>
-      <p:sp>
-        <p:nvSpPr>
-          <p:cNvPr id="7" name="TextBox 6"/>
+            <a:endParaRPr sz="1800" dirty="0">
+              <a:solidFill>
+                <a:srgbClr val="CCE5FF"/>
+              </a:solidFill>
+            </a:endParaRPr>
+          </a:p>
+        </p:txBody>
+      </p:sp>
+      <p:graphicFrame>
+        <p:nvGraphicFramePr>
+          <p:cNvPr id="23" name="Table 22">
+            <a:extLst>
+              <a:ext uri="{FF2B5EF4-FFF2-40B4-BE49-F238E27FC236}">
+                <a16:creationId xmlns:a16="http://schemas.microsoft.com/office/drawing/2014/main" id="{DB61977B-D74B-3697-7F5C-6E1DF4B47B80}"/>
+              </a:ext>
+            </a:extLst>
+          </p:cNvPr>
+          <p:cNvGraphicFramePr>
+            <a:graphicFrameLocks noGrp="1"/>
+          </p:cNvGraphicFramePr>
+          <p:nvPr>
+            <p:extLst>
+              <p:ext uri="{D42A27DB-BD31-4B8C-83A1-F6EECF244321}">
+                <p14:modId xmlns:p14="http://schemas.microsoft.com/office/powerpoint/2010/main" val="829398662"/>
+              </p:ext>
+            </p:extLst>
+          </p:nvPr>
+        </p:nvGraphicFramePr>
+        <p:xfrm>
+          <a:off x="6990515" y="1454721"/>
+          <a:ext cx="3415394" cy="1402080"/>
+        </p:xfrm>
+        <a:graphic>
+          <a:graphicData uri="http://schemas.openxmlformats.org/drawingml/2006/table">
+            <a:tbl>
+              <a:tblPr>
+                <a:tableStyleId>{2D5ABB26-0587-4C30-8999-92F81FD0307C}</a:tableStyleId>
+              </a:tblPr>
+              <a:tblGrid>
+                <a:gridCol w="1673214">
+                  <a:extLst>
+                    <a:ext uri="{9D8B030D-6E8A-4147-A177-3AD203B41FA5}">
+                      <a16:colId xmlns:a16="http://schemas.microsoft.com/office/drawing/2014/main" val="1940200092"/>
+                    </a:ext>
+                  </a:extLst>
+                </a:gridCol>
+                <a:gridCol w="1742180">
+                  <a:extLst>
+                    <a:ext uri="{9D8B030D-6E8A-4147-A177-3AD203B41FA5}">
+                      <a16:colId xmlns:a16="http://schemas.microsoft.com/office/drawing/2014/main" val="76769100"/>
+                    </a:ext>
+                  </a:extLst>
+                </a:gridCol>
+              </a:tblGrid>
+              <a:tr h="243581">
+                <a:tc>
+                  <a:txBody>
+                    <a:bodyPr/>
+                    <a:lstStyle/>
+                    <a:p>
+                      <a:pPr algn="ctr">
+                        <a:buNone/>
+                      </a:pPr>
+                      <a:r>
+                        <a:rPr lang="en-US" sz="1800" kern="1200" dirty="0">
+                          <a:solidFill>
+                            <a:srgbClr val="CCE5FF"/>
+                          </a:solidFill>
+                        </a:rPr>
+                        <a:t>Optimizer</a:t>
+                      </a:r>
+                      <a:endParaRPr lang="en-US" sz="1800" kern="1200" dirty="0">
+                        <a:solidFill>
+                          <a:srgbClr val="CCE5FF"/>
+                        </a:solidFill>
+                        <a:latin typeface="+mn-lt"/>
+                        <a:ea typeface="+mn-ea"/>
+                        <a:cs typeface="+mn-cs"/>
+                      </a:endParaRPr>
+                    </a:p>
+                  </a:txBody>
+                  <a:tcPr marL="57150" marR="57150" marT="38100" marB="38100" anchor="ctr"/>
+                </a:tc>
+                <a:tc>
+                  <a:txBody>
+                    <a:bodyPr/>
+                    <a:lstStyle/>
+                    <a:p>
+                      <a:pPr algn="ctr">
+                        <a:buNone/>
+                      </a:pPr>
+                      <a:r>
+                        <a:rPr lang="en-US" sz="1800" kern="1200" dirty="0">
+                          <a:solidFill>
+                            <a:srgbClr val="CCE5FF"/>
+                          </a:solidFill>
+                        </a:rPr>
+                        <a:t>Adam</a:t>
+                      </a:r>
+                      <a:endParaRPr lang="en-US" sz="1800" kern="1200" dirty="0">
+                        <a:solidFill>
+                          <a:srgbClr val="CCE5FF"/>
+                        </a:solidFill>
+                        <a:latin typeface="+mn-lt"/>
+                        <a:ea typeface="+mn-ea"/>
+                        <a:cs typeface="+mn-cs"/>
+                      </a:endParaRPr>
+                    </a:p>
+                  </a:txBody>
+                  <a:tcPr marL="57150" marR="57150" marT="38100" marB="38100" anchor="ctr"/>
+                </a:tc>
+                <a:extLst>
+                  <a:ext uri="{0D108BD9-81ED-4DB2-BD59-A6C34878D82A}">
+                    <a16:rowId xmlns:a16="http://schemas.microsoft.com/office/drawing/2014/main" val="4234817580"/>
+                  </a:ext>
+                </a:extLst>
+              </a:tr>
+              <a:tr h="243581">
+                <a:tc>
+                  <a:txBody>
+                    <a:bodyPr/>
+                    <a:lstStyle/>
+                    <a:p>
+                      <a:pPr algn="ctr">
+                        <a:buNone/>
+                      </a:pPr>
+                      <a:r>
+                        <a:rPr lang="en-US" sz="1800" kern="1200" dirty="0">
+                          <a:solidFill>
+                            <a:srgbClr val="CCE5FF"/>
+                          </a:solidFill>
+                        </a:rPr>
+                        <a:t>Learning rate</a:t>
+                      </a:r>
+                      <a:endParaRPr lang="en-US" sz="1800" kern="1200" dirty="0">
+                        <a:solidFill>
+                          <a:srgbClr val="CCE5FF"/>
+                        </a:solidFill>
+                        <a:latin typeface="+mn-lt"/>
+                        <a:ea typeface="+mn-ea"/>
+                        <a:cs typeface="+mn-cs"/>
+                      </a:endParaRPr>
+                    </a:p>
+                  </a:txBody>
+                  <a:tcPr marL="57150" marR="57150" marT="38100" marB="38100" anchor="ctr"/>
+                </a:tc>
+                <a:tc>
+                  <a:txBody>
+                    <a:bodyPr/>
+                    <a:lstStyle/>
+                    <a:p>
+                      <a:pPr algn="ctr">
+                        <a:buNone/>
+                      </a:pPr>
+                      <a:r>
+                        <a:rPr lang="en-US" sz="1800" kern="1200" dirty="0">
+                          <a:solidFill>
+                            <a:srgbClr val="CCE5FF"/>
+                          </a:solidFill>
+                        </a:rPr>
+                        <a:t>1e-3</a:t>
+                      </a:r>
+                      <a:endParaRPr lang="en-US" sz="1800" kern="1200" dirty="0">
+                        <a:solidFill>
+                          <a:srgbClr val="CCE5FF"/>
+                        </a:solidFill>
+                        <a:latin typeface="+mn-lt"/>
+                        <a:ea typeface="+mn-ea"/>
+                        <a:cs typeface="+mn-cs"/>
+                      </a:endParaRPr>
+                    </a:p>
+                  </a:txBody>
+                  <a:tcPr marL="57150" marR="57150" marT="38100" marB="38100" anchor="ctr"/>
+                </a:tc>
+                <a:extLst>
+                  <a:ext uri="{0D108BD9-81ED-4DB2-BD59-A6C34878D82A}">
+                    <a16:rowId xmlns:a16="http://schemas.microsoft.com/office/drawing/2014/main" val="2980104865"/>
+                  </a:ext>
+                </a:extLst>
+              </a:tr>
+              <a:tr h="243581">
+                <a:tc>
+                  <a:txBody>
+                    <a:bodyPr/>
+                    <a:lstStyle/>
+                    <a:p>
+                      <a:pPr algn="ctr">
+                        <a:buNone/>
+                      </a:pPr>
+                      <a:r>
+                        <a:rPr lang="en-US" sz="1800" kern="1200">
+                          <a:solidFill>
+                            <a:srgbClr val="CCE5FF"/>
+                          </a:solidFill>
+                        </a:rPr>
+                        <a:t>Loss function</a:t>
+                      </a:r>
+                      <a:endParaRPr lang="en-US" sz="1800" kern="1200">
+                        <a:solidFill>
+                          <a:srgbClr val="CCE5FF"/>
+                        </a:solidFill>
+                        <a:latin typeface="+mn-lt"/>
+                        <a:ea typeface="+mn-ea"/>
+                        <a:cs typeface="+mn-cs"/>
+                      </a:endParaRPr>
+                    </a:p>
+                  </a:txBody>
+                  <a:tcPr marL="57150" marR="57150" marT="38100" marB="38100" anchor="ctr"/>
+                </a:tc>
+                <a:tc>
+                  <a:txBody>
+                    <a:bodyPr/>
+                    <a:lstStyle/>
+                    <a:p>
+                      <a:pPr algn="ctr">
+                        <a:buNone/>
+                      </a:pPr>
+                      <a:r>
+                        <a:rPr lang="en-US" sz="1800" kern="1200" dirty="0" err="1">
+                          <a:solidFill>
+                            <a:srgbClr val="CCE5FF"/>
+                          </a:solidFill>
+                        </a:rPr>
+                        <a:t>CrossEntropyLoss</a:t>
+                      </a:r>
+                      <a:endParaRPr lang="en-US" sz="1800" kern="1200" dirty="0">
+                        <a:solidFill>
+                          <a:srgbClr val="CCE5FF"/>
+                        </a:solidFill>
+                        <a:latin typeface="+mn-lt"/>
+                        <a:ea typeface="+mn-ea"/>
+                        <a:cs typeface="+mn-cs"/>
+                      </a:endParaRPr>
+                    </a:p>
+                  </a:txBody>
+                  <a:tcPr marL="57150" marR="57150" marT="38100" marB="38100" anchor="ctr"/>
+                </a:tc>
+                <a:extLst>
+                  <a:ext uri="{0D108BD9-81ED-4DB2-BD59-A6C34878D82A}">
+                    <a16:rowId xmlns:a16="http://schemas.microsoft.com/office/drawing/2014/main" val="2810740029"/>
+                  </a:ext>
+                </a:extLst>
+              </a:tr>
+              <a:tr h="243581">
+                <a:tc>
+                  <a:txBody>
+                    <a:bodyPr/>
+                    <a:lstStyle/>
+                    <a:p>
+                      <a:pPr algn="ctr">
+                        <a:buNone/>
+                      </a:pPr>
+                      <a:r>
+                        <a:rPr lang="en-US" sz="1800" kern="1200" dirty="0">
+                          <a:solidFill>
+                            <a:srgbClr val="CCE5FF"/>
+                          </a:solidFill>
+                        </a:rPr>
+                        <a:t>Epochs</a:t>
+                      </a:r>
+                      <a:endParaRPr lang="en-US" sz="1800" kern="1200" dirty="0">
+                        <a:solidFill>
+                          <a:srgbClr val="CCE5FF"/>
+                        </a:solidFill>
+                        <a:latin typeface="+mn-lt"/>
+                        <a:ea typeface="+mn-ea"/>
+                        <a:cs typeface="+mn-cs"/>
+                      </a:endParaRPr>
+                    </a:p>
+                  </a:txBody>
+                  <a:tcPr marL="57150" marR="57150" marT="38100" marB="38100" anchor="ctr"/>
+                </a:tc>
+                <a:tc>
+                  <a:txBody>
+                    <a:bodyPr/>
+                    <a:lstStyle/>
+                    <a:p>
+                      <a:pPr algn="ctr">
+                        <a:buNone/>
+                      </a:pPr>
+                      <a:r>
+                        <a:rPr lang="en-US" sz="1800" kern="1200" dirty="0">
+                          <a:solidFill>
+                            <a:srgbClr val="CCE5FF"/>
+                          </a:solidFill>
+                        </a:rPr>
+                        <a:t>5</a:t>
+                      </a:r>
+                      <a:endParaRPr lang="en-US" sz="1800" kern="1200" dirty="0">
+                        <a:solidFill>
+                          <a:srgbClr val="CCE5FF"/>
+                        </a:solidFill>
+                        <a:latin typeface="+mn-lt"/>
+                        <a:ea typeface="+mn-ea"/>
+                        <a:cs typeface="+mn-cs"/>
+                      </a:endParaRPr>
+                    </a:p>
+                  </a:txBody>
+                  <a:tcPr marL="57150" marR="57150" marT="38100" marB="38100" anchor="ctr"/>
+                </a:tc>
+                <a:extLst>
+                  <a:ext uri="{0D108BD9-81ED-4DB2-BD59-A6C34878D82A}">
+                    <a16:rowId xmlns:a16="http://schemas.microsoft.com/office/drawing/2014/main" val="3901992980"/>
+                  </a:ext>
+                </a:extLst>
+              </a:tr>
+            </a:tbl>
+          </a:graphicData>
+        </a:graphic>
+      </p:graphicFrame>
+      <p:graphicFrame>
+        <p:nvGraphicFramePr>
+          <p:cNvPr id="24" name="Table 23">
+            <a:extLst>
+              <a:ext uri="{FF2B5EF4-FFF2-40B4-BE49-F238E27FC236}">
+                <a16:creationId xmlns:a16="http://schemas.microsoft.com/office/drawing/2014/main" id="{44B6E662-E4DD-BD4F-25B9-C31F873D7E0E}"/>
+              </a:ext>
+            </a:extLst>
+          </p:cNvPr>
+          <p:cNvGraphicFramePr>
+            <a:graphicFrameLocks noGrp="1"/>
+          </p:cNvGraphicFramePr>
+          <p:nvPr>
+            <p:extLst>
+              <p:ext uri="{D42A27DB-BD31-4B8C-83A1-F6EECF244321}">
+                <p14:modId xmlns:p14="http://schemas.microsoft.com/office/powerpoint/2010/main" val="3493239416"/>
+              </p:ext>
+            </p:extLst>
+          </p:nvPr>
+        </p:nvGraphicFramePr>
+        <p:xfrm>
+          <a:off x="6265964" y="2866643"/>
+          <a:ext cx="5417743" cy="2439440"/>
+        </p:xfrm>
+        <a:graphic>
+          <a:graphicData uri="http://schemas.openxmlformats.org/drawingml/2006/table">
+            <a:tbl>
+              <a:tblPr>
+                <a:tableStyleId>{2D5ABB26-0587-4C30-8999-92F81FD0307C}</a:tableStyleId>
+              </a:tblPr>
+              <a:tblGrid>
+                <a:gridCol w="1989427">
+                  <a:extLst>
+                    <a:ext uri="{9D8B030D-6E8A-4147-A177-3AD203B41FA5}">
+                      <a16:colId xmlns:a16="http://schemas.microsoft.com/office/drawing/2014/main" val="123614511"/>
+                    </a:ext>
+                  </a:extLst>
+                </a:gridCol>
+                <a:gridCol w="1714158">
+                  <a:extLst>
+                    <a:ext uri="{9D8B030D-6E8A-4147-A177-3AD203B41FA5}">
+                      <a16:colId xmlns:a16="http://schemas.microsoft.com/office/drawing/2014/main" val="2267495501"/>
+                    </a:ext>
+                  </a:extLst>
+                </a:gridCol>
+                <a:gridCol w="1714158">
+                  <a:extLst>
+                    <a:ext uri="{9D8B030D-6E8A-4147-A177-3AD203B41FA5}">
+                      <a16:colId xmlns:a16="http://schemas.microsoft.com/office/drawing/2014/main" val="424811450"/>
+                    </a:ext>
+                  </a:extLst>
+                </a:gridCol>
+              </a:tblGrid>
+              <a:tr h="306553">
+                <a:tc>
+                  <a:txBody>
+                    <a:bodyPr/>
+                    <a:lstStyle/>
+                    <a:p>
+                      <a:pPr marL="0" algn="ctr" defTabSz="457063" rtl="0" eaLnBrk="1" latinLnBrk="0" hangingPunct="1">
+                        <a:buNone/>
+                      </a:pPr>
+                      <a:r>
+                        <a:rPr lang="en-US" sz="1600" kern="1200" dirty="0">
+                          <a:solidFill>
+                            <a:schemeClr val="accent1">
+                              <a:lumMod val="20000"/>
+                              <a:lumOff val="80000"/>
+                            </a:schemeClr>
+                          </a:solidFill>
+                          <a:latin typeface="+mn-lt"/>
+                          <a:ea typeface="+mn-ea"/>
+                          <a:cs typeface="+mn-cs"/>
+                        </a:rPr>
+                        <a:t>Layer</a:t>
+                      </a:r>
+                    </a:p>
+                  </a:txBody>
+                  <a:tcPr marL="57150" marR="57150" marT="38100" marB="38100" anchor="ctr"/>
+                </a:tc>
+                <a:tc>
+                  <a:txBody>
+                    <a:bodyPr/>
+                    <a:lstStyle/>
+                    <a:p>
+                      <a:pPr marL="0" algn="ctr" defTabSz="457063" rtl="0" eaLnBrk="1" latinLnBrk="0" hangingPunct="1">
+                        <a:buNone/>
+                      </a:pPr>
+                      <a:r>
+                        <a:rPr lang="en-US" sz="1600" kern="1200">
+                          <a:solidFill>
+                            <a:schemeClr val="accent1">
+                              <a:lumMod val="20000"/>
+                              <a:lumOff val="80000"/>
+                            </a:schemeClr>
+                          </a:solidFill>
+                          <a:latin typeface="+mn-lt"/>
+                          <a:ea typeface="+mn-ea"/>
+                          <a:cs typeface="+mn-cs"/>
+                        </a:rPr>
+                        <a:t>Calculation</a:t>
+                      </a:r>
+                    </a:p>
+                  </a:txBody>
+                  <a:tcPr marL="57150" marR="57150" marT="38100" marB="38100" anchor="ctr"/>
+                </a:tc>
+                <a:tc>
+                  <a:txBody>
+                    <a:bodyPr/>
+                    <a:lstStyle/>
+                    <a:p>
+                      <a:pPr marL="0" algn="ctr" defTabSz="457063" rtl="0" eaLnBrk="1" latinLnBrk="0" hangingPunct="1">
+                        <a:buNone/>
+                      </a:pPr>
+                      <a:r>
+                        <a:rPr lang="en-US" sz="1600" kern="1200" dirty="0">
+                          <a:solidFill>
+                            <a:schemeClr val="accent1">
+                              <a:lumMod val="20000"/>
+                              <a:lumOff val="80000"/>
+                            </a:schemeClr>
+                          </a:solidFill>
+                          <a:latin typeface="+mn-lt"/>
+                          <a:ea typeface="+mn-ea"/>
+                          <a:cs typeface="+mn-cs"/>
+                        </a:rPr>
+                        <a:t>Params</a:t>
+                      </a:r>
+                    </a:p>
+                  </a:txBody>
+                  <a:tcPr marL="57150" marR="57150" marT="38100" marB="38100" anchor="ctr"/>
+                </a:tc>
+                <a:extLst>
+                  <a:ext uri="{0D108BD9-81ED-4DB2-BD59-A6C34878D82A}">
+                    <a16:rowId xmlns:a16="http://schemas.microsoft.com/office/drawing/2014/main" val="607915163"/>
+                  </a:ext>
+                </a:extLst>
+              </a:tr>
+              <a:tr h="529850">
+                <a:tc>
+                  <a:txBody>
+                    <a:bodyPr/>
+                    <a:lstStyle/>
+                    <a:p>
+                      <a:pPr>
+                        <a:buNone/>
+                      </a:pPr>
+                      <a:r>
+                        <a:rPr lang="en-US" sz="1600" dirty="0">
+                          <a:effectLst/>
+                        </a:rPr>
+                        <a:t>Conv2d(1→32, 3×3)</a:t>
+                      </a:r>
+                    </a:p>
+                  </a:txBody>
+                  <a:tcPr marL="57150" marR="57150" marT="38100" marB="38100" anchor="ctr"/>
+                </a:tc>
+                <a:tc>
+                  <a:txBody>
+                    <a:bodyPr/>
+                    <a:lstStyle/>
+                    <a:p>
+                      <a:pPr>
+                        <a:buNone/>
+                      </a:pPr>
+                      <a:r>
+                        <a:rPr lang="en-US" sz="1600" dirty="0">
+                          <a:effectLst/>
+                        </a:rPr>
+                        <a:t>1×32×3×3 + 32</a:t>
+                      </a:r>
+                    </a:p>
+                  </a:txBody>
+                  <a:tcPr marL="57150" marR="57150" marT="38100" marB="38100" anchor="ctr"/>
+                </a:tc>
+                <a:tc>
+                  <a:txBody>
+                    <a:bodyPr/>
+                    <a:lstStyle/>
+                    <a:p>
+                      <a:pPr>
+                        <a:buNone/>
+                      </a:pPr>
+                      <a:r>
+                        <a:rPr lang="en-US" sz="1600">
+                          <a:effectLst/>
+                        </a:rPr>
+                        <a:t>320</a:t>
+                      </a:r>
+                    </a:p>
+                  </a:txBody>
+                  <a:tcPr marL="57150" marR="57150" marT="38100" marB="38100" anchor="ctr"/>
+                </a:tc>
+                <a:extLst>
+                  <a:ext uri="{0D108BD9-81ED-4DB2-BD59-A6C34878D82A}">
+                    <a16:rowId xmlns:a16="http://schemas.microsoft.com/office/drawing/2014/main" val="625260943"/>
+                  </a:ext>
+                </a:extLst>
+              </a:tr>
+              <a:tr h="529850">
+                <a:tc>
+                  <a:txBody>
+                    <a:bodyPr/>
+                    <a:lstStyle/>
+                    <a:p>
+                      <a:pPr>
+                        <a:buNone/>
+                      </a:pPr>
+                      <a:r>
+                        <a:rPr lang="en-US" sz="1600">
+                          <a:effectLst/>
+                        </a:rPr>
+                        <a:t>Conv2d(32→64, 3×3)</a:t>
+                      </a:r>
+                    </a:p>
+                  </a:txBody>
+                  <a:tcPr marL="57150" marR="57150" marT="38100" marB="38100" anchor="ctr"/>
+                </a:tc>
+                <a:tc>
+                  <a:txBody>
+                    <a:bodyPr/>
+                    <a:lstStyle/>
+                    <a:p>
+                      <a:pPr>
+                        <a:buNone/>
+                      </a:pPr>
+                      <a:r>
+                        <a:rPr lang="en-US" sz="1600">
+                          <a:effectLst/>
+                        </a:rPr>
+                        <a:t>32×64×3×3 + 64</a:t>
+                      </a:r>
+                    </a:p>
+                  </a:txBody>
+                  <a:tcPr marL="57150" marR="57150" marT="38100" marB="38100" anchor="ctr"/>
+                </a:tc>
+                <a:tc>
+                  <a:txBody>
+                    <a:bodyPr/>
+                    <a:lstStyle/>
+                    <a:p>
+                      <a:pPr>
+                        <a:buNone/>
+                      </a:pPr>
+                      <a:r>
+                        <a:rPr lang="en-US" sz="1600">
+                          <a:effectLst/>
+                        </a:rPr>
+                        <a:t>18,496</a:t>
+                      </a:r>
+                    </a:p>
+                  </a:txBody>
+                  <a:tcPr marL="57150" marR="57150" marT="38100" marB="38100" anchor="ctr"/>
+                </a:tc>
+                <a:extLst>
+                  <a:ext uri="{0D108BD9-81ED-4DB2-BD59-A6C34878D82A}">
+                    <a16:rowId xmlns:a16="http://schemas.microsoft.com/office/drawing/2014/main" val="858126329"/>
+                  </a:ext>
+                </a:extLst>
+              </a:tr>
+              <a:tr h="529850">
+                <a:tc>
+                  <a:txBody>
+                    <a:bodyPr/>
+                    <a:lstStyle/>
+                    <a:p>
+                      <a:pPr>
+                        <a:buNone/>
+                      </a:pPr>
+                      <a:r>
+                        <a:rPr lang="en-US" sz="1600">
+                          <a:effectLst/>
+                        </a:rPr>
+                        <a:t>Linear(12544 → 128)</a:t>
+                      </a:r>
+                    </a:p>
+                  </a:txBody>
+                  <a:tcPr marL="57150" marR="57150" marT="38100" marB="38100" anchor="ctr"/>
+                </a:tc>
+                <a:tc>
+                  <a:txBody>
+                    <a:bodyPr/>
+                    <a:lstStyle/>
+                    <a:p>
+                      <a:pPr>
+                        <a:buNone/>
+                      </a:pPr>
+                      <a:r>
+                        <a:rPr lang="en-US" sz="1600">
+                          <a:effectLst/>
+                        </a:rPr>
+                        <a:t>12544×128 + 128</a:t>
+                      </a:r>
+                    </a:p>
+                  </a:txBody>
+                  <a:tcPr marL="57150" marR="57150" marT="38100" marB="38100" anchor="ctr"/>
+                </a:tc>
+                <a:tc>
+                  <a:txBody>
+                    <a:bodyPr/>
+                    <a:lstStyle/>
+                    <a:p>
+                      <a:pPr>
+                        <a:buNone/>
+                      </a:pPr>
+                      <a:r>
+                        <a:rPr lang="en-US" sz="1600" dirty="0">
+                          <a:effectLst/>
+                        </a:rPr>
+                        <a:t>1,605,760</a:t>
+                      </a:r>
+                    </a:p>
+                  </a:txBody>
+                  <a:tcPr marL="57150" marR="57150" marT="38100" marB="38100" anchor="ctr"/>
+                </a:tc>
+                <a:extLst>
+                  <a:ext uri="{0D108BD9-81ED-4DB2-BD59-A6C34878D82A}">
+                    <a16:rowId xmlns:a16="http://schemas.microsoft.com/office/drawing/2014/main" val="4271357990"/>
+                  </a:ext>
+                </a:extLst>
+              </a:tr>
+              <a:tr h="529850">
+                <a:tc>
+                  <a:txBody>
+                    <a:bodyPr/>
+                    <a:lstStyle/>
+                    <a:p>
+                      <a:pPr>
+                        <a:buNone/>
+                      </a:pPr>
+                      <a:r>
+                        <a:rPr lang="en-US" sz="1600">
+                          <a:effectLst/>
+                        </a:rPr>
+                        <a:t>Linear(128 → 10)</a:t>
+                      </a:r>
+                    </a:p>
+                  </a:txBody>
+                  <a:tcPr marL="57150" marR="57150" marT="38100" marB="38100" anchor="ctr"/>
+                </a:tc>
+                <a:tc>
+                  <a:txBody>
+                    <a:bodyPr/>
+                    <a:lstStyle/>
+                    <a:p>
+                      <a:pPr>
+                        <a:buNone/>
+                      </a:pPr>
+                      <a:r>
+                        <a:rPr lang="en-US" sz="1600">
+                          <a:effectLst/>
+                        </a:rPr>
+                        <a:t>128×10 + 10</a:t>
+                      </a:r>
+                    </a:p>
+                  </a:txBody>
+                  <a:tcPr marL="57150" marR="57150" marT="38100" marB="38100" anchor="ctr"/>
+                </a:tc>
+                <a:tc>
+                  <a:txBody>
+                    <a:bodyPr/>
+                    <a:lstStyle/>
+                    <a:p>
+                      <a:pPr>
+                        <a:buNone/>
+                      </a:pPr>
+                      <a:r>
+                        <a:rPr lang="en-US" sz="1600" dirty="0">
+                          <a:effectLst/>
+                        </a:rPr>
+                        <a:t>1,290</a:t>
+                      </a:r>
+                    </a:p>
+                  </a:txBody>
+                  <a:tcPr marL="57150" marR="57150" marT="38100" marB="38100" anchor="ctr"/>
+                </a:tc>
+                <a:extLst>
+                  <a:ext uri="{0D108BD9-81ED-4DB2-BD59-A6C34878D82A}">
+                    <a16:rowId xmlns:a16="http://schemas.microsoft.com/office/drawing/2014/main" val="3498993714"/>
+                  </a:ext>
+                </a:extLst>
+              </a:tr>
+            </a:tbl>
+          </a:graphicData>
+        </a:graphic>
+      </p:graphicFrame>
+      <p:sp>
+        <p:nvSpPr>
+          <p:cNvPr id="25" name="TextBox 24">
+            <a:extLst>
+              <a:ext uri="{FF2B5EF4-FFF2-40B4-BE49-F238E27FC236}">
+                <a16:creationId xmlns:a16="http://schemas.microsoft.com/office/drawing/2014/main" id="{A7698F5F-086E-E996-466F-0EEB7145C0E7}"/>
+              </a:ext>
+            </a:extLst>
+          </p:cNvPr>
           <p:cNvSpPr txBox="1"/>
           <p:nvPr/>
         </p:nvSpPr>
         <p:spPr>
           <a:xfrm>
-            <a:off x="1293876" y="3840479"/>
-            <a:ext cx="1737360" cy="1097280"/>
+            <a:off x="10026332" y="5135356"/>
+            <a:ext cx="6097836" cy="369332"/>
           </a:xfrm>
           <a:prstGeom prst="rect">
             <a:avLst/>
@@ -7874,549 +10188,17 @@
           </a:bodyPr>
           <a:lstStyle/>
           <a:p>
-            <a:pPr algn="ctr"/>
-            <a:r>
-              <a:rPr sz="1400" b="0" i="0">
-                <a:solidFill>
-                  <a:srgbClr val="FFFFFF"/>
-                </a:solidFill>
+            <a:r>
+              <a:rPr lang="en-US" b="1" i="0" dirty="0">
+                <a:solidFill>
+                  <a:srgbClr val="CCCCCC"/>
+                </a:solidFill>
+                <a:effectLst/>
+                <a:latin typeface="-apple-system"/>
               </a:rPr>
-              <a:t>Conv1
-32 filters 3×3
-ReLU</a:t>
-            </a:r>
-          </a:p>
-        </p:txBody>
-      </p:sp>
-      <p:sp>
-        <p:nvSpPr>
-          <p:cNvPr id="8" name="TextBox 7"/>
-          <p:cNvSpPr txBox="1"/>
-          <p:nvPr/>
-        </p:nvSpPr>
-        <p:spPr>
-          <a:xfrm>
-            <a:off x="3031236" y="4114799"/>
-            <a:ext cx="228600" cy="502920"/>
-          </a:xfrm>
-          <a:prstGeom prst="rect">
-            <a:avLst/>
-          </a:prstGeom>
-          <a:noFill/>
-        </p:spPr>
-        <p:txBody>
-          <a:bodyPr wrap="square">
-            <a:spAutoFit/>
-          </a:bodyPr>
-          <a:lstStyle/>
-          <a:p>
-            <a:pPr algn="ctr"/>
-            <a:r>
-              <a:rPr sz="2000" b="0" i="0">
-                <a:solidFill>
-                  <a:srgbClr val="AABBCC"/>
-                </a:solidFill>
-              </a:rPr>
-              <a:t>→</a:t>
-            </a:r>
-          </a:p>
-        </p:txBody>
-      </p:sp>
-      <p:sp>
-        <p:nvSpPr>
-          <p:cNvPr id="9" name="Rectangle 8"/>
-          <p:cNvSpPr/>
-          <p:nvPr/>
-        </p:nvSpPr>
-        <p:spPr>
-          <a:xfrm>
-            <a:off x="3259836" y="3749039"/>
-            <a:ext cx="1737360" cy="1188720"/>
-          </a:xfrm>
-          <a:prstGeom prst="rect">
-            <a:avLst/>
-          </a:prstGeom>
-          <a:solidFill>
-            <a:srgbClr val="1A6BAA"/>
-          </a:solidFill>
-          <a:ln>
-            <a:noFill/>
-          </a:ln>
-        </p:spPr>
-        <p:style>
-          <a:lnRef idx="1">
-            <a:schemeClr val="accent1"/>
-          </a:lnRef>
-          <a:fillRef idx="3">
-            <a:schemeClr val="accent1"/>
-          </a:fillRef>
-          <a:effectRef idx="2">
-            <a:schemeClr val="accent1"/>
-          </a:effectRef>
-          <a:fontRef idx="minor">
-            <a:schemeClr val="lt1"/>
-          </a:fontRef>
-        </p:style>
-        <p:txBody>
-          <a:bodyPr rtlCol="0" anchor="ctr"/>
-          <a:lstStyle/>
-          <a:p>
-            <a:pPr algn="ctr"/>
-            <a:endParaRPr/>
-          </a:p>
-        </p:txBody>
-      </p:sp>
-      <p:sp>
-        <p:nvSpPr>
-          <p:cNvPr id="10" name="TextBox 9"/>
-          <p:cNvSpPr txBox="1"/>
-          <p:nvPr/>
-        </p:nvSpPr>
-        <p:spPr>
-          <a:xfrm>
-            <a:off x="3259836" y="3840479"/>
-            <a:ext cx="1737360" cy="1097280"/>
-          </a:xfrm>
-          <a:prstGeom prst="rect">
-            <a:avLst/>
-          </a:prstGeom>
-          <a:noFill/>
-        </p:spPr>
-        <p:txBody>
-          <a:bodyPr wrap="square">
-            <a:spAutoFit/>
-          </a:bodyPr>
-          <a:lstStyle/>
-          <a:p>
-            <a:pPr algn="ctr"/>
-            <a:r>
-              <a:rPr sz="1400" b="0" i="0">
-                <a:solidFill>
-                  <a:srgbClr val="FFFFFF"/>
-                </a:solidFill>
-              </a:rPr>
-              <a:t>Conv2
-64 filters 3×3
-ReLU</a:t>
-            </a:r>
-          </a:p>
-        </p:txBody>
-      </p:sp>
-      <p:sp>
-        <p:nvSpPr>
-          <p:cNvPr id="11" name="TextBox 10"/>
-          <p:cNvSpPr txBox="1"/>
-          <p:nvPr/>
-        </p:nvSpPr>
-        <p:spPr>
-          <a:xfrm>
-            <a:off x="4997196" y="4114799"/>
-            <a:ext cx="228600" cy="502920"/>
-          </a:xfrm>
-          <a:prstGeom prst="rect">
-            <a:avLst/>
-          </a:prstGeom>
-          <a:noFill/>
-        </p:spPr>
-        <p:txBody>
-          <a:bodyPr wrap="square">
-            <a:spAutoFit/>
-          </a:bodyPr>
-          <a:lstStyle/>
-          <a:p>
-            <a:pPr algn="ctr"/>
-            <a:r>
-              <a:rPr sz="2000" b="0" i="0">
-                <a:solidFill>
-                  <a:srgbClr val="AABBCC"/>
-                </a:solidFill>
-              </a:rPr>
-              <a:t>→</a:t>
-            </a:r>
-          </a:p>
-        </p:txBody>
-      </p:sp>
-      <p:sp>
-        <p:nvSpPr>
-          <p:cNvPr id="12" name="Rectangle 11"/>
-          <p:cNvSpPr/>
-          <p:nvPr/>
-        </p:nvSpPr>
-        <p:spPr>
-          <a:xfrm>
-            <a:off x="5225796" y="3749039"/>
-            <a:ext cx="1737360" cy="1188720"/>
-          </a:xfrm>
-          <a:prstGeom prst="rect">
-            <a:avLst/>
-          </a:prstGeom>
-          <a:solidFill>
-            <a:srgbClr val="6A359A"/>
-          </a:solidFill>
-          <a:ln>
-            <a:noFill/>
-          </a:ln>
-        </p:spPr>
-        <p:style>
-          <a:lnRef idx="1">
-            <a:schemeClr val="accent1"/>
-          </a:lnRef>
-          <a:fillRef idx="3">
-            <a:schemeClr val="accent1"/>
-          </a:fillRef>
-          <a:effectRef idx="2">
-            <a:schemeClr val="accent1"/>
-          </a:effectRef>
-          <a:fontRef idx="minor">
-            <a:schemeClr val="lt1"/>
-          </a:fontRef>
-        </p:style>
-        <p:txBody>
-          <a:bodyPr rtlCol="0" anchor="ctr"/>
-          <a:lstStyle/>
-          <a:p>
-            <a:pPr algn="ctr"/>
-            <a:endParaRPr/>
-          </a:p>
-        </p:txBody>
-      </p:sp>
-      <p:sp>
-        <p:nvSpPr>
-          <p:cNvPr id="13" name="TextBox 12"/>
-          <p:cNvSpPr txBox="1"/>
-          <p:nvPr/>
-        </p:nvSpPr>
-        <p:spPr>
-          <a:xfrm>
-            <a:off x="5225796" y="3840479"/>
-            <a:ext cx="1737360" cy="1097280"/>
-          </a:xfrm>
-          <a:prstGeom prst="rect">
-            <a:avLst/>
-          </a:prstGeom>
-          <a:noFill/>
-        </p:spPr>
-        <p:txBody>
-          <a:bodyPr wrap="square">
-            <a:spAutoFit/>
-          </a:bodyPr>
-          <a:lstStyle/>
-          <a:p>
-            <a:pPr algn="ctr"/>
-            <a:r>
-              <a:rPr sz="1400" b="0" i="0">
-                <a:solidFill>
-                  <a:srgbClr val="FFFFFF"/>
-                </a:solidFill>
-              </a:rPr>
-              <a:t>MaxPool
-2×2</a:t>
-            </a:r>
-          </a:p>
-        </p:txBody>
-      </p:sp>
-      <p:sp>
-        <p:nvSpPr>
-          <p:cNvPr id="14" name="TextBox 13"/>
-          <p:cNvSpPr txBox="1"/>
-          <p:nvPr/>
-        </p:nvSpPr>
-        <p:spPr>
-          <a:xfrm>
-            <a:off x="6963156" y="4114799"/>
-            <a:ext cx="228600" cy="502920"/>
-          </a:xfrm>
-          <a:prstGeom prst="rect">
-            <a:avLst/>
-          </a:prstGeom>
-          <a:noFill/>
-        </p:spPr>
-        <p:txBody>
-          <a:bodyPr wrap="square">
-            <a:spAutoFit/>
-          </a:bodyPr>
-          <a:lstStyle/>
-          <a:p>
-            <a:pPr algn="ctr"/>
-            <a:r>
-              <a:rPr sz="2000" b="0" i="0">
-                <a:solidFill>
-                  <a:srgbClr val="AABBCC"/>
-                </a:solidFill>
-              </a:rPr>
-              <a:t>→</a:t>
-            </a:r>
-          </a:p>
-        </p:txBody>
-      </p:sp>
-      <p:sp>
-        <p:nvSpPr>
-          <p:cNvPr id="15" name="Rectangle 14"/>
-          <p:cNvSpPr/>
-          <p:nvPr/>
-        </p:nvSpPr>
-        <p:spPr>
-          <a:xfrm>
-            <a:off x="7191756" y="3749039"/>
-            <a:ext cx="1737360" cy="1188720"/>
-          </a:xfrm>
-          <a:prstGeom prst="rect">
-            <a:avLst/>
-          </a:prstGeom>
-          <a:solidFill>
-            <a:srgbClr val="1A6BAA"/>
-          </a:solidFill>
-          <a:ln>
-            <a:noFill/>
-          </a:ln>
-        </p:spPr>
-        <p:style>
-          <a:lnRef idx="1">
-            <a:schemeClr val="accent1"/>
-          </a:lnRef>
-          <a:fillRef idx="3">
-            <a:schemeClr val="accent1"/>
-          </a:fillRef>
-          <a:effectRef idx="2">
-            <a:schemeClr val="accent1"/>
-          </a:effectRef>
-          <a:fontRef idx="minor">
-            <a:schemeClr val="lt1"/>
-          </a:fontRef>
-        </p:style>
-        <p:txBody>
-          <a:bodyPr rtlCol="0" anchor="ctr"/>
-          <a:lstStyle/>
-          <a:p>
-            <a:pPr algn="ctr"/>
-            <a:endParaRPr/>
-          </a:p>
-        </p:txBody>
-      </p:sp>
-      <p:sp>
-        <p:nvSpPr>
-          <p:cNvPr id="16" name="TextBox 15"/>
-          <p:cNvSpPr txBox="1"/>
-          <p:nvPr/>
-        </p:nvSpPr>
-        <p:spPr>
-          <a:xfrm>
-            <a:off x="7191756" y="3840479"/>
-            <a:ext cx="1737360" cy="1097280"/>
-          </a:xfrm>
-          <a:prstGeom prst="rect">
-            <a:avLst/>
-          </a:prstGeom>
-          <a:noFill/>
-        </p:spPr>
-        <p:txBody>
-          <a:bodyPr wrap="square">
-            <a:spAutoFit/>
-          </a:bodyPr>
-          <a:lstStyle/>
-          <a:p>
-            <a:pPr algn="ctr"/>
-            <a:r>
-              <a:rPr sz="1400" b="0" i="0">
-                <a:solidFill>
-                  <a:srgbClr val="FFFFFF"/>
-                </a:solidFill>
-              </a:rPr>
-              <a:t>FC
-128 ReLU</a:t>
-            </a:r>
-          </a:p>
-        </p:txBody>
-      </p:sp>
-      <p:sp>
-        <p:nvSpPr>
-          <p:cNvPr id="17" name="TextBox 16"/>
-          <p:cNvSpPr txBox="1"/>
-          <p:nvPr/>
-        </p:nvSpPr>
-        <p:spPr>
-          <a:xfrm>
-            <a:off x="8929116" y="4114799"/>
-            <a:ext cx="228600" cy="502920"/>
-          </a:xfrm>
-          <a:prstGeom prst="rect">
-            <a:avLst/>
-          </a:prstGeom>
-          <a:noFill/>
-        </p:spPr>
-        <p:txBody>
-          <a:bodyPr wrap="square">
-            <a:spAutoFit/>
-          </a:bodyPr>
-          <a:lstStyle/>
-          <a:p>
-            <a:pPr algn="ctr"/>
-            <a:r>
-              <a:rPr sz="2000" b="0" i="0">
-                <a:solidFill>
-                  <a:srgbClr val="AABBCC"/>
-                </a:solidFill>
-              </a:rPr>
-              <a:t>→</a:t>
-            </a:r>
-          </a:p>
-        </p:txBody>
-      </p:sp>
-      <p:sp>
-        <p:nvSpPr>
-          <p:cNvPr id="18" name="Rectangle 17"/>
-          <p:cNvSpPr/>
-          <p:nvPr/>
-        </p:nvSpPr>
-        <p:spPr>
-          <a:xfrm>
-            <a:off x="9157716" y="3749039"/>
-            <a:ext cx="1737360" cy="1188720"/>
-          </a:xfrm>
-          <a:prstGeom prst="rect">
-            <a:avLst/>
-          </a:prstGeom>
-          <a:solidFill>
-            <a:srgbClr val="4CAF50"/>
-          </a:solidFill>
-          <a:ln>
-            <a:noFill/>
-          </a:ln>
-        </p:spPr>
-        <p:style>
-          <a:lnRef idx="1">
-            <a:schemeClr val="accent1"/>
-          </a:lnRef>
-          <a:fillRef idx="3">
-            <a:schemeClr val="accent1"/>
-          </a:fillRef>
-          <a:effectRef idx="2">
-            <a:schemeClr val="accent1"/>
-          </a:effectRef>
-          <a:fontRef idx="minor">
-            <a:schemeClr val="lt1"/>
-          </a:fontRef>
-        </p:style>
-        <p:txBody>
-          <a:bodyPr rtlCol="0" anchor="ctr"/>
-          <a:lstStyle/>
-          <a:p>
-            <a:pPr algn="ctr"/>
-            <a:endParaRPr/>
-          </a:p>
-        </p:txBody>
-      </p:sp>
-      <p:sp>
-        <p:nvSpPr>
-          <p:cNvPr id="19" name="TextBox 18"/>
-          <p:cNvSpPr txBox="1"/>
-          <p:nvPr/>
-        </p:nvSpPr>
-        <p:spPr>
-          <a:xfrm>
-            <a:off x="9157716" y="3840479"/>
-            <a:ext cx="1737360" cy="1097280"/>
-          </a:xfrm>
-          <a:prstGeom prst="rect">
-            <a:avLst/>
-          </a:prstGeom>
-          <a:noFill/>
-        </p:spPr>
-        <p:txBody>
-          <a:bodyPr wrap="square">
-            <a:spAutoFit/>
-          </a:bodyPr>
-          <a:lstStyle/>
-          <a:p>
-            <a:pPr algn="ctr"/>
-            <a:r>
-              <a:rPr sz="1400" b="0" i="0">
-                <a:solidFill>
-                  <a:srgbClr val="FFFFFF"/>
-                </a:solidFill>
-              </a:rPr>
-              <a:t>Output
-10 classes</a:t>
-            </a:r>
-          </a:p>
-        </p:txBody>
-      </p:sp>
-      <p:sp>
-        <p:nvSpPr>
-          <p:cNvPr id="20" name="TextBox 19"/>
-          <p:cNvSpPr txBox="1"/>
-          <p:nvPr/>
-        </p:nvSpPr>
-        <p:spPr>
-          <a:xfrm>
-            <a:off x="6323076" y="1051560"/>
-            <a:ext cx="5303520" cy="914400"/>
-          </a:xfrm>
-          <a:prstGeom prst="rect">
-            <a:avLst/>
-          </a:prstGeom>
-          <a:noFill/>
-        </p:spPr>
-        <p:txBody>
-          <a:bodyPr wrap="square">
-            <a:spAutoFit/>
-          </a:bodyPr>
-          <a:lstStyle/>
-          <a:p>
-            <a:pPr algn="l"/>
-            <a:r>
-              <a:rPr sz="2000" b="1" dirty="0">
-                <a:solidFill>
-                  <a:srgbClr val="4CAF50"/>
-                </a:solidFill>
-              </a:rPr>
-              <a:t>Results</a:t>
-            </a:r>
-          </a:p>
-          <a:p>
-            <a:pPr algn="l">
-              <a:spcBef>
-                <a:spcPts val="300"/>
-              </a:spcBef>
-            </a:pPr>
-            <a:r>
-              <a:rPr sz="1800" dirty="0">
-                <a:solidFill>
-                  <a:srgbClr val="CCE5FF"/>
-                </a:solidFill>
-              </a:rPr>
-              <a:t>•  Clean: 99.01%  |  Noisy: 98.26%</a:t>
-            </a:r>
-          </a:p>
-          <a:p>
-            <a:pPr algn="l">
-              <a:spcBef>
-                <a:spcPts val="300"/>
-              </a:spcBef>
-            </a:pPr>
-            <a:r>
-              <a:rPr sz="1800" dirty="0">
-                <a:solidFill>
-                  <a:srgbClr val="CCE5FF"/>
-                </a:solidFill>
-              </a:rPr>
-              <a:t>•  Best accuracy  —  most robust to noise</a:t>
-            </a:r>
-          </a:p>
-          <a:p>
-            <a:pPr algn="l">
-              <a:spcBef>
-                <a:spcPts val="300"/>
-              </a:spcBef>
-            </a:pPr>
-            <a:r>
-              <a:rPr sz="1800" dirty="0">
-                <a:solidFill>
-                  <a:srgbClr val="CCE5FF"/>
-                </a:solidFill>
-              </a:rPr>
-              <a:t>•  Drop under noise: −0.75% (smallest of all)</a:t>
-            </a:r>
+              <a:t>1,625,866 parameters</a:t>
+            </a:r>
+            <a:endParaRPr lang="en-US" dirty="0"/>
           </a:p>
         </p:txBody>
       </p:sp>
@@ -8488,7 +10270,7 @@
         <p:spPr>
           <a:xfrm>
             <a:off x="457200" y="1051560"/>
-            <a:ext cx="5669280" cy="3657600"/>
+            <a:ext cx="5669280" cy="3085460"/>
           </a:xfrm>
           <a:prstGeom prst="rect">
             <a:avLst/>
@@ -8503,12 +10285,48 @@
           <a:p>
             <a:pPr algn="l"/>
             <a:r>
-              <a:rPr sz="2100" b="1">
+              <a:rPr sz="2100" b="1" dirty="0">
                 <a:solidFill>
                   <a:srgbClr val="00C2FF"/>
                 </a:solidFill>
               </a:rPr>
               <a:t>Architecture</a:t>
+            </a:r>
+          </a:p>
+          <a:p>
+            <a:r>
+              <a:rPr sz="1900" dirty="0">
+                <a:solidFill>
+                  <a:srgbClr val="CCE5FF"/>
+                </a:solidFill>
+              </a:rPr>
+              <a:t>• </a:t>
+            </a:r>
+            <a:r>
+              <a:rPr lang="en-US" sz="1900" dirty="0">
+                <a:solidFill>
+                  <a:srgbClr val="CCE5FF"/>
+                </a:solidFill>
+              </a:rPr>
+              <a:t>The Transformer model is based on a self-attention mechanism, which allows it to model relationships between different parts of the input. Instead of using convolutions, it processes the image as a sequence of patches.</a:t>
+            </a:r>
+          </a:p>
+          <a:p>
+            <a:r>
+              <a:rPr lang="en-US" dirty="0">
+                <a:solidFill>
+                  <a:srgbClr val="CCE5FF"/>
+                </a:solidFill>
+              </a:rPr>
+              <a:t>•  </a:t>
+            </a:r>
+            <a:r>
+              <a:rPr lang="en-US" sz="1900" dirty="0">
+                <a:solidFill>
+                  <a:srgbClr val="CCE5FF"/>
+                </a:solidFill>
+              </a:rPr>
+              <a:t>The 28 × 28 image is divided into smaller patches (e.g., 4 × 4), and each patch is treated as a token in a sequence.</a:t>
             </a:r>
           </a:p>
           <a:p>
@@ -8518,37 +10336,7 @@
               </a:spcBef>
             </a:pPr>
             <a:r>
-              <a:rPr sz="1900">
-                <a:solidFill>
-                  <a:srgbClr val="CCE5FF"/>
-                </a:solidFill>
-              </a:rPr>
-              <a:t>•  Image divided into 4×4 patches → 49 tokens</a:t>
-            </a:r>
-          </a:p>
-          <a:p>
-            <a:pPr algn="l">
-              <a:spcBef>
-                <a:spcPts val="300"/>
-              </a:spcBef>
-            </a:pPr>
-            <a:r>
-              <a:rPr sz="1900">
-                <a:solidFill>
-                  <a:srgbClr val="CCE5FF"/>
-                </a:solidFill>
-              </a:rPr>
-              <a:t>•  Each patch projected to embedding dim = 64</a:t>
-            </a:r>
-          </a:p>
-          <a:p>
-            <a:pPr algn="l">
-              <a:spcBef>
-                <a:spcPts val="300"/>
-              </a:spcBef>
-            </a:pPr>
-            <a:r>
-              <a:rPr sz="1900">
+              <a:rPr sz="1900" dirty="0">
                 <a:solidFill>
                   <a:srgbClr val="CCE5FF"/>
                 </a:solidFill>
@@ -8556,92 +10344,681 @@
               <a:t>•  Learnable positional encoding preserves order</a:t>
             </a:r>
           </a:p>
-          <a:p>
-            <a:pPr algn="l">
-              <a:spcBef>
-                <a:spcPts val="300"/>
-              </a:spcBef>
-            </a:pPr>
-            <a:r>
-              <a:rPr sz="1900">
-                <a:solidFill>
-                  <a:srgbClr val="CCE5FF"/>
-                </a:solidFill>
-              </a:rPr>
-              <a:t>•  2 × TransformerEncoderLayer (4 heads)</a:t>
-            </a:r>
-          </a:p>
-          <a:p>
-            <a:pPr algn="l">
-              <a:spcBef>
-                <a:spcPts val="300"/>
-              </a:spcBef>
-            </a:pPr>
-            <a:r>
-              <a:rPr sz="1900">
-                <a:solidFill>
-                  <a:srgbClr val="CCE5FF"/>
-                </a:solidFill>
-              </a:rPr>
-              <a:t>•  Global average pooling → linear classifier</a:t>
-            </a:r>
-          </a:p>
-        </p:txBody>
-      </p:sp>
-      <p:sp>
-        <p:nvSpPr>
-          <p:cNvPr id="6" name="Rectangle 5"/>
-          <p:cNvSpPr/>
+        </p:txBody>
+      </p:sp>
+      <p:grpSp>
+        <p:nvGrpSpPr>
+          <p:cNvPr id="25" name="Group 24">
+            <a:extLst>
+              <a:ext uri="{FF2B5EF4-FFF2-40B4-BE49-F238E27FC236}">
+                <a16:creationId xmlns:a16="http://schemas.microsoft.com/office/drawing/2014/main" id="{28E359E7-AD9C-F23B-A271-A8BB382616C1}"/>
+              </a:ext>
+            </a:extLst>
+          </p:cNvPr>
+          <p:cNvGrpSpPr/>
           <p:nvPr/>
-        </p:nvSpPr>
-        <p:spPr>
-          <a:xfrm>
-            <a:off x="6858000" y="1188720"/>
-            <a:ext cx="1463040" cy="777240"/>
-          </a:xfrm>
-          <a:prstGeom prst="rect">
-            <a:avLst/>
-          </a:prstGeom>
-          <a:solidFill>
-            <a:srgbClr val="2A2A4A"/>
-          </a:solidFill>
-          <a:ln>
+        </p:nvGrpSpPr>
+        <p:grpSpPr>
+          <a:xfrm>
+            <a:off x="6457448" y="968151"/>
+            <a:ext cx="1463040" cy="5212080"/>
+            <a:chOff x="6858000" y="1188720"/>
+            <a:chExt cx="1463040" cy="5212080"/>
+          </a:xfrm>
+        </p:grpSpPr>
+        <p:sp>
+          <p:nvSpPr>
+            <p:cNvPr id="6" name="Rectangle 5"/>
+            <p:cNvSpPr/>
+            <p:nvPr/>
+          </p:nvSpPr>
+          <p:spPr>
+            <a:xfrm>
+              <a:off x="6858000" y="1188720"/>
+              <a:ext cx="1463040" cy="777240"/>
+            </a:xfrm>
+            <a:prstGeom prst="rect">
+              <a:avLst/>
+            </a:prstGeom>
+            <a:solidFill>
+              <a:srgbClr val="2A2A4A"/>
+            </a:solidFill>
+            <a:ln>
+              <a:noFill/>
+            </a:ln>
+          </p:spPr>
+          <p:style>
+            <a:lnRef idx="1">
+              <a:schemeClr val="accent1"/>
+            </a:lnRef>
+            <a:fillRef idx="3">
+              <a:schemeClr val="accent1"/>
+            </a:fillRef>
+            <a:effectRef idx="2">
+              <a:schemeClr val="accent1"/>
+            </a:effectRef>
+            <a:fontRef idx="minor">
+              <a:schemeClr val="lt1"/>
+            </a:fontRef>
+          </p:style>
+          <p:txBody>
+            <a:bodyPr rtlCol="0" anchor="ctr"/>
+            <a:lstStyle/>
+            <a:p>
+              <a:pPr algn="ctr"/>
+              <a:endParaRPr/>
+            </a:p>
+          </p:txBody>
+        </p:sp>
+        <p:sp>
+          <p:nvSpPr>
+            <p:cNvPr id="7" name="TextBox 6"/>
+            <p:cNvSpPr txBox="1"/>
+            <p:nvPr/>
+          </p:nvSpPr>
+          <p:spPr>
+            <a:xfrm>
+              <a:off x="6858000" y="1275588"/>
+              <a:ext cx="1463040" cy="731520"/>
+            </a:xfrm>
+            <a:prstGeom prst="rect">
+              <a:avLst/>
+            </a:prstGeom>
             <a:noFill/>
-          </a:ln>
-        </p:spPr>
-        <p:style>
-          <a:lnRef idx="1">
-            <a:schemeClr val="accent1"/>
-          </a:lnRef>
-          <a:fillRef idx="3">
-            <a:schemeClr val="accent1"/>
-          </a:fillRef>
-          <a:effectRef idx="2">
-            <a:schemeClr val="accent1"/>
-          </a:effectRef>
-          <a:fontRef idx="minor">
-            <a:schemeClr val="lt1"/>
-          </a:fontRef>
-        </p:style>
-        <p:txBody>
-          <a:bodyPr rtlCol="0" anchor="ctr"/>
-          <a:lstStyle/>
-          <a:p>
-            <a:pPr algn="ctr"/>
-            <a:endParaRPr/>
-          </a:p>
-        </p:txBody>
-      </p:sp>
-      <p:sp>
-        <p:nvSpPr>
-          <p:cNvPr id="7" name="TextBox 6"/>
+          </p:spPr>
+          <p:txBody>
+            <a:bodyPr wrap="square">
+              <a:spAutoFit/>
+            </a:bodyPr>
+            <a:lstStyle/>
+            <a:p>
+              <a:pPr algn="ctr"/>
+              <a:r>
+                <a:rPr sz="1300" b="0" i="0" dirty="0">
+                  <a:solidFill>
+                    <a:srgbClr val="FFFFFF"/>
+                  </a:solidFill>
+                </a:rPr>
+                <a:t>28×28 image</a:t>
+              </a:r>
+            </a:p>
+          </p:txBody>
+        </p:sp>
+        <p:sp>
+          <p:nvSpPr>
+            <p:cNvPr id="8" name="TextBox 7"/>
+            <p:cNvSpPr txBox="1"/>
+            <p:nvPr/>
+          </p:nvSpPr>
+          <p:spPr>
+            <a:xfrm>
+              <a:off x="6858000" y="1965960"/>
+              <a:ext cx="1463040" cy="128016"/>
+            </a:xfrm>
+            <a:prstGeom prst="rect">
+              <a:avLst/>
+            </a:prstGeom>
+            <a:noFill/>
+          </p:spPr>
+          <p:txBody>
+            <a:bodyPr wrap="square">
+              <a:spAutoFit/>
+            </a:bodyPr>
+            <a:lstStyle/>
+            <a:p>
+              <a:pPr algn="ctr"/>
+              <a:r>
+                <a:rPr sz="1300" b="0" i="0">
+                  <a:solidFill>
+                    <a:srgbClr val="AABBCC"/>
+                  </a:solidFill>
+                </a:rPr>
+                <a:t>↓</a:t>
+              </a:r>
+            </a:p>
+          </p:txBody>
+        </p:sp>
+        <p:sp>
+          <p:nvSpPr>
+            <p:cNvPr id="9" name="Rectangle 8"/>
+            <p:cNvSpPr/>
+            <p:nvPr/>
+          </p:nvSpPr>
+          <p:spPr>
+            <a:xfrm>
+              <a:off x="6858000" y="2075688"/>
+              <a:ext cx="1463040" cy="777240"/>
+            </a:xfrm>
+            <a:prstGeom prst="rect">
+              <a:avLst/>
+            </a:prstGeom>
+            <a:solidFill>
+              <a:srgbClr val="1A5B9A"/>
+            </a:solidFill>
+            <a:ln>
+              <a:noFill/>
+            </a:ln>
+          </p:spPr>
+          <p:style>
+            <a:lnRef idx="1">
+              <a:schemeClr val="accent1"/>
+            </a:lnRef>
+            <a:fillRef idx="3">
+              <a:schemeClr val="accent1"/>
+            </a:fillRef>
+            <a:effectRef idx="2">
+              <a:schemeClr val="accent1"/>
+            </a:effectRef>
+            <a:fontRef idx="minor">
+              <a:schemeClr val="lt1"/>
+            </a:fontRef>
+          </p:style>
+          <p:txBody>
+            <a:bodyPr rtlCol="0" anchor="ctr"/>
+            <a:lstStyle/>
+            <a:p>
+              <a:pPr algn="ctr"/>
+              <a:endParaRPr/>
+            </a:p>
+          </p:txBody>
+        </p:sp>
+        <p:sp>
+          <p:nvSpPr>
+            <p:cNvPr id="10" name="TextBox 9"/>
+            <p:cNvSpPr txBox="1"/>
+            <p:nvPr/>
+          </p:nvSpPr>
+          <p:spPr>
+            <a:xfrm>
+              <a:off x="6858000" y="2121408"/>
+              <a:ext cx="1463040" cy="731520"/>
+            </a:xfrm>
+            <a:prstGeom prst="rect">
+              <a:avLst/>
+            </a:prstGeom>
+            <a:noFill/>
+          </p:spPr>
+          <p:txBody>
+            <a:bodyPr wrap="square">
+              <a:spAutoFit/>
+            </a:bodyPr>
+            <a:lstStyle/>
+            <a:p>
+              <a:pPr algn="ctr"/>
+              <a:r>
+                <a:rPr sz="1300" b="0" i="0">
+                  <a:solidFill>
+                    <a:srgbClr val="FFFFFF"/>
+                  </a:solidFill>
+                </a:rPr>
+                <a:t>Patch Embed
+4×4 patches</a:t>
+              </a:r>
+            </a:p>
+          </p:txBody>
+        </p:sp>
+        <p:sp>
+          <p:nvSpPr>
+            <p:cNvPr id="11" name="TextBox 10"/>
+            <p:cNvSpPr txBox="1"/>
+            <p:nvPr/>
+          </p:nvSpPr>
+          <p:spPr>
+            <a:xfrm>
+              <a:off x="6858000" y="2852928"/>
+              <a:ext cx="1463040" cy="128016"/>
+            </a:xfrm>
+            <a:prstGeom prst="rect">
+              <a:avLst/>
+            </a:prstGeom>
+            <a:noFill/>
+          </p:spPr>
+          <p:txBody>
+            <a:bodyPr wrap="square">
+              <a:spAutoFit/>
+            </a:bodyPr>
+            <a:lstStyle/>
+            <a:p>
+              <a:pPr algn="ctr"/>
+              <a:r>
+                <a:rPr sz="1300" b="0" i="0">
+                  <a:solidFill>
+                    <a:srgbClr val="AABBCC"/>
+                  </a:solidFill>
+                </a:rPr>
+                <a:t>↓</a:t>
+              </a:r>
+            </a:p>
+          </p:txBody>
+        </p:sp>
+        <p:sp>
+          <p:nvSpPr>
+            <p:cNvPr id="12" name="Rectangle 11"/>
+            <p:cNvSpPr/>
+            <p:nvPr/>
+          </p:nvSpPr>
+          <p:spPr>
+            <a:xfrm>
+              <a:off x="6858000" y="2962656"/>
+              <a:ext cx="1463040" cy="777240"/>
+            </a:xfrm>
+            <a:prstGeom prst="rect">
+              <a:avLst/>
+            </a:prstGeom>
+            <a:solidFill>
+              <a:srgbClr val="1A5B9A"/>
+            </a:solidFill>
+            <a:ln>
+              <a:noFill/>
+            </a:ln>
+          </p:spPr>
+          <p:style>
+            <a:lnRef idx="1">
+              <a:schemeClr val="accent1"/>
+            </a:lnRef>
+            <a:fillRef idx="3">
+              <a:schemeClr val="accent1"/>
+            </a:fillRef>
+            <a:effectRef idx="2">
+              <a:schemeClr val="accent1"/>
+            </a:effectRef>
+            <a:fontRef idx="minor">
+              <a:schemeClr val="lt1"/>
+            </a:fontRef>
+          </p:style>
+          <p:txBody>
+            <a:bodyPr rtlCol="0" anchor="ctr"/>
+            <a:lstStyle/>
+            <a:p>
+              <a:pPr algn="ctr"/>
+              <a:endParaRPr/>
+            </a:p>
+          </p:txBody>
+        </p:sp>
+        <p:sp>
+          <p:nvSpPr>
+            <p:cNvPr id="13" name="TextBox 12"/>
+            <p:cNvSpPr txBox="1"/>
+            <p:nvPr/>
+          </p:nvSpPr>
+          <p:spPr>
+            <a:xfrm>
+              <a:off x="6858000" y="3008376"/>
+              <a:ext cx="1463040" cy="731520"/>
+            </a:xfrm>
+            <a:prstGeom prst="rect">
+              <a:avLst/>
+            </a:prstGeom>
+            <a:noFill/>
+          </p:spPr>
+          <p:txBody>
+            <a:bodyPr wrap="square">
+              <a:spAutoFit/>
+            </a:bodyPr>
+            <a:lstStyle/>
+            <a:p>
+              <a:pPr algn="ctr"/>
+              <a:r>
+                <a:rPr sz="1300" b="0" i="0">
+                  <a:solidFill>
+                    <a:srgbClr val="FFFFFF"/>
+                  </a:solidFill>
+                </a:rPr>
+                <a:t>+ Pos. Encoding</a:t>
+              </a:r>
+            </a:p>
+          </p:txBody>
+        </p:sp>
+        <p:sp>
+          <p:nvSpPr>
+            <p:cNvPr id="14" name="TextBox 13"/>
+            <p:cNvSpPr txBox="1"/>
+            <p:nvPr/>
+          </p:nvSpPr>
+          <p:spPr>
+            <a:xfrm>
+              <a:off x="6858000" y="3739896"/>
+              <a:ext cx="1463040" cy="128016"/>
+            </a:xfrm>
+            <a:prstGeom prst="rect">
+              <a:avLst/>
+            </a:prstGeom>
+            <a:noFill/>
+          </p:spPr>
+          <p:txBody>
+            <a:bodyPr wrap="square">
+              <a:spAutoFit/>
+            </a:bodyPr>
+            <a:lstStyle/>
+            <a:p>
+              <a:pPr algn="ctr"/>
+              <a:r>
+                <a:rPr sz="1300" b="0" i="0">
+                  <a:solidFill>
+                    <a:srgbClr val="AABBCC"/>
+                  </a:solidFill>
+                </a:rPr>
+                <a:t>↓</a:t>
+              </a:r>
+            </a:p>
+          </p:txBody>
+        </p:sp>
+        <p:sp>
+          <p:nvSpPr>
+            <p:cNvPr id="15" name="Rectangle 14"/>
+            <p:cNvSpPr/>
+            <p:nvPr/>
+          </p:nvSpPr>
+          <p:spPr>
+            <a:xfrm>
+              <a:off x="6858000" y="3849624"/>
+              <a:ext cx="1463040" cy="777240"/>
+            </a:xfrm>
+            <a:prstGeom prst="rect">
+              <a:avLst/>
+            </a:prstGeom>
+            <a:solidFill>
+              <a:srgbClr val="5A2A9A"/>
+            </a:solidFill>
+            <a:ln>
+              <a:noFill/>
+            </a:ln>
+          </p:spPr>
+          <p:style>
+            <a:lnRef idx="1">
+              <a:schemeClr val="accent1"/>
+            </a:lnRef>
+            <a:fillRef idx="3">
+              <a:schemeClr val="accent1"/>
+            </a:fillRef>
+            <a:effectRef idx="2">
+              <a:schemeClr val="accent1"/>
+            </a:effectRef>
+            <a:fontRef idx="minor">
+              <a:schemeClr val="lt1"/>
+            </a:fontRef>
+          </p:style>
+          <p:txBody>
+            <a:bodyPr rtlCol="0" anchor="ctr"/>
+            <a:lstStyle/>
+            <a:p>
+              <a:pPr algn="ctr"/>
+              <a:endParaRPr/>
+            </a:p>
+          </p:txBody>
+        </p:sp>
+        <p:sp>
+          <p:nvSpPr>
+            <p:cNvPr id="16" name="TextBox 15"/>
+            <p:cNvSpPr txBox="1"/>
+            <p:nvPr/>
+          </p:nvSpPr>
+          <p:spPr>
+            <a:xfrm>
+              <a:off x="6858000" y="3895344"/>
+              <a:ext cx="1463040" cy="731520"/>
+            </a:xfrm>
+            <a:prstGeom prst="rect">
+              <a:avLst/>
+            </a:prstGeom>
+            <a:noFill/>
+          </p:spPr>
+          <p:txBody>
+            <a:bodyPr wrap="square">
+              <a:spAutoFit/>
+            </a:bodyPr>
+            <a:lstStyle/>
+            <a:p>
+              <a:pPr algn="ctr"/>
+              <a:r>
+                <a:rPr sz="1300" b="0" i="0" dirty="0">
+                  <a:solidFill>
+                    <a:srgbClr val="FFFFFF"/>
+                  </a:solidFill>
+                </a:rPr>
+                <a:t>Transformer
+Encoder ×2</a:t>
+              </a:r>
+            </a:p>
+          </p:txBody>
+        </p:sp>
+        <p:sp>
+          <p:nvSpPr>
+            <p:cNvPr id="17" name="TextBox 16"/>
+            <p:cNvSpPr txBox="1"/>
+            <p:nvPr/>
+          </p:nvSpPr>
+          <p:spPr>
+            <a:xfrm>
+              <a:off x="6858000" y="4626864"/>
+              <a:ext cx="1463040" cy="128016"/>
+            </a:xfrm>
+            <a:prstGeom prst="rect">
+              <a:avLst/>
+            </a:prstGeom>
+            <a:noFill/>
+          </p:spPr>
+          <p:txBody>
+            <a:bodyPr wrap="square">
+              <a:spAutoFit/>
+            </a:bodyPr>
+            <a:lstStyle/>
+            <a:p>
+              <a:pPr algn="ctr"/>
+              <a:r>
+                <a:rPr sz="1300" b="0" i="0">
+                  <a:solidFill>
+                    <a:srgbClr val="AABBCC"/>
+                  </a:solidFill>
+                </a:rPr>
+                <a:t>↓</a:t>
+              </a:r>
+            </a:p>
+          </p:txBody>
+        </p:sp>
+        <p:sp>
+          <p:nvSpPr>
+            <p:cNvPr id="18" name="Rectangle 17"/>
+            <p:cNvSpPr/>
+            <p:nvPr/>
+          </p:nvSpPr>
+          <p:spPr>
+            <a:xfrm>
+              <a:off x="6858000" y="4736592"/>
+              <a:ext cx="1463040" cy="777240"/>
+            </a:xfrm>
+            <a:prstGeom prst="rect">
+              <a:avLst/>
+            </a:prstGeom>
+            <a:solidFill>
+              <a:srgbClr val="5A2A9A"/>
+            </a:solidFill>
+            <a:ln>
+              <a:noFill/>
+            </a:ln>
+          </p:spPr>
+          <p:style>
+            <a:lnRef idx="1">
+              <a:schemeClr val="accent1"/>
+            </a:lnRef>
+            <a:fillRef idx="3">
+              <a:schemeClr val="accent1"/>
+            </a:fillRef>
+            <a:effectRef idx="2">
+              <a:schemeClr val="accent1"/>
+            </a:effectRef>
+            <a:fontRef idx="minor">
+              <a:schemeClr val="lt1"/>
+            </a:fontRef>
+          </p:style>
+          <p:txBody>
+            <a:bodyPr rtlCol="0" anchor="ctr"/>
+            <a:lstStyle/>
+            <a:p>
+              <a:pPr algn="ctr"/>
+              <a:endParaRPr/>
+            </a:p>
+          </p:txBody>
+        </p:sp>
+        <p:sp>
+          <p:nvSpPr>
+            <p:cNvPr id="19" name="TextBox 18"/>
+            <p:cNvSpPr txBox="1"/>
+            <p:nvPr/>
+          </p:nvSpPr>
+          <p:spPr>
+            <a:xfrm>
+              <a:off x="6858000" y="4782312"/>
+              <a:ext cx="1463040" cy="731520"/>
+            </a:xfrm>
+            <a:prstGeom prst="rect">
+              <a:avLst/>
+            </a:prstGeom>
+            <a:noFill/>
+          </p:spPr>
+          <p:txBody>
+            <a:bodyPr wrap="square">
+              <a:spAutoFit/>
+            </a:bodyPr>
+            <a:lstStyle/>
+            <a:p>
+              <a:pPr algn="ctr"/>
+              <a:r>
+                <a:rPr sz="1300" b="0" i="0">
+                  <a:solidFill>
+                    <a:srgbClr val="FFFFFF"/>
+                  </a:solidFill>
+                </a:rPr>
+                <a:t>Global
+Avg Pool</a:t>
+              </a:r>
+            </a:p>
+          </p:txBody>
+        </p:sp>
+        <p:sp>
+          <p:nvSpPr>
+            <p:cNvPr id="20" name="TextBox 19"/>
+            <p:cNvSpPr txBox="1"/>
+            <p:nvPr/>
+          </p:nvSpPr>
+          <p:spPr>
+            <a:xfrm>
+              <a:off x="6858000" y="5513832"/>
+              <a:ext cx="1463040" cy="128016"/>
+            </a:xfrm>
+            <a:prstGeom prst="rect">
+              <a:avLst/>
+            </a:prstGeom>
+            <a:noFill/>
+          </p:spPr>
+          <p:txBody>
+            <a:bodyPr wrap="square">
+              <a:spAutoFit/>
+            </a:bodyPr>
+            <a:lstStyle/>
+            <a:p>
+              <a:pPr algn="ctr"/>
+              <a:r>
+                <a:rPr sz="1300" b="0" i="0">
+                  <a:solidFill>
+                    <a:srgbClr val="AABBCC"/>
+                  </a:solidFill>
+                </a:rPr>
+                <a:t>↓</a:t>
+              </a:r>
+            </a:p>
+          </p:txBody>
+        </p:sp>
+        <p:sp>
+          <p:nvSpPr>
+            <p:cNvPr id="21" name="Rectangle 20"/>
+            <p:cNvSpPr/>
+            <p:nvPr/>
+          </p:nvSpPr>
+          <p:spPr>
+            <a:xfrm>
+              <a:off x="6858000" y="5623560"/>
+              <a:ext cx="1463040" cy="777240"/>
+            </a:xfrm>
+            <a:prstGeom prst="rect">
+              <a:avLst/>
+            </a:prstGeom>
+            <a:solidFill>
+              <a:srgbClr val="4CAF50"/>
+            </a:solidFill>
+            <a:ln>
+              <a:noFill/>
+            </a:ln>
+          </p:spPr>
+          <p:style>
+            <a:lnRef idx="1">
+              <a:schemeClr val="accent1"/>
+            </a:lnRef>
+            <a:fillRef idx="3">
+              <a:schemeClr val="accent1"/>
+            </a:fillRef>
+            <a:effectRef idx="2">
+              <a:schemeClr val="accent1"/>
+            </a:effectRef>
+            <a:fontRef idx="minor">
+              <a:schemeClr val="lt1"/>
+            </a:fontRef>
+          </p:style>
+          <p:txBody>
+            <a:bodyPr rtlCol="0" anchor="ctr"/>
+            <a:lstStyle/>
+            <a:p>
+              <a:pPr algn="ctr"/>
+              <a:endParaRPr/>
+            </a:p>
+          </p:txBody>
+        </p:sp>
+        <p:sp>
+          <p:nvSpPr>
+            <p:cNvPr id="22" name="TextBox 21"/>
+            <p:cNvSpPr txBox="1"/>
+            <p:nvPr/>
+          </p:nvSpPr>
+          <p:spPr>
+            <a:xfrm>
+              <a:off x="6858000" y="5669280"/>
+              <a:ext cx="1463040" cy="731520"/>
+            </a:xfrm>
+            <a:prstGeom prst="rect">
+              <a:avLst/>
+            </a:prstGeom>
+            <a:noFill/>
+          </p:spPr>
+          <p:txBody>
+            <a:bodyPr wrap="square">
+              <a:spAutoFit/>
+            </a:bodyPr>
+            <a:lstStyle/>
+            <a:p>
+              <a:pPr algn="ctr"/>
+              <a:r>
+                <a:rPr sz="1300" b="0" i="0">
+                  <a:solidFill>
+                    <a:srgbClr val="FFFFFF"/>
+                  </a:solidFill>
+                </a:rPr>
+                <a:t>Classifier
+10 classes</a:t>
+              </a:r>
+            </a:p>
+          </p:txBody>
+        </p:sp>
+      </p:grpSp>
+      <p:sp>
+        <p:nvSpPr>
+          <p:cNvPr id="23" name="TextBox 22"/>
           <p:cNvSpPr txBox="1"/>
           <p:nvPr/>
         </p:nvSpPr>
         <p:spPr>
           <a:xfrm>
-            <a:off x="6858000" y="1234440"/>
-            <a:ext cx="1463040" cy="731520"/>
+            <a:off x="457200" y="4467038"/>
+            <a:ext cx="5669280" cy="400110"/>
           </a:xfrm>
           <a:prstGeom prst="rect">
             <a:avLst/>
@@ -8654,28 +11031,340 @@
           </a:bodyPr>
           <a:lstStyle/>
           <a:p>
-            <a:pPr algn="ctr"/>
-            <a:r>
-              <a:rPr sz="1300" b="0" i="0">
-                <a:solidFill>
-                  <a:srgbClr val="FFFFFF"/>
+            <a:r>
+              <a:rPr lang="en-US" sz="2000" b="1" dirty="0">
+                <a:solidFill>
+                  <a:srgbClr val="FFD700"/>
                 </a:solidFill>
               </a:rPr>
-              <a:t>28×28 image</a:t>
-            </a:r>
-          </a:p>
-        </p:txBody>
-      </p:sp>
-      <p:sp>
-        <p:nvSpPr>
-          <p:cNvPr id="8" name="TextBox 7"/>
+              <a:t>Hyperparameters</a:t>
+            </a:r>
+            <a:endParaRPr sz="2000" b="1" dirty="0">
+              <a:solidFill>
+                <a:srgbClr val="AA55FF"/>
+              </a:solidFill>
+            </a:endParaRPr>
+          </a:p>
+        </p:txBody>
+      </p:sp>
+      <p:graphicFrame>
+        <p:nvGraphicFramePr>
+          <p:cNvPr id="24" name="Table 23">
+            <a:extLst>
+              <a:ext uri="{FF2B5EF4-FFF2-40B4-BE49-F238E27FC236}">
+                <a16:creationId xmlns:a16="http://schemas.microsoft.com/office/drawing/2014/main" id="{B4942C34-8A8F-2F77-04F0-6E40CDD114D8}"/>
+              </a:ext>
+            </a:extLst>
+          </p:cNvPr>
+          <p:cNvGraphicFramePr>
+            <a:graphicFrameLocks noGrp="1"/>
+          </p:cNvGraphicFramePr>
+          <p:nvPr>
+            <p:extLst>
+              <p:ext uri="{D42A27DB-BD31-4B8C-83A1-F6EECF244321}">
+                <p14:modId xmlns:p14="http://schemas.microsoft.com/office/powerpoint/2010/main" val="4233676127"/>
+              </p:ext>
+            </p:extLst>
+          </p:nvPr>
+        </p:nvGraphicFramePr>
+        <p:xfrm>
+          <a:off x="1168873" y="4927503"/>
+          <a:ext cx="3415394" cy="1402080"/>
+        </p:xfrm>
+        <a:graphic>
+          <a:graphicData uri="http://schemas.openxmlformats.org/drawingml/2006/table">
+            <a:tbl>
+              <a:tblPr>
+                <a:tableStyleId>{2D5ABB26-0587-4C30-8999-92F81FD0307C}</a:tableStyleId>
+              </a:tblPr>
+              <a:tblGrid>
+                <a:gridCol w="1673214">
+                  <a:extLst>
+                    <a:ext uri="{9D8B030D-6E8A-4147-A177-3AD203B41FA5}">
+                      <a16:colId xmlns:a16="http://schemas.microsoft.com/office/drawing/2014/main" val="1940200092"/>
+                    </a:ext>
+                  </a:extLst>
+                </a:gridCol>
+                <a:gridCol w="1742180">
+                  <a:extLst>
+                    <a:ext uri="{9D8B030D-6E8A-4147-A177-3AD203B41FA5}">
+                      <a16:colId xmlns:a16="http://schemas.microsoft.com/office/drawing/2014/main" val="76769100"/>
+                    </a:ext>
+                  </a:extLst>
+                </a:gridCol>
+              </a:tblGrid>
+              <a:tr h="243581">
+                <a:tc>
+                  <a:txBody>
+                    <a:bodyPr/>
+                    <a:lstStyle/>
+                    <a:p>
+                      <a:pPr algn="ctr">
+                        <a:buNone/>
+                      </a:pPr>
+                      <a:r>
+                        <a:rPr lang="en-US" sz="1800" kern="1200" dirty="0">
+                          <a:solidFill>
+                            <a:srgbClr val="CCE5FF"/>
+                          </a:solidFill>
+                        </a:rPr>
+                        <a:t>Optimizer</a:t>
+                      </a:r>
+                      <a:endParaRPr lang="en-US" sz="1800" kern="1200" dirty="0">
+                        <a:solidFill>
+                          <a:srgbClr val="CCE5FF"/>
+                        </a:solidFill>
+                        <a:latin typeface="+mn-lt"/>
+                        <a:ea typeface="+mn-ea"/>
+                        <a:cs typeface="+mn-cs"/>
+                      </a:endParaRPr>
+                    </a:p>
+                  </a:txBody>
+                  <a:tcPr marL="57150" marR="57150" marT="38100" marB="38100" anchor="ctr"/>
+                </a:tc>
+                <a:tc>
+                  <a:txBody>
+                    <a:bodyPr/>
+                    <a:lstStyle/>
+                    <a:p>
+                      <a:pPr algn="ctr">
+                        <a:buNone/>
+                      </a:pPr>
+                      <a:r>
+                        <a:rPr lang="en-US" sz="1800" kern="1200" dirty="0">
+                          <a:solidFill>
+                            <a:srgbClr val="CCE5FF"/>
+                          </a:solidFill>
+                        </a:rPr>
+                        <a:t>Adam</a:t>
+                      </a:r>
+                      <a:endParaRPr lang="en-US" sz="1800" kern="1200" dirty="0">
+                        <a:solidFill>
+                          <a:srgbClr val="CCE5FF"/>
+                        </a:solidFill>
+                        <a:latin typeface="+mn-lt"/>
+                        <a:ea typeface="+mn-ea"/>
+                        <a:cs typeface="+mn-cs"/>
+                      </a:endParaRPr>
+                    </a:p>
+                  </a:txBody>
+                  <a:tcPr marL="57150" marR="57150" marT="38100" marB="38100" anchor="ctr"/>
+                </a:tc>
+                <a:extLst>
+                  <a:ext uri="{0D108BD9-81ED-4DB2-BD59-A6C34878D82A}">
+                    <a16:rowId xmlns:a16="http://schemas.microsoft.com/office/drawing/2014/main" val="4234817580"/>
+                  </a:ext>
+                </a:extLst>
+              </a:tr>
+              <a:tr h="243581">
+                <a:tc>
+                  <a:txBody>
+                    <a:bodyPr/>
+                    <a:lstStyle/>
+                    <a:p>
+                      <a:pPr algn="ctr">
+                        <a:buNone/>
+                      </a:pPr>
+                      <a:r>
+                        <a:rPr lang="en-US" sz="1800" kern="1200" dirty="0">
+                          <a:solidFill>
+                            <a:srgbClr val="CCE5FF"/>
+                          </a:solidFill>
+                        </a:rPr>
+                        <a:t>Learning rate</a:t>
+                      </a:r>
+                      <a:endParaRPr lang="en-US" sz="1800" kern="1200" dirty="0">
+                        <a:solidFill>
+                          <a:srgbClr val="CCE5FF"/>
+                        </a:solidFill>
+                        <a:latin typeface="+mn-lt"/>
+                        <a:ea typeface="+mn-ea"/>
+                        <a:cs typeface="+mn-cs"/>
+                      </a:endParaRPr>
+                    </a:p>
+                  </a:txBody>
+                  <a:tcPr marL="57150" marR="57150" marT="38100" marB="38100" anchor="ctr"/>
+                </a:tc>
+                <a:tc>
+                  <a:txBody>
+                    <a:bodyPr/>
+                    <a:lstStyle/>
+                    <a:p>
+                      <a:pPr algn="ctr">
+                        <a:buNone/>
+                      </a:pPr>
+                      <a:r>
+                        <a:rPr lang="en-US" sz="1800" kern="1200" dirty="0">
+                          <a:solidFill>
+                            <a:srgbClr val="CCE5FF"/>
+                          </a:solidFill>
+                        </a:rPr>
+                        <a:t>1e-3</a:t>
+                      </a:r>
+                      <a:endParaRPr lang="en-US" sz="1800" kern="1200" dirty="0">
+                        <a:solidFill>
+                          <a:srgbClr val="CCE5FF"/>
+                        </a:solidFill>
+                        <a:latin typeface="+mn-lt"/>
+                        <a:ea typeface="+mn-ea"/>
+                        <a:cs typeface="+mn-cs"/>
+                      </a:endParaRPr>
+                    </a:p>
+                  </a:txBody>
+                  <a:tcPr marL="57150" marR="57150" marT="38100" marB="38100" anchor="ctr"/>
+                </a:tc>
+                <a:extLst>
+                  <a:ext uri="{0D108BD9-81ED-4DB2-BD59-A6C34878D82A}">
+                    <a16:rowId xmlns:a16="http://schemas.microsoft.com/office/drawing/2014/main" val="2980104865"/>
+                  </a:ext>
+                </a:extLst>
+              </a:tr>
+              <a:tr h="243581">
+                <a:tc>
+                  <a:txBody>
+                    <a:bodyPr/>
+                    <a:lstStyle/>
+                    <a:p>
+                      <a:pPr algn="ctr">
+                        <a:buNone/>
+                      </a:pPr>
+                      <a:r>
+                        <a:rPr lang="en-US" sz="1800" kern="1200">
+                          <a:solidFill>
+                            <a:srgbClr val="CCE5FF"/>
+                          </a:solidFill>
+                        </a:rPr>
+                        <a:t>Loss function</a:t>
+                      </a:r>
+                      <a:endParaRPr lang="en-US" sz="1800" kern="1200">
+                        <a:solidFill>
+                          <a:srgbClr val="CCE5FF"/>
+                        </a:solidFill>
+                        <a:latin typeface="+mn-lt"/>
+                        <a:ea typeface="+mn-ea"/>
+                        <a:cs typeface="+mn-cs"/>
+                      </a:endParaRPr>
+                    </a:p>
+                  </a:txBody>
+                  <a:tcPr marL="57150" marR="57150" marT="38100" marB="38100" anchor="ctr"/>
+                </a:tc>
+                <a:tc>
+                  <a:txBody>
+                    <a:bodyPr/>
+                    <a:lstStyle/>
+                    <a:p>
+                      <a:pPr algn="ctr">
+                        <a:buNone/>
+                      </a:pPr>
+                      <a:r>
+                        <a:rPr lang="en-US" sz="1800" kern="1200" dirty="0" err="1">
+                          <a:solidFill>
+                            <a:srgbClr val="CCE5FF"/>
+                          </a:solidFill>
+                        </a:rPr>
+                        <a:t>CrossEntropyLoss</a:t>
+                      </a:r>
+                      <a:endParaRPr lang="en-US" sz="1800" kern="1200" dirty="0">
+                        <a:solidFill>
+                          <a:srgbClr val="CCE5FF"/>
+                        </a:solidFill>
+                        <a:latin typeface="+mn-lt"/>
+                        <a:ea typeface="+mn-ea"/>
+                        <a:cs typeface="+mn-cs"/>
+                      </a:endParaRPr>
+                    </a:p>
+                  </a:txBody>
+                  <a:tcPr marL="57150" marR="57150" marT="38100" marB="38100" anchor="ctr"/>
+                </a:tc>
+                <a:extLst>
+                  <a:ext uri="{0D108BD9-81ED-4DB2-BD59-A6C34878D82A}">
+                    <a16:rowId xmlns:a16="http://schemas.microsoft.com/office/drawing/2014/main" val="2810740029"/>
+                  </a:ext>
+                </a:extLst>
+              </a:tr>
+              <a:tr h="243581">
+                <a:tc>
+                  <a:txBody>
+                    <a:bodyPr/>
+                    <a:lstStyle/>
+                    <a:p>
+                      <a:pPr algn="ctr">
+                        <a:buNone/>
+                      </a:pPr>
+                      <a:r>
+                        <a:rPr lang="en-US" sz="1800" kern="1200" dirty="0">
+                          <a:solidFill>
+                            <a:srgbClr val="CCE5FF"/>
+                          </a:solidFill>
+                        </a:rPr>
+                        <a:t>Epochs</a:t>
+                      </a:r>
+                      <a:endParaRPr lang="en-US" sz="1800" kern="1200" dirty="0">
+                        <a:solidFill>
+                          <a:srgbClr val="CCE5FF"/>
+                        </a:solidFill>
+                        <a:latin typeface="+mn-lt"/>
+                        <a:ea typeface="+mn-ea"/>
+                        <a:cs typeface="+mn-cs"/>
+                      </a:endParaRPr>
+                    </a:p>
+                  </a:txBody>
+                  <a:tcPr marL="57150" marR="57150" marT="38100" marB="38100" anchor="ctr"/>
+                </a:tc>
+                <a:tc>
+                  <a:txBody>
+                    <a:bodyPr/>
+                    <a:lstStyle/>
+                    <a:p>
+                      <a:pPr algn="ctr">
+                        <a:buNone/>
+                      </a:pPr>
+                      <a:r>
+                        <a:rPr lang="en-US" sz="1800" kern="1200" dirty="0">
+                          <a:solidFill>
+                            <a:srgbClr val="CCE5FF"/>
+                          </a:solidFill>
+                        </a:rPr>
+                        <a:t>5</a:t>
+                      </a:r>
+                      <a:endParaRPr lang="en-US" sz="1800" kern="1200" dirty="0">
+                        <a:solidFill>
+                          <a:srgbClr val="CCE5FF"/>
+                        </a:solidFill>
+                        <a:latin typeface="+mn-lt"/>
+                        <a:ea typeface="+mn-ea"/>
+                        <a:cs typeface="+mn-cs"/>
+                      </a:endParaRPr>
+                    </a:p>
+                  </a:txBody>
+                  <a:tcPr marL="57150" marR="57150" marT="38100" marB="38100" anchor="ctr"/>
+                </a:tc>
+                <a:extLst>
+                  <a:ext uri="{0D108BD9-81ED-4DB2-BD59-A6C34878D82A}">
+                    <a16:rowId xmlns:a16="http://schemas.microsoft.com/office/drawing/2014/main" val="3901992980"/>
+                  </a:ext>
+                </a:extLst>
+              </a:tr>
+            </a:tbl>
+          </a:graphicData>
+        </a:graphic>
+      </p:graphicFrame>
+      <p:sp>
+        <p:nvSpPr>
+          <p:cNvPr id="28" name="TextBox 27">
+            <a:extLst>
+              <a:ext uri="{FF2B5EF4-FFF2-40B4-BE49-F238E27FC236}">
+                <a16:creationId xmlns:a16="http://schemas.microsoft.com/office/drawing/2014/main" id="{76D096AA-B4FD-C143-9BCD-8D1488C5F1F1}"/>
+              </a:ext>
+            </a:extLst>
+          </p:cNvPr>
           <p:cNvSpPr txBox="1"/>
           <p:nvPr/>
         </p:nvSpPr>
         <p:spPr>
           <a:xfrm>
-            <a:off x="6858000" y="1965960"/>
-            <a:ext cx="1463040" cy="128016"/>
+            <a:off x="9714497" y="4100971"/>
+            <a:ext cx="6097836" cy="369332"/>
           </a:xfrm>
           <a:prstGeom prst="rect">
             <a:avLst/>
@@ -8688,627 +11377,291 @@
           </a:bodyPr>
           <a:lstStyle/>
           <a:p>
-            <a:pPr algn="ctr"/>
-            <a:r>
-              <a:rPr sz="1300" b="0" i="0">
-                <a:solidFill>
-                  <a:srgbClr val="AABBCC"/>
-                </a:solidFill>
-              </a:rPr>
-              <a:t>↓</a:t>
-            </a:r>
-          </a:p>
-        </p:txBody>
-      </p:sp>
-      <p:sp>
-        <p:nvSpPr>
-          <p:cNvPr id="9" name="Rectangle 8"/>
-          <p:cNvSpPr/>
-          <p:nvPr/>
-        </p:nvSpPr>
-        <p:spPr>
-          <a:xfrm>
-            <a:off x="6858000" y="2075688"/>
-            <a:ext cx="1463040" cy="777240"/>
-          </a:xfrm>
-          <a:prstGeom prst="rect">
-            <a:avLst/>
-          </a:prstGeom>
-          <a:solidFill>
-            <a:srgbClr val="1A5B9A"/>
-          </a:solidFill>
-          <a:ln>
-            <a:noFill/>
-          </a:ln>
-        </p:spPr>
-        <p:style>
-          <a:lnRef idx="1">
-            <a:schemeClr val="accent1"/>
-          </a:lnRef>
-          <a:fillRef idx="3">
-            <a:schemeClr val="accent1"/>
-          </a:fillRef>
-          <a:effectRef idx="2">
-            <a:schemeClr val="accent1"/>
-          </a:effectRef>
-          <a:fontRef idx="minor">
-            <a:schemeClr val="lt1"/>
-          </a:fontRef>
-        </p:style>
-        <p:txBody>
-          <a:bodyPr rtlCol="0" anchor="ctr"/>
-          <a:lstStyle/>
-          <a:p>
-            <a:pPr algn="ctr"/>
-            <a:endParaRPr/>
-          </a:p>
-        </p:txBody>
-      </p:sp>
-      <p:sp>
-        <p:nvSpPr>
-          <p:cNvPr id="10" name="TextBox 9"/>
-          <p:cNvSpPr txBox="1"/>
-          <p:nvPr/>
-        </p:nvSpPr>
-        <p:spPr>
-          <a:xfrm>
-            <a:off x="6858000" y="2121408"/>
-            <a:ext cx="1463040" cy="731520"/>
-          </a:xfrm>
-          <a:prstGeom prst="rect">
-            <a:avLst/>
-          </a:prstGeom>
-          <a:noFill/>
-        </p:spPr>
-        <p:txBody>
-          <a:bodyPr wrap="square">
-            <a:spAutoFit/>
-          </a:bodyPr>
-          <a:lstStyle/>
-          <a:p>
-            <a:pPr algn="ctr"/>
-            <a:r>
-              <a:rPr sz="1300" b="0" i="0">
-                <a:solidFill>
-                  <a:srgbClr val="FFFFFF"/>
-                </a:solidFill>
-              </a:rPr>
-              <a:t>Patch Embed
-4×4 patches</a:t>
-            </a:r>
-          </a:p>
-        </p:txBody>
-      </p:sp>
-      <p:sp>
-        <p:nvSpPr>
-          <p:cNvPr id="11" name="TextBox 10"/>
-          <p:cNvSpPr txBox="1"/>
-          <p:nvPr/>
-        </p:nvSpPr>
-        <p:spPr>
-          <a:xfrm>
-            <a:off x="6858000" y="2852928"/>
-            <a:ext cx="1463040" cy="128016"/>
-          </a:xfrm>
-          <a:prstGeom prst="rect">
-            <a:avLst/>
-          </a:prstGeom>
-          <a:noFill/>
-        </p:spPr>
-        <p:txBody>
-          <a:bodyPr wrap="square">
-            <a:spAutoFit/>
-          </a:bodyPr>
-          <a:lstStyle/>
-          <a:p>
-            <a:pPr algn="ctr"/>
-            <a:r>
-              <a:rPr sz="1300" b="0" i="0">
-                <a:solidFill>
-                  <a:srgbClr val="AABBCC"/>
-                </a:solidFill>
-              </a:rPr>
-              <a:t>↓</a:t>
-            </a:r>
-          </a:p>
-        </p:txBody>
-      </p:sp>
-      <p:sp>
-        <p:nvSpPr>
-          <p:cNvPr id="12" name="Rectangle 11"/>
-          <p:cNvSpPr/>
-          <p:nvPr/>
-        </p:nvSpPr>
-        <p:spPr>
-          <a:xfrm>
-            <a:off x="6858000" y="2962656"/>
-            <a:ext cx="1463040" cy="777240"/>
-          </a:xfrm>
-          <a:prstGeom prst="rect">
-            <a:avLst/>
-          </a:prstGeom>
-          <a:solidFill>
-            <a:srgbClr val="1A5B9A"/>
-          </a:solidFill>
-          <a:ln>
-            <a:noFill/>
-          </a:ln>
-        </p:spPr>
-        <p:style>
-          <a:lnRef idx="1">
-            <a:schemeClr val="accent1"/>
-          </a:lnRef>
-          <a:fillRef idx="3">
-            <a:schemeClr val="accent1"/>
-          </a:fillRef>
-          <a:effectRef idx="2">
-            <a:schemeClr val="accent1"/>
-          </a:effectRef>
-          <a:fontRef idx="minor">
-            <a:schemeClr val="lt1"/>
-          </a:fontRef>
-        </p:style>
-        <p:txBody>
-          <a:bodyPr rtlCol="0" anchor="ctr"/>
-          <a:lstStyle/>
-          <a:p>
-            <a:pPr algn="ctr"/>
-            <a:endParaRPr/>
-          </a:p>
-        </p:txBody>
-      </p:sp>
-      <p:sp>
-        <p:nvSpPr>
-          <p:cNvPr id="13" name="TextBox 12"/>
-          <p:cNvSpPr txBox="1"/>
-          <p:nvPr/>
-        </p:nvSpPr>
-        <p:spPr>
-          <a:xfrm>
-            <a:off x="6858000" y="3008376"/>
-            <a:ext cx="1463040" cy="731520"/>
-          </a:xfrm>
-          <a:prstGeom prst="rect">
-            <a:avLst/>
-          </a:prstGeom>
-          <a:noFill/>
-        </p:spPr>
-        <p:txBody>
-          <a:bodyPr wrap="square">
-            <a:spAutoFit/>
-          </a:bodyPr>
-          <a:lstStyle/>
-          <a:p>
-            <a:pPr algn="ctr"/>
-            <a:r>
-              <a:rPr sz="1300" b="0" i="0">
-                <a:solidFill>
-                  <a:srgbClr val="FFFFFF"/>
-                </a:solidFill>
-              </a:rPr>
-              <a:t>+ Pos. Encoding</a:t>
-            </a:r>
-          </a:p>
-        </p:txBody>
-      </p:sp>
-      <p:sp>
-        <p:nvSpPr>
-          <p:cNvPr id="14" name="TextBox 13"/>
-          <p:cNvSpPr txBox="1"/>
-          <p:nvPr/>
-        </p:nvSpPr>
-        <p:spPr>
-          <a:xfrm>
-            <a:off x="6858000" y="3739896"/>
-            <a:ext cx="1463040" cy="128016"/>
-          </a:xfrm>
-          <a:prstGeom prst="rect">
-            <a:avLst/>
-          </a:prstGeom>
-          <a:noFill/>
-        </p:spPr>
-        <p:txBody>
-          <a:bodyPr wrap="square">
-            <a:spAutoFit/>
-          </a:bodyPr>
-          <a:lstStyle/>
-          <a:p>
-            <a:pPr algn="ctr"/>
-            <a:r>
-              <a:rPr sz="1300" b="0" i="0">
-                <a:solidFill>
-                  <a:srgbClr val="AABBCC"/>
-                </a:solidFill>
-              </a:rPr>
-              <a:t>↓</a:t>
-            </a:r>
-          </a:p>
-        </p:txBody>
-      </p:sp>
-      <p:sp>
-        <p:nvSpPr>
-          <p:cNvPr id="15" name="Rectangle 14"/>
-          <p:cNvSpPr/>
-          <p:nvPr/>
-        </p:nvSpPr>
-        <p:spPr>
-          <a:xfrm>
-            <a:off x="6858000" y="3849624"/>
-            <a:ext cx="1463040" cy="777240"/>
-          </a:xfrm>
-          <a:prstGeom prst="rect">
-            <a:avLst/>
-          </a:prstGeom>
-          <a:solidFill>
-            <a:srgbClr val="5A2A9A"/>
-          </a:solidFill>
-          <a:ln>
-            <a:noFill/>
-          </a:ln>
-        </p:spPr>
-        <p:style>
-          <a:lnRef idx="1">
-            <a:schemeClr val="accent1"/>
-          </a:lnRef>
-          <a:fillRef idx="3">
-            <a:schemeClr val="accent1"/>
-          </a:fillRef>
-          <a:effectRef idx="2">
-            <a:schemeClr val="accent1"/>
-          </a:effectRef>
-          <a:fontRef idx="minor">
-            <a:schemeClr val="lt1"/>
-          </a:fontRef>
-        </p:style>
-        <p:txBody>
-          <a:bodyPr rtlCol="0" anchor="ctr"/>
-          <a:lstStyle/>
-          <a:p>
-            <a:pPr algn="ctr"/>
-            <a:endParaRPr/>
-          </a:p>
-        </p:txBody>
-      </p:sp>
-      <p:sp>
-        <p:nvSpPr>
-          <p:cNvPr id="16" name="TextBox 15"/>
-          <p:cNvSpPr txBox="1"/>
-          <p:nvPr/>
-        </p:nvSpPr>
-        <p:spPr>
-          <a:xfrm>
-            <a:off x="6858000" y="3895344"/>
-            <a:ext cx="1463040" cy="731520"/>
-          </a:xfrm>
-          <a:prstGeom prst="rect">
-            <a:avLst/>
-          </a:prstGeom>
-          <a:noFill/>
-        </p:spPr>
-        <p:txBody>
-          <a:bodyPr wrap="square">
-            <a:spAutoFit/>
-          </a:bodyPr>
-          <a:lstStyle/>
-          <a:p>
-            <a:pPr algn="ctr"/>
-            <a:r>
-              <a:rPr sz="1300" b="0" i="0">
-                <a:solidFill>
-                  <a:srgbClr val="FFFFFF"/>
-                </a:solidFill>
-              </a:rPr>
-              <a:t>Transformer
-Encoder ×2</a:t>
-            </a:r>
-          </a:p>
-        </p:txBody>
-      </p:sp>
-      <p:sp>
-        <p:nvSpPr>
-          <p:cNvPr id="17" name="TextBox 16"/>
-          <p:cNvSpPr txBox="1"/>
-          <p:nvPr/>
-        </p:nvSpPr>
-        <p:spPr>
-          <a:xfrm>
-            <a:off x="6858000" y="4626864"/>
-            <a:ext cx="1463040" cy="128016"/>
-          </a:xfrm>
-          <a:prstGeom prst="rect">
-            <a:avLst/>
-          </a:prstGeom>
-          <a:noFill/>
-        </p:spPr>
-        <p:txBody>
-          <a:bodyPr wrap="square">
-            <a:spAutoFit/>
-          </a:bodyPr>
-          <a:lstStyle/>
-          <a:p>
-            <a:pPr algn="ctr"/>
-            <a:r>
-              <a:rPr sz="1300" b="0" i="0">
-                <a:solidFill>
-                  <a:srgbClr val="AABBCC"/>
-                </a:solidFill>
-              </a:rPr>
-              <a:t>↓</a:t>
-            </a:r>
-          </a:p>
-        </p:txBody>
-      </p:sp>
-      <p:sp>
-        <p:nvSpPr>
-          <p:cNvPr id="18" name="Rectangle 17"/>
-          <p:cNvSpPr/>
-          <p:nvPr/>
-        </p:nvSpPr>
-        <p:spPr>
-          <a:xfrm>
-            <a:off x="6858000" y="4736592"/>
-            <a:ext cx="1463040" cy="777240"/>
-          </a:xfrm>
-          <a:prstGeom prst="rect">
-            <a:avLst/>
-          </a:prstGeom>
-          <a:solidFill>
-            <a:srgbClr val="5A2A9A"/>
-          </a:solidFill>
-          <a:ln>
-            <a:noFill/>
-          </a:ln>
-        </p:spPr>
-        <p:style>
-          <a:lnRef idx="1">
-            <a:schemeClr val="accent1"/>
-          </a:lnRef>
-          <a:fillRef idx="3">
-            <a:schemeClr val="accent1"/>
-          </a:fillRef>
-          <a:effectRef idx="2">
-            <a:schemeClr val="accent1"/>
-          </a:effectRef>
-          <a:fontRef idx="minor">
-            <a:schemeClr val="lt1"/>
-          </a:fontRef>
-        </p:style>
-        <p:txBody>
-          <a:bodyPr rtlCol="0" anchor="ctr"/>
-          <a:lstStyle/>
-          <a:p>
-            <a:pPr algn="ctr"/>
-            <a:endParaRPr/>
-          </a:p>
-        </p:txBody>
-      </p:sp>
-      <p:sp>
-        <p:nvSpPr>
-          <p:cNvPr id="19" name="TextBox 18"/>
-          <p:cNvSpPr txBox="1"/>
-          <p:nvPr/>
-        </p:nvSpPr>
-        <p:spPr>
-          <a:xfrm>
-            <a:off x="6858000" y="4782312"/>
-            <a:ext cx="1463040" cy="731520"/>
-          </a:xfrm>
-          <a:prstGeom prst="rect">
-            <a:avLst/>
-          </a:prstGeom>
-          <a:noFill/>
-        </p:spPr>
-        <p:txBody>
-          <a:bodyPr wrap="square">
-            <a:spAutoFit/>
-          </a:bodyPr>
-          <a:lstStyle/>
-          <a:p>
-            <a:pPr algn="ctr"/>
-            <a:r>
-              <a:rPr sz="1300" b="0" i="0">
-                <a:solidFill>
-                  <a:srgbClr val="FFFFFF"/>
-                </a:solidFill>
-              </a:rPr>
-              <a:t>Global
-Avg Pool</a:t>
-            </a:r>
-          </a:p>
-        </p:txBody>
-      </p:sp>
-      <p:sp>
-        <p:nvSpPr>
-          <p:cNvPr id="20" name="TextBox 19"/>
-          <p:cNvSpPr txBox="1"/>
-          <p:nvPr/>
-        </p:nvSpPr>
-        <p:spPr>
-          <a:xfrm>
-            <a:off x="6858000" y="5513832"/>
-            <a:ext cx="1463040" cy="128016"/>
-          </a:xfrm>
-          <a:prstGeom prst="rect">
-            <a:avLst/>
-          </a:prstGeom>
-          <a:noFill/>
-        </p:spPr>
-        <p:txBody>
-          <a:bodyPr wrap="square">
-            <a:spAutoFit/>
-          </a:bodyPr>
-          <a:lstStyle/>
-          <a:p>
-            <a:pPr algn="ctr"/>
-            <a:r>
-              <a:rPr sz="1300" b="0" i="0">
-                <a:solidFill>
-                  <a:srgbClr val="AABBCC"/>
-                </a:solidFill>
-              </a:rPr>
-              <a:t>↓</a:t>
-            </a:r>
-          </a:p>
-        </p:txBody>
-      </p:sp>
-      <p:sp>
-        <p:nvSpPr>
-          <p:cNvPr id="21" name="Rectangle 20"/>
-          <p:cNvSpPr/>
-          <p:nvPr/>
-        </p:nvSpPr>
-        <p:spPr>
-          <a:xfrm>
-            <a:off x="6858000" y="5623560"/>
-            <a:ext cx="1463040" cy="777240"/>
-          </a:xfrm>
-          <a:prstGeom prst="rect">
-            <a:avLst/>
-          </a:prstGeom>
-          <a:solidFill>
-            <a:srgbClr val="4CAF50"/>
-          </a:solidFill>
-          <a:ln>
-            <a:noFill/>
-          </a:ln>
-        </p:spPr>
-        <p:style>
-          <a:lnRef idx="1">
-            <a:schemeClr val="accent1"/>
-          </a:lnRef>
-          <a:fillRef idx="3">
-            <a:schemeClr val="accent1"/>
-          </a:fillRef>
-          <a:effectRef idx="2">
-            <a:schemeClr val="accent1"/>
-          </a:effectRef>
-          <a:fontRef idx="minor">
-            <a:schemeClr val="lt1"/>
-          </a:fontRef>
-        </p:style>
-        <p:txBody>
-          <a:bodyPr rtlCol="0" anchor="ctr"/>
-          <a:lstStyle/>
-          <a:p>
-            <a:pPr algn="ctr"/>
-            <a:endParaRPr/>
-          </a:p>
-        </p:txBody>
-      </p:sp>
-      <p:sp>
-        <p:nvSpPr>
-          <p:cNvPr id="22" name="TextBox 21"/>
-          <p:cNvSpPr txBox="1"/>
-          <p:nvPr/>
-        </p:nvSpPr>
-        <p:spPr>
-          <a:xfrm>
-            <a:off x="6858000" y="5669280"/>
-            <a:ext cx="1463040" cy="731520"/>
-          </a:xfrm>
-          <a:prstGeom prst="rect">
-            <a:avLst/>
-          </a:prstGeom>
-          <a:noFill/>
-        </p:spPr>
-        <p:txBody>
-          <a:bodyPr wrap="square">
-            <a:spAutoFit/>
-          </a:bodyPr>
-          <a:lstStyle/>
-          <a:p>
-            <a:pPr algn="ctr"/>
-            <a:r>
-              <a:rPr sz="1300" b="0" i="0">
-                <a:solidFill>
-                  <a:srgbClr val="FFFFFF"/>
-                </a:solidFill>
-              </a:rPr>
-              <a:t>Classifier
-10 classes</a:t>
-            </a:r>
-          </a:p>
-        </p:txBody>
-      </p:sp>
-      <p:sp>
-        <p:nvSpPr>
-          <p:cNvPr id="23" name="TextBox 22"/>
-          <p:cNvSpPr txBox="1"/>
-          <p:nvPr/>
-        </p:nvSpPr>
-        <p:spPr>
-          <a:xfrm>
-            <a:off x="457200" y="4050792"/>
-            <a:ext cx="5669280" cy="1097280"/>
-          </a:xfrm>
-          <a:prstGeom prst="rect">
-            <a:avLst/>
-          </a:prstGeom>
-          <a:noFill/>
-        </p:spPr>
-        <p:txBody>
-          <a:bodyPr wrap="square">
-            <a:spAutoFit/>
-          </a:bodyPr>
-          <a:lstStyle/>
-          <a:p>
-            <a:pPr algn="l"/>
-            <a:r>
-              <a:rPr sz="2000" b="1" dirty="0">
-                <a:solidFill>
-                  <a:srgbClr val="AA55FF"/>
-                </a:solidFill>
-              </a:rPr>
-              <a:t>Results</a:t>
-            </a:r>
-          </a:p>
-          <a:p>
-            <a:pPr algn="l">
-              <a:spcBef>
-                <a:spcPts val="300"/>
-              </a:spcBef>
-            </a:pPr>
-            <a:r>
-              <a:rPr sz="1800" dirty="0">
-                <a:solidFill>
-                  <a:srgbClr val="CCE5FF"/>
-                </a:solidFill>
-              </a:rPr>
-              <a:t>•  Clean: 97.65%  |  Noisy: 96.62%</a:t>
-            </a:r>
-          </a:p>
-          <a:p>
-            <a:pPr algn="l">
-              <a:spcBef>
-                <a:spcPts val="300"/>
-              </a:spcBef>
-            </a:pPr>
-            <a:r>
-              <a:rPr sz="1800" dirty="0">
-                <a:solidFill>
-                  <a:srgbClr val="CCE5FF"/>
-                </a:solidFill>
-              </a:rPr>
-              <a:t>•  No conv layers — pure attention mechanism</a:t>
-            </a:r>
-          </a:p>
-          <a:p>
-            <a:pPr algn="l">
-              <a:spcBef>
-                <a:spcPts val="300"/>
-              </a:spcBef>
-            </a:pPr>
-            <a:r>
-              <a:rPr sz="1800" dirty="0">
-                <a:solidFill>
-                  <a:srgbClr val="CCE5FF"/>
-                </a:solidFill>
-              </a:rPr>
-              <a:t>•  Competitive with CNN; slightly less robust</a:t>
-            </a:r>
-          </a:p>
-        </p:txBody>
-      </p:sp>
+            <a:r>
+              <a:rPr lang="en-US" b="1" dirty="0"/>
+              <a:t>567,178 parameters</a:t>
+            </a:r>
+            <a:endParaRPr lang="en-US" dirty="0"/>
+          </a:p>
+        </p:txBody>
+      </p:sp>
+      <p:graphicFrame>
+        <p:nvGraphicFramePr>
+          <p:cNvPr id="29" name="Table 28">
+            <a:extLst>
+              <a:ext uri="{FF2B5EF4-FFF2-40B4-BE49-F238E27FC236}">
+                <a16:creationId xmlns:a16="http://schemas.microsoft.com/office/drawing/2014/main" id="{D495F201-0EB7-E572-E7F8-6B195F3B4327}"/>
+              </a:ext>
+            </a:extLst>
+          </p:cNvPr>
+          <p:cNvGraphicFramePr>
+            <a:graphicFrameLocks noGrp="1"/>
+          </p:cNvGraphicFramePr>
+          <p:nvPr>
+            <p:extLst>
+              <p:ext uri="{D42A27DB-BD31-4B8C-83A1-F6EECF244321}">
+                <p14:modId xmlns:p14="http://schemas.microsoft.com/office/powerpoint/2010/main" val="4173301481"/>
+              </p:ext>
+            </p:extLst>
+          </p:nvPr>
+        </p:nvGraphicFramePr>
+        <p:xfrm>
+          <a:off x="8412480" y="1014090"/>
+          <a:ext cx="4206240" cy="3122930"/>
+        </p:xfrm>
+        <a:graphic>
+          <a:graphicData uri="http://schemas.openxmlformats.org/drawingml/2006/table">
+            <a:tbl>
+              <a:tblPr>
+                <a:tableStyleId>{2D5ABB26-0587-4C30-8999-92F81FD0307C}</a:tableStyleId>
+              </a:tblPr>
+              <a:tblGrid>
+                <a:gridCol w="2103120">
+                  <a:extLst>
+                    <a:ext uri="{9D8B030D-6E8A-4147-A177-3AD203B41FA5}">
+                      <a16:colId xmlns:a16="http://schemas.microsoft.com/office/drawing/2014/main" val="3487379403"/>
+                    </a:ext>
+                  </a:extLst>
+                </a:gridCol>
+                <a:gridCol w="2103120">
+                  <a:extLst>
+                    <a:ext uri="{9D8B030D-6E8A-4147-A177-3AD203B41FA5}">
+                      <a16:colId xmlns:a16="http://schemas.microsoft.com/office/drawing/2014/main" val="2136637008"/>
+                    </a:ext>
+                  </a:extLst>
+                </a:gridCol>
+              </a:tblGrid>
+              <a:tr h="205084">
+                <a:tc>
+                  <a:txBody>
+                    <a:bodyPr/>
+                    <a:lstStyle/>
+                    <a:p>
+                      <a:pPr>
+                        <a:buNone/>
+                      </a:pPr>
+                      <a:r>
+                        <a:rPr lang="en-US" dirty="0">
+                          <a:effectLst/>
+                        </a:rPr>
+                        <a:t>Component</a:t>
+                      </a:r>
+                    </a:p>
+                  </a:txBody>
+                  <a:tcPr marL="57150" marR="57150" marT="38100" marB="38100" anchor="ctr"/>
+                </a:tc>
+                <a:tc>
+                  <a:txBody>
+                    <a:bodyPr/>
+                    <a:lstStyle/>
+                    <a:p>
+                      <a:pPr>
+                        <a:buNone/>
+                      </a:pPr>
+                      <a:r>
+                        <a:rPr lang="en-US">
+                          <a:effectLst/>
+                        </a:rPr>
+                        <a:t>Params</a:t>
+                      </a:r>
+                    </a:p>
+                  </a:txBody>
+                  <a:tcPr marL="57150" marR="57150" marT="38100" marB="38100" anchor="ctr"/>
+                </a:tc>
+                <a:extLst>
+                  <a:ext uri="{0D108BD9-81ED-4DB2-BD59-A6C34878D82A}">
+                    <a16:rowId xmlns:a16="http://schemas.microsoft.com/office/drawing/2014/main" val="3060918699"/>
+                  </a:ext>
+                </a:extLst>
+              </a:tr>
+              <a:tr h="365568">
+                <a:tc>
+                  <a:txBody>
+                    <a:bodyPr/>
+                    <a:lstStyle/>
+                    <a:p>
+                      <a:pPr>
+                        <a:buNone/>
+                      </a:pPr>
+                      <a:r>
+                        <a:rPr lang="en-US">
+                          <a:effectLst/>
+                        </a:rPr>
+                        <a:t>Patch projection Linear(16→64)</a:t>
+                      </a:r>
+                    </a:p>
+                  </a:txBody>
+                  <a:tcPr marL="57150" marR="57150" marT="38100" marB="38100" anchor="ctr"/>
+                </a:tc>
+                <a:tc>
+                  <a:txBody>
+                    <a:bodyPr/>
+                    <a:lstStyle/>
+                    <a:p>
+                      <a:pPr>
+                        <a:buNone/>
+                      </a:pPr>
+                      <a:r>
+                        <a:rPr lang="en-US">
+                          <a:effectLst/>
+                        </a:rPr>
+                        <a:t>1,088</a:t>
+                      </a:r>
+                    </a:p>
+                  </a:txBody>
+                  <a:tcPr marL="57150" marR="57150" marT="38100" marB="38100" anchor="ctr"/>
+                </a:tc>
+                <a:extLst>
+                  <a:ext uri="{0D108BD9-81ED-4DB2-BD59-A6C34878D82A}">
+                    <a16:rowId xmlns:a16="http://schemas.microsoft.com/office/drawing/2014/main" val="1295414286"/>
+                  </a:ext>
+                </a:extLst>
+              </a:tr>
+              <a:tr h="365568">
+                <a:tc>
+                  <a:txBody>
+                    <a:bodyPr/>
+                    <a:lstStyle/>
+                    <a:p>
+                      <a:pPr>
+                        <a:buNone/>
+                      </a:pPr>
+                      <a:r>
+                        <a:rPr lang="en-US">
+                          <a:effectLst/>
+                        </a:rPr>
+                        <a:t>Positional embedding (49×64)</a:t>
+                      </a:r>
+                    </a:p>
+                  </a:txBody>
+                  <a:tcPr marL="57150" marR="57150" marT="38100" marB="38100" anchor="ctr"/>
+                </a:tc>
+                <a:tc>
+                  <a:txBody>
+                    <a:bodyPr/>
+                    <a:lstStyle/>
+                    <a:p>
+                      <a:pPr>
+                        <a:buNone/>
+                      </a:pPr>
+                      <a:r>
+                        <a:rPr lang="en-US">
+                          <a:effectLst/>
+                        </a:rPr>
+                        <a:t>3,136</a:t>
+                      </a:r>
+                    </a:p>
+                  </a:txBody>
+                  <a:tcPr marL="57150" marR="57150" marT="38100" marB="38100" anchor="ctr"/>
+                </a:tc>
+                <a:extLst>
+                  <a:ext uri="{0D108BD9-81ED-4DB2-BD59-A6C34878D82A}">
+                    <a16:rowId xmlns:a16="http://schemas.microsoft.com/office/drawing/2014/main" val="2896375089"/>
+                  </a:ext>
+                </a:extLst>
+              </a:tr>
+              <a:tr h="847021">
+                <a:tc>
+                  <a:txBody>
+                    <a:bodyPr/>
+                    <a:lstStyle/>
+                    <a:p>
+                      <a:pPr>
+                        <a:buNone/>
+                      </a:pPr>
+                      <a:r>
+                        <a:rPr lang="en-US" dirty="0">
+                          <a:effectLst/>
+                        </a:rPr>
+                        <a:t>2× </a:t>
+                      </a:r>
+                      <a:r>
+                        <a:rPr lang="en-US" dirty="0" err="1">
+                          <a:effectLst/>
+                        </a:rPr>
+                        <a:t>TransformerEncoderLayer</a:t>
+                      </a:r>
+                      <a:r>
+                        <a:rPr lang="en-US" dirty="0">
+                          <a:effectLst/>
+                        </a:rPr>
+                        <a:t> (attn + FFN)</a:t>
+                      </a:r>
+                    </a:p>
+                  </a:txBody>
+                  <a:tcPr marL="57150" marR="57150" marT="38100" marB="38100" anchor="ctr"/>
+                </a:tc>
+                <a:tc>
+                  <a:txBody>
+                    <a:bodyPr/>
+                    <a:lstStyle/>
+                    <a:p>
+                      <a:pPr>
+                        <a:buNone/>
+                      </a:pPr>
+                      <a:r>
+                        <a:rPr lang="en-US">
+                          <a:effectLst/>
+                        </a:rPr>
+                        <a:t>562,304</a:t>
+                      </a:r>
+                    </a:p>
+                  </a:txBody>
+                  <a:tcPr marL="57150" marR="57150" marT="38100" marB="38100" anchor="ctr"/>
+                </a:tc>
+                <a:extLst>
+                  <a:ext uri="{0D108BD9-81ED-4DB2-BD59-A6C34878D82A}">
+                    <a16:rowId xmlns:a16="http://schemas.microsoft.com/office/drawing/2014/main" val="1524337551"/>
+                  </a:ext>
+                </a:extLst>
+              </a:tr>
+              <a:tr h="365568">
+                <a:tc>
+                  <a:txBody>
+                    <a:bodyPr/>
+                    <a:lstStyle/>
+                    <a:p>
+                      <a:pPr>
+                        <a:buNone/>
+                      </a:pPr>
+                      <a:r>
+                        <a:rPr lang="en-US" dirty="0">
+                          <a:effectLst/>
+                        </a:rPr>
+                        <a:t>Classifier Linear(64→10)</a:t>
+                      </a:r>
+                    </a:p>
+                  </a:txBody>
+                  <a:tcPr marL="57150" marR="57150" marT="38100" marB="38100" anchor="ctr"/>
+                </a:tc>
+                <a:tc>
+                  <a:txBody>
+                    <a:bodyPr/>
+                    <a:lstStyle/>
+                    <a:p>
+                      <a:pPr>
+                        <a:buNone/>
+                      </a:pPr>
+                      <a:r>
+                        <a:rPr lang="en-US" dirty="0">
+                          <a:effectLst/>
+                        </a:rPr>
+                        <a:t>650</a:t>
+                      </a:r>
+                    </a:p>
+                  </a:txBody>
+                  <a:tcPr marL="57150" marR="57150" marT="38100" marB="38100" anchor="ctr"/>
+                </a:tc>
+                <a:extLst>
+                  <a:ext uri="{0D108BD9-81ED-4DB2-BD59-A6C34878D82A}">
+                    <a16:rowId xmlns:a16="http://schemas.microsoft.com/office/drawing/2014/main" val="680464001"/>
+                  </a:ext>
+                </a:extLst>
+              </a:tr>
+            </a:tbl>
+          </a:graphicData>
+        </a:graphic>
+      </p:graphicFrame>
     </p:spTree>
   </p:cSld>
   <p:clrMapOvr>
@@ -9682,20 +12035,20 @@
       </p:sp>
       <p:sp>
         <p:nvSpPr>
-          <p:cNvPr id="13" name="Rectangle 12"/>
+          <p:cNvPr id="15" name="Rectangle 14"/>
           <p:cNvSpPr/>
           <p:nvPr/>
         </p:nvSpPr>
         <p:spPr>
           <a:xfrm>
-            <a:off x="7955279" y="1097280"/>
-            <a:ext cx="3154680" cy="594360"/>
+            <a:off x="457200" y="1728216"/>
+            <a:ext cx="1783080" cy="576072"/>
           </a:xfrm>
           <a:prstGeom prst="rect">
             <a:avLst/>
           </a:prstGeom>
           <a:solidFill>
-            <a:srgbClr val="004A80"/>
+            <a:srgbClr val="122A3E"/>
           </a:solidFill>
           <a:ln>
             <a:noFill/>
@@ -9726,14 +12079,14 @@
       </p:sp>
       <p:sp>
         <p:nvSpPr>
-          <p:cNvPr id="14" name="TextBox 13"/>
+          <p:cNvPr id="16" name="TextBox 15"/>
           <p:cNvSpPr txBox="1"/>
           <p:nvPr/>
         </p:nvSpPr>
         <p:spPr>
           <a:xfrm>
-            <a:off x="7955279" y="1170432"/>
-            <a:ext cx="3200400" cy="594360"/>
+            <a:off x="457200" y="1801368"/>
+            <a:ext cx="1828800" cy="594360"/>
           </a:xfrm>
           <a:prstGeom prst="rect">
             <a:avLst/>
@@ -9748,25 +12101,25 @@
           <a:p>
             <a:pPr algn="ctr"/>
             <a:r>
-              <a:rPr sz="1600" b="1" i="0">
+              <a:rPr sz="1700" b="0" i="0">
                 <a:solidFill>
                   <a:srgbClr val="FFFFFF"/>
                 </a:solidFill>
               </a:rPr>
-              <a:t>Verdict</a:t>
-            </a:r>
-          </a:p>
-        </p:txBody>
-      </p:sp>
-      <p:sp>
-        <p:nvSpPr>
-          <p:cNvPr id="15" name="Rectangle 14"/>
+              <a:t>MLP</a:t>
+            </a:r>
+          </a:p>
+        </p:txBody>
+      </p:sp>
+      <p:sp>
+        <p:nvSpPr>
+          <p:cNvPr id="17" name="Rectangle 16"/>
           <p:cNvSpPr/>
           <p:nvPr/>
         </p:nvSpPr>
         <p:spPr>
           <a:xfrm>
-            <a:off x="457200" y="1728216"/>
+            <a:off x="2377440" y="1728216"/>
             <a:ext cx="1783080" cy="576072"/>
           </a:xfrm>
           <a:prstGeom prst="rect">
@@ -9804,13 +12157,13 @@
       </p:sp>
       <p:sp>
         <p:nvSpPr>
-          <p:cNvPr id="16" name="TextBox 15"/>
+          <p:cNvPr id="18" name="TextBox 17"/>
           <p:cNvSpPr txBox="1"/>
           <p:nvPr/>
         </p:nvSpPr>
         <p:spPr>
           <a:xfrm>
-            <a:off x="457200" y="1801368"/>
+            <a:off x="2377440" y="1801368"/>
             <a:ext cx="1828800" cy="594360"/>
           </a:xfrm>
           <a:prstGeom prst="rect">
@@ -9831,20 +12184,20 @@
                   <a:srgbClr val="FFFFFF"/>
                 </a:solidFill>
               </a:rPr>
-              <a:t>MLP</a:t>
-            </a:r>
-          </a:p>
-        </p:txBody>
-      </p:sp>
-      <p:sp>
-        <p:nvSpPr>
-          <p:cNvPr id="17" name="Rectangle 16"/>
+              <a:t>96.94%</a:t>
+            </a:r>
+          </a:p>
+        </p:txBody>
+      </p:sp>
+      <p:sp>
+        <p:nvSpPr>
+          <p:cNvPr id="19" name="Rectangle 18"/>
           <p:cNvSpPr/>
           <p:nvPr/>
         </p:nvSpPr>
         <p:spPr>
           <a:xfrm>
-            <a:off x="2377440" y="1728216"/>
+            <a:off x="4297680" y="1728216"/>
             <a:ext cx="1783080" cy="576072"/>
           </a:xfrm>
           <a:prstGeom prst="rect">
@@ -9882,13 +12235,13 @@
       </p:sp>
       <p:sp>
         <p:nvSpPr>
-          <p:cNvPr id="18" name="TextBox 17"/>
+          <p:cNvPr id="20" name="TextBox 19"/>
           <p:cNvSpPr txBox="1"/>
           <p:nvPr/>
         </p:nvSpPr>
         <p:spPr>
           <a:xfrm>
-            <a:off x="2377440" y="1801368"/>
+            <a:off x="4297680" y="1801368"/>
             <a:ext cx="1828800" cy="594360"/>
           </a:xfrm>
           <a:prstGeom prst="rect">
@@ -9909,21 +12262,21 @@
                   <a:srgbClr val="FFFFFF"/>
                 </a:solidFill>
               </a:rPr>
-              <a:t>96.94%</a:t>
-            </a:r>
-          </a:p>
-        </p:txBody>
-      </p:sp>
-      <p:sp>
-        <p:nvSpPr>
-          <p:cNvPr id="19" name="Rectangle 18"/>
+              <a:t>96.08%</a:t>
+            </a:r>
+          </a:p>
+        </p:txBody>
+      </p:sp>
+      <p:sp>
+        <p:nvSpPr>
+          <p:cNvPr id="21" name="Rectangle 20"/>
           <p:cNvSpPr/>
           <p:nvPr/>
         </p:nvSpPr>
         <p:spPr>
           <a:xfrm>
-            <a:off x="4297680" y="1728216"/>
-            <a:ext cx="1783080" cy="576072"/>
+            <a:off x="6217920" y="1728216"/>
+            <a:ext cx="1600200" cy="576072"/>
           </a:xfrm>
           <a:prstGeom prst="rect">
             <a:avLst/>
@@ -9960,14 +12313,14 @@
       </p:sp>
       <p:sp>
         <p:nvSpPr>
-          <p:cNvPr id="20" name="TextBox 19"/>
+          <p:cNvPr id="22" name="TextBox 21"/>
           <p:cNvSpPr txBox="1"/>
           <p:nvPr/>
         </p:nvSpPr>
         <p:spPr>
           <a:xfrm>
-            <a:off x="4297680" y="1801368"/>
-            <a:ext cx="1828800" cy="594360"/>
+            <a:off x="6217920" y="1801368"/>
+            <a:ext cx="1645920" cy="594360"/>
           </a:xfrm>
           <a:prstGeom prst="rect">
             <a:avLst/>
@@ -9987,27 +12340,61 @@
                   <a:srgbClr val="FFFFFF"/>
                 </a:solidFill>
               </a:rPr>
-              <a:t>96.08%</a:t>
-            </a:r>
-          </a:p>
-        </p:txBody>
-      </p:sp>
-      <p:sp>
-        <p:nvSpPr>
-          <p:cNvPr id="21" name="Rectangle 20"/>
+              <a:t>−0.86%</a:t>
+            </a:r>
+          </a:p>
+        </p:txBody>
+      </p:sp>
+      <p:sp>
+        <p:nvSpPr>
+          <p:cNvPr id="24" name="TextBox 23"/>
+          <p:cNvSpPr txBox="1"/>
+          <p:nvPr/>
+        </p:nvSpPr>
+        <p:spPr>
+          <a:xfrm>
+            <a:off x="7955279" y="1801368"/>
+            <a:ext cx="3200400" cy="353943"/>
+          </a:xfrm>
+          <a:prstGeom prst="rect">
+            <a:avLst/>
+          </a:prstGeom>
+          <a:noFill/>
+        </p:spPr>
+        <p:txBody>
+          <a:bodyPr wrap="square">
+            <a:spAutoFit/>
+          </a:bodyPr>
+          <a:lstStyle/>
+          <a:p>
+            <a:pPr algn="ctr"/>
+            <a:r>
+              <a:rPr sz="1700" b="0" i="0" dirty="0">
+                <a:solidFill>
+                  <a:srgbClr val="FFFFFF"/>
+                </a:solidFill>
+              </a:rPr>
+              <a:t>Solid baseline</a:t>
+            </a:r>
+          </a:p>
+        </p:txBody>
+      </p:sp>
+      <p:sp>
+        <p:nvSpPr>
+          <p:cNvPr id="25" name="Rectangle 24"/>
           <p:cNvSpPr/>
           <p:nvPr/>
         </p:nvSpPr>
         <p:spPr>
           <a:xfrm>
-            <a:off x="6217920" y="1728216"/>
-            <a:ext cx="1600200" cy="576072"/>
+            <a:off x="457200" y="2322576"/>
+            <a:ext cx="1783080" cy="576072"/>
           </a:xfrm>
           <a:prstGeom prst="rect">
             <a:avLst/>
           </a:prstGeom>
           <a:solidFill>
-            <a:srgbClr val="122A3E"/>
+            <a:srgbClr val="0E2438"/>
           </a:solidFill>
           <a:ln>
             <a:noFill/>
@@ -10038,14 +12425,14 @@
       </p:sp>
       <p:sp>
         <p:nvSpPr>
-          <p:cNvPr id="22" name="TextBox 21"/>
+          <p:cNvPr id="26" name="TextBox 25"/>
           <p:cNvSpPr txBox="1"/>
           <p:nvPr/>
         </p:nvSpPr>
         <p:spPr>
           <a:xfrm>
-            <a:off x="6217920" y="1801368"/>
-            <a:ext cx="1645920" cy="594360"/>
+            <a:off x="457200" y="2395728"/>
+            <a:ext cx="1828800" cy="594360"/>
           </a:xfrm>
           <a:prstGeom prst="rect">
             <a:avLst/>
@@ -10065,27 +12452,27 @@
                   <a:srgbClr val="FFFFFF"/>
                 </a:solidFill>
               </a:rPr>
-              <a:t>−0.86%</a:t>
-            </a:r>
-          </a:p>
-        </p:txBody>
-      </p:sp>
-      <p:sp>
-        <p:nvSpPr>
-          <p:cNvPr id="23" name="Rectangle 22"/>
+              <a:t>Transformer</a:t>
+            </a:r>
+          </a:p>
+        </p:txBody>
+      </p:sp>
+      <p:sp>
+        <p:nvSpPr>
+          <p:cNvPr id="27" name="Rectangle 26"/>
           <p:cNvSpPr/>
           <p:nvPr/>
         </p:nvSpPr>
         <p:spPr>
           <a:xfrm>
-            <a:off x="7955279" y="1728216"/>
-            <a:ext cx="3154680" cy="576072"/>
+            <a:off x="2377440" y="2322576"/>
+            <a:ext cx="1783080" cy="576072"/>
           </a:xfrm>
           <a:prstGeom prst="rect">
             <a:avLst/>
           </a:prstGeom>
           <a:solidFill>
-            <a:srgbClr val="122A3E"/>
+            <a:srgbClr val="0E2438"/>
           </a:solidFill>
           <a:ln>
             <a:noFill/>
@@ -10116,14 +12503,14 @@
       </p:sp>
       <p:sp>
         <p:nvSpPr>
-          <p:cNvPr id="24" name="TextBox 23"/>
+          <p:cNvPr id="28" name="TextBox 27"/>
           <p:cNvSpPr txBox="1"/>
           <p:nvPr/>
         </p:nvSpPr>
         <p:spPr>
           <a:xfrm>
-            <a:off x="7955279" y="1801368"/>
-            <a:ext cx="3200400" cy="594360"/>
+            <a:off x="2377440" y="2395728"/>
+            <a:ext cx="1828800" cy="594360"/>
           </a:xfrm>
           <a:prstGeom prst="rect">
             <a:avLst/>
@@ -10143,20 +12530,20 @@
                   <a:srgbClr val="FFFFFF"/>
                 </a:solidFill>
               </a:rPr>
-              <a:t>Solid baseline</a:t>
-            </a:r>
-          </a:p>
-        </p:txBody>
-      </p:sp>
-      <p:sp>
-        <p:nvSpPr>
-          <p:cNvPr id="25" name="Rectangle 24"/>
+              <a:t>97.65%</a:t>
+            </a:r>
+          </a:p>
+        </p:txBody>
+      </p:sp>
+      <p:sp>
+        <p:nvSpPr>
+          <p:cNvPr id="29" name="Rectangle 28"/>
           <p:cNvSpPr/>
           <p:nvPr/>
         </p:nvSpPr>
         <p:spPr>
           <a:xfrm>
-            <a:off x="457200" y="2322576"/>
+            <a:off x="4297680" y="2322576"/>
             <a:ext cx="1783080" cy="576072"/>
           </a:xfrm>
           <a:prstGeom prst="rect">
@@ -10194,13 +12581,13 @@
       </p:sp>
       <p:sp>
         <p:nvSpPr>
-          <p:cNvPr id="26" name="TextBox 25"/>
+          <p:cNvPr id="30" name="TextBox 29"/>
           <p:cNvSpPr txBox="1"/>
           <p:nvPr/>
         </p:nvSpPr>
         <p:spPr>
           <a:xfrm>
-            <a:off x="457200" y="2395728"/>
+            <a:off x="4297680" y="2395728"/>
             <a:ext cx="1828800" cy="594360"/>
           </a:xfrm>
           <a:prstGeom prst="rect">
@@ -10221,21 +12608,21 @@
                   <a:srgbClr val="FFFFFF"/>
                 </a:solidFill>
               </a:rPr>
-              <a:t>Transformer</a:t>
-            </a:r>
-          </a:p>
-        </p:txBody>
-      </p:sp>
-      <p:sp>
-        <p:nvSpPr>
-          <p:cNvPr id="27" name="Rectangle 26"/>
+              <a:t>96.62%</a:t>
+            </a:r>
+          </a:p>
+        </p:txBody>
+      </p:sp>
+      <p:sp>
+        <p:nvSpPr>
+          <p:cNvPr id="31" name="Rectangle 30"/>
           <p:cNvSpPr/>
           <p:nvPr/>
         </p:nvSpPr>
         <p:spPr>
           <a:xfrm>
-            <a:off x="2377440" y="2322576"/>
-            <a:ext cx="1783080" cy="576072"/>
+            <a:off x="6217920" y="2322576"/>
+            <a:ext cx="1600200" cy="576072"/>
           </a:xfrm>
           <a:prstGeom prst="rect">
             <a:avLst/>
@@ -10272,14 +12659,14 @@
       </p:sp>
       <p:sp>
         <p:nvSpPr>
-          <p:cNvPr id="28" name="TextBox 27"/>
+          <p:cNvPr id="32" name="TextBox 31"/>
           <p:cNvSpPr txBox="1"/>
           <p:nvPr/>
         </p:nvSpPr>
         <p:spPr>
           <a:xfrm>
-            <a:off x="2377440" y="2395728"/>
-            <a:ext cx="1828800" cy="594360"/>
+            <a:off x="6217920" y="2395728"/>
+            <a:ext cx="1645920" cy="594360"/>
           </a:xfrm>
           <a:prstGeom prst="rect">
             <a:avLst/>
@@ -10299,27 +12686,61 @@
                   <a:srgbClr val="FFFFFF"/>
                 </a:solidFill>
               </a:rPr>
-              <a:t>97.65%</a:t>
-            </a:r>
-          </a:p>
-        </p:txBody>
-      </p:sp>
-      <p:sp>
-        <p:nvSpPr>
-          <p:cNvPr id="29" name="Rectangle 28"/>
+              <a:t>−1.03%</a:t>
+            </a:r>
+          </a:p>
+        </p:txBody>
+      </p:sp>
+      <p:sp>
+        <p:nvSpPr>
+          <p:cNvPr id="34" name="TextBox 33"/>
+          <p:cNvSpPr txBox="1"/>
+          <p:nvPr/>
+        </p:nvSpPr>
+        <p:spPr>
+          <a:xfrm>
+            <a:off x="8001000" y="2400299"/>
+            <a:ext cx="3200400" cy="594360"/>
+          </a:xfrm>
+          <a:prstGeom prst="rect">
+            <a:avLst/>
+          </a:prstGeom>
+          <a:noFill/>
+        </p:spPr>
+        <p:txBody>
+          <a:bodyPr wrap="square">
+            <a:spAutoFit/>
+          </a:bodyPr>
+          <a:lstStyle/>
+          <a:p>
+            <a:pPr algn="ctr"/>
+            <a:r>
+              <a:rPr sz="1700" b="0" i="0">
+                <a:solidFill>
+                  <a:srgbClr val="FFFFFF"/>
+                </a:solidFill>
+              </a:rPr>
+              <a:t>Strong, no convs</a:t>
+            </a:r>
+          </a:p>
+        </p:txBody>
+      </p:sp>
+      <p:sp>
+        <p:nvSpPr>
+          <p:cNvPr id="35" name="Rectangle 34"/>
           <p:cNvSpPr/>
           <p:nvPr/>
         </p:nvSpPr>
         <p:spPr>
           <a:xfrm>
-            <a:off x="4297680" y="2322576"/>
+            <a:off x="457200" y="2916936"/>
             <a:ext cx="1783080" cy="576072"/>
           </a:xfrm>
           <a:prstGeom prst="rect">
             <a:avLst/>
           </a:prstGeom>
           <a:solidFill>
-            <a:srgbClr val="0E2438"/>
+            <a:srgbClr val="0A301A"/>
           </a:solidFill>
           <a:ln>
             <a:noFill/>
@@ -10350,13 +12771,13 @@
       </p:sp>
       <p:sp>
         <p:nvSpPr>
-          <p:cNvPr id="30" name="TextBox 29"/>
+          <p:cNvPr id="36" name="TextBox 35"/>
           <p:cNvSpPr txBox="1"/>
           <p:nvPr/>
         </p:nvSpPr>
         <p:spPr>
           <a:xfrm>
-            <a:off x="4297680" y="2395728"/>
+            <a:off x="457200" y="2990088"/>
             <a:ext cx="1828800" cy="594360"/>
           </a:xfrm>
           <a:prstGeom prst="rect">
@@ -10372,32 +12793,32 @@
           <a:p>
             <a:pPr algn="ctr"/>
             <a:r>
-              <a:rPr sz="1700" b="0" i="0">
-                <a:solidFill>
-                  <a:srgbClr val="FFFFFF"/>
+              <a:rPr sz="1700" b="1" i="0">
+                <a:solidFill>
+                  <a:srgbClr val="FFD700"/>
                 </a:solidFill>
               </a:rPr>
-              <a:t>96.62%</a:t>
-            </a:r>
-          </a:p>
-        </p:txBody>
-      </p:sp>
-      <p:sp>
-        <p:nvSpPr>
-          <p:cNvPr id="31" name="Rectangle 30"/>
+              <a:t>CNN ★</a:t>
+            </a:r>
+          </a:p>
+        </p:txBody>
+      </p:sp>
+      <p:sp>
+        <p:nvSpPr>
+          <p:cNvPr id="37" name="Rectangle 36"/>
           <p:cNvSpPr/>
           <p:nvPr/>
         </p:nvSpPr>
         <p:spPr>
           <a:xfrm>
-            <a:off x="6217920" y="2322576"/>
-            <a:ext cx="1600200" cy="576072"/>
+            <a:off x="2377440" y="2916936"/>
+            <a:ext cx="1783080" cy="576072"/>
           </a:xfrm>
           <a:prstGeom prst="rect">
             <a:avLst/>
           </a:prstGeom>
           <a:solidFill>
-            <a:srgbClr val="0E2438"/>
+            <a:srgbClr val="0A301A"/>
           </a:solidFill>
           <a:ln>
             <a:noFill/>
@@ -10428,14 +12849,14 @@
       </p:sp>
       <p:sp>
         <p:nvSpPr>
-          <p:cNvPr id="32" name="TextBox 31"/>
+          <p:cNvPr id="38" name="TextBox 37"/>
           <p:cNvSpPr txBox="1"/>
           <p:nvPr/>
         </p:nvSpPr>
         <p:spPr>
           <a:xfrm>
-            <a:off x="6217920" y="2395728"/>
-            <a:ext cx="1645920" cy="594360"/>
+            <a:off x="2377440" y="2990088"/>
+            <a:ext cx="1828800" cy="594360"/>
           </a:xfrm>
           <a:prstGeom prst="rect">
             <a:avLst/>
@@ -10450,32 +12871,32 @@
           <a:p>
             <a:pPr algn="ctr"/>
             <a:r>
-              <a:rPr sz="1700" b="0" i="0">
-                <a:solidFill>
-                  <a:srgbClr val="FFFFFF"/>
+              <a:rPr sz="1700" b="1" i="0">
+                <a:solidFill>
+                  <a:srgbClr val="FFD700"/>
                 </a:solidFill>
               </a:rPr>
-              <a:t>−1.03%</a:t>
-            </a:r>
-          </a:p>
-        </p:txBody>
-      </p:sp>
-      <p:sp>
-        <p:nvSpPr>
-          <p:cNvPr id="33" name="Rectangle 32"/>
+              <a:t>99.01%</a:t>
+            </a:r>
+          </a:p>
+        </p:txBody>
+      </p:sp>
+      <p:sp>
+        <p:nvSpPr>
+          <p:cNvPr id="39" name="Rectangle 38"/>
           <p:cNvSpPr/>
           <p:nvPr/>
         </p:nvSpPr>
         <p:spPr>
           <a:xfrm>
-            <a:off x="7955279" y="2322576"/>
-            <a:ext cx="3154680" cy="576072"/>
+            <a:off x="4297680" y="2916936"/>
+            <a:ext cx="1783080" cy="576072"/>
           </a:xfrm>
           <a:prstGeom prst="rect">
             <a:avLst/>
           </a:prstGeom>
           <a:solidFill>
-            <a:srgbClr val="0E2438"/>
+            <a:srgbClr val="0A301A"/>
           </a:solidFill>
           <a:ln>
             <a:noFill/>
@@ -10506,14 +12927,14 @@
       </p:sp>
       <p:sp>
         <p:nvSpPr>
-          <p:cNvPr id="34" name="TextBox 33"/>
+          <p:cNvPr id="40" name="TextBox 39"/>
           <p:cNvSpPr txBox="1"/>
           <p:nvPr/>
         </p:nvSpPr>
         <p:spPr>
           <a:xfrm>
-            <a:off x="7955279" y="2395728"/>
-            <a:ext cx="3200400" cy="594360"/>
+            <a:off x="4297680" y="2990088"/>
+            <a:ext cx="1828800" cy="594360"/>
           </a:xfrm>
           <a:prstGeom prst="rect">
             <a:avLst/>
@@ -10528,26 +12949,26 @@
           <a:p>
             <a:pPr algn="ctr"/>
             <a:r>
-              <a:rPr sz="1700" b="0" i="0">
-                <a:solidFill>
-                  <a:srgbClr val="FFFFFF"/>
+              <a:rPr sz="1700" b="1" i="0">
+                <a:solidFill>
+                  <a:srgbClr val="FFD700"/>
                 </a:solidFill>
               </a:rPr>
-              <a:t>Strong, no convs</a:t>
-            </a:r>
-          </a:p>
-        </p:txBody>
-      </p:sp>
-      <p:sp>
-        <p:nvSpPr>
-          <p:cNvPr id="35" name="Rectangle 34"/>
+              <a:t>98.26%</a:t>
+            </a:r>
+          </a:p>
+        </p:txBody>
+      </p:sp>
+      <p:sp>
+        <p:nvSpPr>
+          <p:cNvPr id="41" name="Rectangle 40"/>
           <p:cNvSpPr/>
           <p:nvPr/>
         </p:nvSpPr>
         <p:spPr>
           <a:xfrm>
-            <a:off x="457200" y="2916936"/>
-            <a:ext cx="1783080" cy="576072"/>
+            <a:off x="6217920" y="2916936"/>
+            <a:ext cx="1600200" cy="576072"/>
           </a:xfrm>
           <a:prstGeom prst="rect">
             <a:avLst/>
@@ -10584,14 +13005,14 @@
       </p:sp>
       <p:sp>
         <p:nvSpPr>
-          <p:cNvPr id="36" name="TextBox 35"/>
+          <p:cNvPr id="42" name="TextBox 41"/>
           <p:cNvSpPr txBox="1"/>
           <p:nvPr/>
         </p:nvSpPr>
         <p:spPr>
           <a:xfrm>
-            <a:off x="457200" y="2990088"/>
-            <a:ext cx="1828800" cy="594360"/>
+            <a:off x="6217920" y="2990088"/>
+            <a:ext cx="1645920" cy="594360"/>
           </a:xfrm>
           <a:prstGeom prst="rect">
             <a:avLst/>
@@ -10611,65 +13032,21 @@
                   <a:srgbClr val="FFD700"/>
                 </a:solidFill>
               </a:rPr>
-              <a:t>CNN ★</a:t>
-            </a:r>
-          </a:p>
-        </p:txBody>
-      </p:sp>
-      <p:sp>
-        <p:nvSpPr>
-          <p:cNvPr id="37" name="Rectangle 36"/>
-          <p:cNvSpPr/>
-          <p:nvPr/>
-        </p:nvSpPr>
-        <p:spPr>
-          <a:xfrm>
-            <a:off x="2377440" y="2916936"/>
-            <a:ext cx="1783080" cy="576072"/>
-          </a:xfrm>
-          <a:prstGeom prst="rect">
-            <a:avLst/>
-          </a:prstGeom>
-          <a:solidFill>
-            <a:srgbClr val="0A301A"/>
-          </a:solidFill>
-          <a:ln>
-            <a:noFill/>
-          </a:ln>
-        </p:spPr>
-        <p:style>
-          <a:lnRef idx="1">
-            <a:schemeClr val="accent1"/>
-          </a:lnRef>
-          <a:fillRef idx="3">
-            <a:schemeClr val="accent1"/>
-          </a:fillRef>
-          <a:effectRef idx="2">
-            <a:schemeClr val="accent1"/>
-          </a:effectRef>
-          <a:fontRef idx="minor">
-            <a:schemeClr val="lt1"/>
-          </a:fontRef>
-        </p:style>
-        <p:txBody>
-          <a:bodyPr rtlCol="0" anchor="ctr"/>
-          <a:lstStyle/>
-          <a:p>
-            <a:pPr algn="ctr"/>
-            <a:endParaRPr/>
-          </a:p>
-        </p:txBody>
-      </p:sp>
-      <p:sp>
-        <p:nvSpPr>
-          <p:cNvPr id="38" name="TextBox 37"/>
+              <a:t>−0.75%</a:t>
+            </a:r>
+          </a:p>
+        </p:txBody>
+      </p:sp>
+      <p:sp>
+        <p:nvSpPr>
+          <p:cNvPr id="44" name="TextBox 43"/>
           <p:cNvSpPr txBox="1"/>
           <p:nvPr/>
         </p:nvSpPr>
         <p:spPr>
           <a:xfrm>
-            <a:off x="2377440" y="2990088"/>
-            <a:ext cx="1828800" cy="594360"/>
+            <a:off x="7863840" y="3022162"/>
+            <a:ext cx="3200400" cy="594360"/>
           </a:xfrm>
           <a:prstGeom prst="rect">
             <a:avLst/>
@@ -10684,241 +13061,7 @@
           <a:p>
             <a:pPr algn="ctr"/>
             <a:r>
-              <a:rPr sz="1700" b="1" i="0">
-                <a:solidFill>
-                  <a:srgbClr val="FFD700"/>
-                </a:solidFill>
-              </a:rPr>
-              <a:t>99.01%</a:t>
-            </a:r>
-          </a:p>
-        </p:txBody>
-      </p:sp>
-      <p:sp>
-        <p:nvSpPr>
-          <p:cNvPr id="39" name="Rectangle 38"/>
-          <p:cNvSpPr/>
-          <p:nvPr/>
-        </p:nvSpPr>
-        <p:spPr>
-          <a:xfrm>
-            <a:off x="4297680" y="2916936"/>
-            <a:ext cx="1783080" cy="576072"/>
-          </a:xfrm>
-          <a:prstGeom prst="rect">
-            <a:avLst/>
-          </a:prstGeom>
-          <a:solidFill>
-            <a:srgbClr val="0A301A"/>
-          </a:solidFill>
-          <a:ln>
-            <a:noFill/>
-          </a:ln>
-        </p:spPr>
-        <p:style>
-          <a:lnRef idx="1">
-            <a:schemeClr val="accent1"/>
-          </a:lnRef>
-          <a:fillRef idx="3">
-            <a:schemeClr val="accent1"/>
-          </a:fillRef>
-          <a:effectRef idx="2">
-            <a:schemeClr val="accent1"/>
-          </a:effectRef>
-          <a:fontRef idx="minor">
-            <a:schemeClr val="lt1"/>
-          </a:fontRef>
-        </p:style>
-        <p:txBody>
-          <a:bodyPr rtlCol="0" anchor="ctr"/>
-          <a:lstStyle/>
-          <a:p>
-            <a:pPr algn="ctr"/>
-            <a:endParaRPr/>
-          </a:p>
-        </p:txBody>
-      </p:sp>
-      <p:sp>
-        <p:nvSpPr>
-          <p:cNvPr id="40" name="TextBox 39"/>
-          <p:cNvSpPr txBox="1"/>
-          <p:nvPr/>
-        </p:nvSpPr>
-        <p:spPr>
-          <a:xfrm>
-            <a:off x="4297680" y="2990088"/>
-            <a:ext cx="1828800" cy="594360"/>
-          </a:xfrm>
-          <a:prstGeom prst="rect">
-            <a:avLst/>
-          </a:prstGeom>
-          <a:noFill/>
-        </p:spPr>
-        <p:txBody>
-          <a:bodyPr wrap="square">
-            <a:spAutoFit/>
-          </a:bodyPr>
-          <a:lstStyle/>
-          <a:p>
-            <a:pPr algn="ctr"/>
-            <a:r>
-              <a:rPr sz="1700" b="1" i="0">
-                <a:solidFill>
-                  <a:srgbClr val="FFD700"/>
-                </a:solidFill>
-              </a:rPr>
-              <a:t>98.26%</a:t>
-            </a:r>
-          </a:p>
-        </p:txBody>
-      </p:sp>
-      <p:sp>
-        <p:nvSpPr>
-          <p:cNvPr id="41" name="Rectangle 40"/>
-          <p:cNvSpPr/>
-          <p:nvPr/>
-        </p:nvSpPr>
-        <p:spPr>
-          <a:xfrm>
-            <a:off x="6217920" y="2916936"/>
-            <a:ext cx="1600200" cy="576072"/>
-          </a:xfrm>
-          <a:prstGeom prst="rect">
-            <a:avLst/>
-          </a:prstGeom>
-          <a:solidFill>
-            <a:srgbClr val="0A301A"/>
-          </a:solidFill>
-          <a:ln>
-            <a:noFill/>
-          </a:ln>
-        </p:spPr>
-        <p:style>
-          <a:lnRef idx="1">
-            <a:schemeClr val="accent1"/>
-          </a:lnRef>
-          <a:fillRef idx="3">
-            <a:schemeClr val="accent1"/>
-          </a:fillRef>
-          <a:effectRef idx="2">
-            <a:schemeClr val="accent1"/>
-          </a:effectRef>
-          <a:fontRef idx="minor">
-            <a:schemeClr val="lt1"/>
-          </a:fontRef>
-        </p:style>
-        <p:txBody>
-          <a:bodyPr rtlCol="0" anchor="ctr"/>
-          <a:lstStyle/>
-          <a:p>
-            <a:pPr algn="ctr"/>
-            <a:endParaRPr/>
-          </a:p>
-        </p:txBody>
-      </p:sp>
-      <p:sp>
-        <p:nvSpPr>
-          <p:cNvPr id="42" name="TextBox 41"/>
-          <p:cNvSpPr txBox="1"/>
-          <p:nvPr/>
-        </p:nvSpPr>
-        <p:spPr>
-          <a:xfrm>
-            <a:off x="6217920" y="2990088"/>
-            <a:ext cx="1645920" cy="594360"/>
-          </a:xfrm>
-          <a:prstGeom prst="rect">
-            <a:avLst/>
-          </a:prstGeom>
-          <a:noFill/>
-        </p:spPr>
-        <p:txBody>
-          <a:bodyPr wrap="square">
-            <a:spAutoFit/>
-          </a:bodyPr>
-          <a:lstStyle/>
-          <a:p>
-            <a:pPr algn="ctr"/>
-            <a:r>
-              <a:rPr sz="1700" b="1" i="0">
-                <a:solidFill>
-                  <a:srgbClr val="FFD700"/>
-                </a:solidFill>
-              </a:rPr>
-              <a:t>−0.75%</a:t>
-            </a:r>
-          </a:p>
-        </p:txBody>
-      </p:sp>
-      <p:sp>
-        <p:nvSpPr>
-          <p:cNvPr id="43" name="Rectangle 42"/>
-          <p:cNvSpPr/>
-          <p:nvPr/>
-        </p:nvSpPr>
-        <p:spPr>
-          <a:xfrm>
-            <a:off x="7955279" y="2916936"/>
-            <a:ext cx="3154680" cy="576072"/>
-          </a:xfrm>
-          <a:prstGeom prst="rect">
-            <a:avLst/>
-          </a:prstGeom>
-          <a:solidFill>
-            <a:srgbClr val="0A301A"/>
-          </a:solidFill>
-          <a:ln>
-            <a:noFill/>
-          </a:ln>
-        </p:spPr>
-        <p:style>
-          <a:lnRef idx="1">
-            <a:schemeClr val="accent1"/>
-          </a:lnRef>
-          <a:fillRef idx="3">
-            <a:schemeClr val="accent1"/>
-          </a:fillRef>
-          <a:effectRef idx="2">
-            <a:schemeClr val="accent1"/>
-          </a:effectRef>
-          <a:fontRef idx="minor">
-            <a:schemeClr val="lt1"/>
-          </a:fontRef>
-        </p:style>
-        <p:txBody>
-          <a:bodyPr rtlCol="0" anchor="ctr"/>
-          <a:lstStyle/>
-          <a:p>
-            <a:pPr algn="ctr"/>
-            <a:endParaRPr/>
-          </a:p>
-        </p:txBody>
-      </p:sp>
-      <p:sp>
-        <p:nvSpPr>
-          <p:cNvPr id="44" name="TextBox 43"/>
-          <p:cNvSpPr txBox="1"/>
-          <p:nvPr/>
-        </p:nvSpPr>
-        <p:spPr>
-          <a:xfrm>
-            <a:off x="7955279" y="2990088"/>
-            <a:ext cx="3200400" cy="594360"/>
-          </a:xfrm>
-          <a:prstGeom prst="rect">
-            <a:avLst/>
-          </a:prstGeom>
-          <a:noFill/>
-        </p:spPr>
-        <p:txBody>
-          <a:bodyPr wrap="square">
-            <a:spAutoFit/>
-          </a:bodyPr>
-          <a:lstStyle/>
-          <a:p>
-            <a:pPr algn="ctr"/>
-            <a:r>
-              <a:rPr sz="1700" b="1" i="0">
+              <a:rPr sz="1700" b="1" i="0" dirty="0">
                 <a:solidFill>
                   <a:srgbClr val="FFD700"/>
                 </a:solidFill>

--- a/Assignment4.1-MNIST_Presentation.pptx
+++ b/Assignment4.1-MNIST_Presentation.pptx
@@ -6769,6 +6769,19 @@
               </a:rPr>
               <a:t>The Problem</a:t>
             </a:r>
+            <a:r>
+              <a:rPr lang="en-US" sz="2100" b="1" dirty="0">
+                <a:solidFill>
+                  <a:srgbClr val="00C2FF"/>
+                </a:solidFill>
+              </a:rPr>
+              <a:t> &amp; Dataset</a:t>
+            </a:r>
+            <a:endParaRPr sz="2100" b="1" dirty="0">
+              <a:solidFill>
+                <a:srgbClr val="00C2FF"/>
+              </a:solidFill>
+            </a:endParaRPr>
           </a:p>
           <a:p>
             <a:pPr algn="l">
@@ -6782,7 +6795,23 @@
                   <a:srgbClr val="CCE5FF"/>
                 </a:solidFill>
               </a:rPr>
-              <a:t>•  Classify handwritten digits 0–9</a:t>
+              <a:t>•  Classify handwritten digits 0</a:t>
+            </a:r>
+            <a:r>
+              <a:rPr lang="en-US" sz="1900" dirty="0">
+                <a:solidFill>
+                  <a:srgbClr val="CCE5FF"/>
+                </a:solidFill>
+              </a:rPr>
+              <a:t>-</a:t>
+            </a:r>
+            <a:r>
+              <a:rPr sz="1900" dirty="0">
+                <a:solidFill>
+                  <a:srgbClr val="CCE5FF"/>
+                </a:solidFill>
+              </a:rPr>
+              <a:t>9</a:t>
             </a:r>
           </a:p>
           <a:p>
@@ -6832,8 +6861,8 @@
           </a:p>
         </p:txBody>
       </p:sp>
-      <mc:AlternateContent xmlns:mc="http://schemas.openxmlformats.org/markup-compatibility/2006">
-        <mc:Choice xmlns:a14="http://schemas.microsoft.com/office/drawing/2010/main" Requires="a14">
+      <mc:AlternateContent xmlns:mc="http://schemas.openxmlformats.org/markup-compatibility/2006" xmlns:a14="http://schemas.microsoft.com/office/drawing/2010/main">
+        <mc:Choice Requires="a14">
           <p:sp>
             <p:nvSpPr>
               <p:cNvPr id="7" name="TextBox 6"/>
@@ -6916,10 +6945,11 @@
                     <m:sSup>
                       <m:sSupPr>
                         <m:ctrlPr>
-                          <a:rPr lang="ar-AE" sz="1900">
+                          <a:rPr lang="ar-AE" sz="1900" i="1">
                             <a:solidFill>
                               <a:srgbClr val="CCE5FF"/>
                             </a:solidFill>
+                            <a:latin typeface="Cambria Math" panose="02040503050406030204" pitchFamily="18" charset="0"/>
                           </a:rPr>
                         </m:ctrlPr>
                       </m:sSupPr>
@@ -6929,6 +6959,7 @@
                             <a:solidFill>
                               <a:srgbClr val="CCE5FF"/>
                             </a:solidFill>
+                            <a:latin typeface="Cambria Math" panose="02040503050406030204" pitchFamily="18" charset="0"/>
                           </a:rPr>
                           <m:t>𝑥</m:t>
                         </m:r>
@@ -6939,6 +6970,7 @@
                             <a:solidFill>
                               <a:srgbClr val="CCE5FF"/>
                             </a:solidFill>
+                            <a:latin typeface="Cambria Math" panose="02040503050406030204" pitchFamily="18" charset="0"/>
                           </a:rPr>
                           <m:t>′</m:t>
                         </m:r>
@@ -6949,16 +6981,18 @@
                         <a:solidFill>
                           <a:srgbClr val="CCE5FF"/>
                         </a:solidFill>
+                        <a:latin typeface="Cambria Math" panose="02040503050406030204" pitchFamily="18" charset="0"/>
                       </a:rPr>
                       <m:t>=</m:t>
                     </m:r>
                     <m:f>
                       <m:fPr>
                         <m:ctrlPr>
-                          <a:rPr lang="ar-AE" sz="1900">
+                          <a:rPr lang="ar-AE" sz="1900" i="1">
                             <a:solidFill>
                               <a:srgbClr val="CCE5FF"/>
                             </a:solidFill>
+                            <a:latin typeface="Cambria Math" panose="02040503050406030204" pitchFamily="18" charset="0"/>
                           </a:rPr>
                         </m:ctrlPr>
                       </m:fPr>
@@ -6968,6 +7002,7 @@
                             <a:solidFill>
                               <a:srgbClr val="CCE5FF"/>
                             </a:solidFill>
+                            <a:latin typeface="Cambria Math" panose="02040503050406030204" pitchFamily="18" charset="0"/>
                           </a:rPr>
                           <m:t>𝑥</m:t>
                         </m:r>
@@ -6976,6 +7011,7 @@
                             <a:solidFill>
                               <a:srgbClr val="CCE5FF"/>
                             </a:solidFill>
+                            <a:latin typeface="Cambria Math" panose="02040503050406030204" pitchFamily="18" charset="0"/>
                           </a:rPr>
                           <m:t>−0.5</m:t>
                         </m:r>
@@ -6986,6 +7022,7 @@
                             <a:solidFill>
                               <a:srgbClr val="CCE5FF"/>
                             </a:solidFill>
+                            <a:latin typeface="Cambria Math" panose="02040503050406030204" pitchFamily="18" charset="0"/>
                           </a:rPr>
                           <m:t>0.5</m:t>
                         </m:r>
@@ -7068,7 +7105,7 @@
             </p:txBody>
           </p:sp>
         </mc:Choice>
-        <mc:Fallback>
+        <mc:Fallback xmlns="">
           <p:sp>
             <p:nvSpPr>
               <p:cNvPr id="7" name="TextBox 6"/>
@@ -13895,7 +13932,7 @@
         <p:spPr>
           <a:xfrm>
             <a:off x="685800" y="1618488"/>
-            <a:ext cx="10789920" cy="594360"/>
+            <a:ext cx="10789920" cy="584775"/>
           </a:xfrm>
           <a:prstGeom prst="rect">
             <a:avLst/>
@@ -13910,13 +13947,18 @@
           <a:p>
             <a:pPr algn="l"/>
             <a:r>
-              <a:rPr sz="1600" b="0" i="0">
+              <a:rPr lang="en-US" sz="1600" b="0" i="0" dirty="0">
                 <a:solidFill>
                   <a:srgbClr val="CCE5FF"/>
                 </a:solidFill>
               </a:rPr>
-              <a:t>Spatial inductive bias → highest accuracy + best noise robustness (99.01% clean, −0.75% noise drop).</a:t>
-            </a:r>
+              <a:t>Because it understands the 2D structure of images, CNN scored the highest — 99.01% on clean images and only dropped by 0.75% under noise.</a:t>
+            </a:r>
+            <a:endParaRPr sz="1600" b="0" i="0" dirty="0">
+              <a:solidFill>
+                <a:srgbClr val="CCE5FF"/>
+              </a:solidFill>
+            </a:endParaRPr>
           </a:p>
         </p:txBody>
       </p:sp>
@@ -14007,7 +14049,7 @@
         <p:spPr>
           <a:xfrm>
             <a:off x="685800" y="2880360"/>
-            <a:ext cx="10789920" cy="594360"/>
+            <a:ext cx="10789920" cy="584775"/>
           </a:xfrm>
           <a:prstGeom prst="rect">
             <a:avLst/>
@@ -14022,13 +14064,18 @@
           <a:p>
             <a:pPr algn="l"/>
             <a:r>
-              <a:rPr sz="1600" b="0" i="0">
+              <a:rPr lang="en-US" sz="1600" b="0" i="0" dirty="0">
                 <a:solidFill>
                   <a:srgbClr val="CCE5FF"/>
                 </a:solidFill>
               </a:rPr>
-              <a:t>Self-attention captures global context; 97.65% clean accuracy with pure attention on 28×28 images.</a:t>
-            </a:r>
+              <a:t>By splitting the image into patches and using attention to connect them, the Transformer achieved 97.65% accuracy without any convolutional layers.</a:t>
+            </a:r>
+            <a:endParaRPr sz="1600" b="0" i="0" dirty="0">
+              <a:solidFill>
+                <a:srgbClr val="CCE5FF"/>
+              </a:solidFill>
+            </a:endParaRPr>
           </a:p>
         </p:txBody>
       </p:sp>
@@ -14119,7 +14166,7 @@
         <p:spPr>
           <a:xfrm>
             <a:off x="685800" y="4142232"/>
-            <a:ext cx="10789920" cy="594360"/>
+            <a:ext cx="10789920" cy="584775"/>
           </a:xfrm>
           <a:prstGeom prst="rect">
             <a:avLst/>
@@ -14134,13 +14181,18 @@
           <a:p>
             <a:pPr algn="l"/>
             <a:r>
-              <a:rPr sz="1600" b="0" i="0">
+              <a:rPr lang="en-US" sz="1600" b="0" i="0" dirty="0">
                 <a:solidFill>
                   <a:srgbClr val="CCE5FF"/>
                 </a:solidFill>
               </a:rPr>
-              <a:t>96.94% accuracy despite zero spatial awareness — flattening loses structure but MNIST is simple enough.</a:t>
-            </a:r>
+              <a:t>Even though MLP throws away all spatial information by flattening the image into a 1D vector, it still reached 96.94% — showing MNIST is simple enough for a plain fully-connected network.</a:t>
+            </a:r>
+            <a:endParaRPr sz="1600" b="0" i="0" dirty="0">
+              <a:solidFill>
+                <a:srgbClr val="CCE5FF"/>
+              </a:solidFill>
+            </a:endParaRPr>
           </a:p>
         </p:txBody>
       </p:sp>
@@ -14231,7 +14283,7 @@
         <p:spPr>
           <a:xfrm>
             <a:off x="685800" y="5404104"/>
-            <a:ext cx="10789920" cy="594360"/>
+            <a:ext cx="10789920" cy="584775"/>
           </a:xfrm>
           <a:prstGeom prst="rect">
             <a:avLst/>
@@ -14246,13 +14298,18 @@
           <a:p>
             <a:pPr algn="l"/>
             <a:r>
-              <a:rPr sz="1600" b="0" i="0">
+              <a:rPr lang="en-US" sz="1600" b="0" i="0" dirty="0">
                 <a:solidFill>
                   <a:srgbClr val="CCE5FF"/>
                 </a:solidFill>
               </a:rPr>
-              <a:t>All models drop &lt; 1.1%; CNN loses the least (−0.75%), showing convolutions learn robust features.</a:t>
-            </a:r>
+              <a:t>Adding random noise to test images dropped accuracy by less than 1.1% across all three models. CNN was the most resilient, losing only 0.75%.</a:t>
+            </a:r>
+            <a:endParaRPr sz="1600" b="0" i="0" dirty="0">
+              <a:solidFill>
+                <a:srgbClr val="CCE5FF"/>
+              </a:solidFill>
+            </a:endParaRPr>
           </a:p>
         </p:txBody>
       </p:sp>
